--- a/examples/recreations/03_Box_Secretary__ArtNonprofit_Info_Planning_Meeting_20201220/out_mat2ppt.pptx
+++ b/examples/recreations/03_Box_Secretary__ArtNonprofit_Info_Planning_Meeting_20201220/out_mat2ppt.pptx
@@ -3098,6 +3098,132 @@
         <p:nvPr/>
       </p:nvGrpSpPr>
       <p:grpSpPr/>
+      <p:pic>
+        <p:nvPicPr>
+          <p:cNvPr id="2" name="Picture 1" descr="image2.jpeg"/>
+          <p:cNvPicPr>
+            <a:picLocks noChangeAspect="1"/>
+          </p:cNvPicPr>
+          <p:nvPr/>
+        </p:nvPicPr>
+        <p:blipFill>
+          <a:blip r:embed="rId2"/>
+          <a:stretch>
+            <a:fillRect/>
+          </a:stretch>
+        </p:blipFill>
+        <p:spPr>
+          <a:xfrm>
+            <a:off x="188120" y="5525929"/>
+            <a:ext cx="1143000" cy="1224229"/>
+          </a:xfrm>
+          <a:prstGeom prst="rect">
+            <a:avLst/>
+          </a:prstGeom>
+        </p:spPr>
+      </p:pic>
+      <p:pic>
+        <p:nvPicPr>
+          <p:cNvPr id="3" name="Picture 2" descr="image3.jpg"/>
+          <p:cNvPicPr>
+            <a:picLocks noChangeAspect="1"/>
+          </p:cNvPicPr>
+          <p:nvPr/>
+        </p:nvPicPr>
+        <p:blipFill>
+          <a:blip r:embed="rId3"/>
+          <a:stretch>
+            <a:fillRect/>
+          </a:stretch>
+        </p:blipFill>
+        <p:spPr>
+          <a:xfrm>
+            <a:off x="10638881" y="139366"/>
+            <a:ext cx="1410420" cy="1371600"/>
+          </a:xfrm>
+          <a:prstGeom prst="rect">
+            <a:avLst/>
+          </a:prstGeom>
+        </p:spPr>
+      </p:pic>
+      <p:sp>
+        <p:nvSpPr>
+          <p:cNvPr id="4" name="Rectangle 3"/>
+          <p:cNvSpPr/>
+          <p:nvPr/>
+        </p:nvSpPr>
+        <p:spPr>
+          <a:xfrm>
+            <a:off x="838200" y="365125"/>
+            <a:ext cx="10515600" cy="1325563"/>
+          </a:xfrm>
+          <a:prstGeom prst="rect">
+            <a:avLst/>
+          </a:prstGeom>
+        </p:spPr>
+        <p:style>
+          <a:lnRef idx="1">
+            <a:schemeClr val="accent1"/>
+          </a:lnRef>
+          <a:fillRef idx="3">
+            <a:schemeClr val="accent1"/>
+          </a:fillRef>
+          <a:effectRef idx="2">
+            <a:schemeClr val="accent1"/>
+          </a:effectRef>
+          <a:fontRef idx="minor">
+            <a:schemeClr val="lt1"/>
+          </a:fontRef>
+        </p:style>
+        <p:txBody>
+          <a:bodyPr rtlCol="0" anchor="ctr"/>
+          <a:lstStyle/>
+          <a:p>
+            <a:r>
+              <a:t>Art Non-profit</a:t>
+            </a:r>
+          </a:p>
+        </p:txBody>
+      </p:sp>
+      <p:sp>
+        <p:nvSpPr>
+          <p:cNvPr id="5" name="Rectangle 4"/>
+          <p:cNvSpPr/>
+          <p:nvPr/>
+        </p:nvSpPr>
+        <p:spPr>
+          <a:xfrm>
+            <a:off x="838200" y="365125"/>
+            <a:ext cx="10515600" cy="1325563"/>
+          </a:xfrm>
+          <a:prstGeom prst="rect">
+            <a:avLst/>
+          </a:prstGeom>
+        </p:spPr>
+        <p:style>
+          <a:lnRef idx="1">
+            <a:schemeClr val="accent1"/>
+          </a:lnRef>
+          <a:fillRef idx="3">
+            <a:schemeClr val="accent1"/>
+          </a:fillRef>
+          <a:effectRef idx="2">
+            <a:schemeClr val="accent1"/>
+          </a:effectRef>
+          <a:fontRef idx="minor">
+            <a:schemeClr val="lt1"/>
+          </a:fontRef>
+        </p:style>
+        <p:txBody>
+          <a:bodyPr rtlCol="0" anchor="ctr"/>
+          <a:lstStyle/>
+          <a:p>
+            <a:r>
+              <a:t>Informational and Planning MeetingDecember 20, 2020</a:t>
+            </a:r>
+          </a:p>
+        </p:txBody>
+      </p:sp>
     </p:spTree>
   </p:cSld>
   <p:clrMapOvr>
@@ -3116,9 +3242,57 @@
         <p:nvPr/>
       </p:nvGrpSpPr>
       <p:grpSpPr/>
-      <p:sp>
-        <p:nvSpPr>
-          <p:cNvPr id="2" name="Rectangle 1"/>
+      <p:pic>
+        <p:nvPicPr>
+          <p:cNvPr id="2" name="Picture 1" descr="image2.jpeg"/>
+          <p:cNvPicPr>
+            <a:picLocks noChangeAspect="1"/>
+          </p:cNvPicPr>
+          <p:nvPr/>
+        </p:nvPicPr>
+        <p:blipFill>
+          <a:blip r:embed="rId2"/>
+          <a:stretch>
+            <a:fillRect/>
+          </a:stretch>
+        </p:blipFill>
+        <p:spPr>
+          <a:xfrm>
+            <a:off x="188120" y="5525929"/>
+            <a:ext cx="1143000" cy="1224229"/>
+          </a:xfrm>
+          <a:prstGeom prst="rect">
+            <a:avLst/>
+          </a:prstGeom>
+        </p:spPr>
+      </p:pic>
+      <p:pic>
+        <p:nvPicPr>
+          <p:cNvPr id="3" name="Picture 2" descr="image3.jpg"/>
+          <p:cNvPicPr>
+            <a:picLocks noChangeAspect="1"/>
+          </p:cNvPicPr>
+          <p:nvPr/>
+        </p:nvPicPr>
+        <p:blipFill>
+          <a:blip r:embed="rId3"/>
+          <a:stretch>
+            <a:fillRect/>
+          </a:stretch>
+        </p:blipFill>
+        <p:spPr>
+          <a:xfrm>
+            <a:off x="10638881" y="139366"/>
+            <a:ext cx="1410420" cy="1371600"/>
+          </a:xfrm>
+          <a:prstGeom prst="rect">
+            <a:avLst/>
+          </a:prstGeom>
+        </p:spPr>
+      </p:pic>
+      <p:sp>
+        <p:nvSpPr>
+          <p:cNvPr id="4" name="Rectangle 3"/>
           <p:cNvSpPr/>
           <p:nvPr/>
         </p:nvSpPr>
@@ -3173,6 +3347,93 @@
         <p:nvPr/>
       </p:nvGrpSpPr>
       <p:grpSpPr/>
+      <p:pic>
+        <p:nvPicPr>
+          <p:cNvPr id="2" name="Picture 1" descr="image2.jpeg"/>
+          <p:cNvPicPr>
+            <a:picLocks noChangeAspect="1"/>
+          </p:cNvPicPr>
+          <p:nvPr/>
+        </p:nvPicPr>
+        <p:blipFill>
+          <a:blip r:embed="rId2"/>
+          <a:stretch>
+            <a:fillRect/>
+          </a:stretch>
+        </p:blipFill>
+        <p:spPr>
+          <a:xfrm>
+            <a:off x="188120" y="5525929"/>
+            <a:ext cx="1143000" cy="1224229"/>
+          </a:xfrm>
+          <a:prstGeom prst="rect">
+            <a:avLst/>
+          </a:prstGeom>
+        </p:spPr>
+      </p:pic>
+      <p:pic>
+        <p:nvPicPr>
+          <p:cNvPr id="3" name="Picture 2" descr="image3.jpg"/>
+          <p:cNvPicPr>
+            <a:picLocks noChangeAspect="1"/>
+          </p:cNvPicPr>
+          <p:nvPr/>
+        </p:nvPicPr>
+        <p:blipFill>
+          <a:blip r:embed="rId3"/>
+          <a:stretch>
+            <a:fillRect/>
+          </a:stretch>
+        </p:blipFill>
+        <p:spPr>
+          <a:xfrm>
+            <a:off x="10638881" y="139366"/>
+            <a:ext cx="1410420" cy="1371600"/>
+          </a:xfrm>
+          <a:prstGeom prst="rect">
+            <a:avLst/>
+          </a:prstGeom>
+        </p:spPr>
+      </p:pic>
+      <p:sp>
+        <p:nvSpPr>
+          <p:cNvPr id="4" name="Rectangle 3"/>
+          <p:cNvSpPr/>
+          <p:nvPr/>
+        </p:nvSpPr>
+        <p:spPr>
+          <a:xfrm>
+            <a:off x="838200" y="365125"/>
+            <a:ext cx="10515600" cy="1325563"/>
+          </a:xfrm>
+          <a:prstGeom prst="rect">
+            <a:avLst/>
+          </a:prstGeom>
+        </p:spPr>
+        <p:style>
+          <a:lnRef idx="1">
+            <a:schemeClr val="accent1"/>
+          </a:lnRef>
+          <a:fillRef idx="3">
+            <a:schemeClr val="accent1"/>
+          </a:fillRef>
+          <a:effectRef idx="2">
+            <a:schemeClr val="accent1"/>
+          </a:effectRef>
+          <a:fontRef idx="minor">
+            <a:schemeClr val="lt1"/>
+          </a:fontRef>
+        </p:style>
+        <p:txBody>
+          <a:bodyPr rtlCol="0" anchor="ctr"/>
+          <a:lstStyle/>
+          <a:p>
+            <a:r>
+              <a:t>Resources</a:t>
+            </a:r>
+          </a:p>
+        </p:txBody>
+      </p:sp>
     </p:spTree>
   </p:cSld>
   <p:clrMapOvr>
@@ -3191,9 +3452,96 @@
         <p:nvPr/>
       </p:nvGrpSpPr>
       <p:grpSpPr/>
-      <p:sp>
-        <p:nvSpPr>
-          <p:cNvPr id="2" name="Rectangle 1"/>
+      <p:pic>
+        <p:nvPicPr>
+          <p:cNvPr id="2" name="Picture 1" descr="image2.jpeg"/>
+          <p:cNvPicPr>
+            <a:picLocks noChangeAspect="1"/>
+          </p:cNvPicPr>
+          <p:nvPr/>
+        </p:nvPicPr>
+        <p:blipFill>
+          <a:blip r:embed="rId2"/>
+          <a:stretch>
+            <a:fillRect/>
+          </a:stretch>
+        </p:blipFill>
+        <p:spPr>
+          <a:xfrm>
+            <a:off x="188120" y="5525929"/>
+            <a:ext cx="1143000" cy="1224229"/>
+          </a:xfrm>
+          <a:prstGeom prst="rect">
+            <a:avLst/>
+          </a:prstGeom>
+        </p:spPr>
+      </p:pic>
+      <p:pic>
+        <p:nvPicPr>
+          <p:cNvPr id="3" name="Picture 2" descr="image3.jpg"/>
+          <p:cNvPicPr>
+            <a:picLocks noChangeAspect="1"/>
+          </p:cNvPicPr>
+          <p:nvPr/>
+        </p:nvPicPr>
+        <p:blipFill>
+          <a:blip r:embed="rId3"/>
+          <a:stretch>
+            <a:fillRect/>
+          </a:stretch>
+        </p:blipFill>
+        <p:spPr>
+          <a:xfrm>
+            <a:off x="10638881" y="139366"/>
+            <a:ext cx="1410420" cy="1371600"/>
+          </a:xfrm>
+          <a:prstGeom prst="rect">
+            <a:avLst/>
+          </a:prstGeom>
+        </p:spPr>
+      </p:pic>
+      <p:sp>
+        <p:nvSpPr>
+          <p:cNvPr id="4" name="Rectangle 3"/>
+          <p:cNvSpPr/>
+          <p:nvPr/>
+        </p:nvSpPr>
+        <p:spPr>
+          <a:xfrm>
+            <a:off x="838200" y="365125"/>
+            <a:ext cx="10515600" cy="1325563"/>
+          </a:xfrm>
+          <a:prstGeom prst="rect">
+            <a:avLst/>
+          </a:prstGeom>
+        </p:spPr>
+        <p:style>
+          <a:lnRef idx="1">
+            <a:schemeClr val="accent1"/>
+          </a:lnRef>
+          <a:fillRef idx="3">
+            <a:schemeClr val="accent1"/>
+          </a:fillRef>
+          <a:effectRef idx="2">
+            <a:schemeClr val="accent1"/>
+          </a:effectRef>
+          <a:fontRef idx="minor">
+            <a:schemeClr val="lt1"/>
+          </a:fontRef>
+        </p:style>
+        <p:txBody>
+          <a:bodyPr rtlCol="0" anchor="ctr"/>
+          <a:lstStyle/>
+          <a:p>
+            <a:r>
+              <a:t>Overview</a:t>
+            </a:r>
+          </a:p>
+        </p:txBody>
+      </p:sp>
+      <p:sp>
+        <p:nvSpPr>
+          <p:cNvPr id="5" name="Rectangle 4"/>
           <p:cNvSpPr/>
           <p:nvPr/>
         </p:nvSpPr>
@@ -3248,16 +3596,64 @@
         <p:nvPr/>
       </p:nvGrpSpPr>
       <p:grpSpPr/>
-      <p:sp>
-        <p:nvSpPr>
-          <p:cNvPr id="2" name="Rectangle 1"/>
+      <p:pic>
+        <p:nvPicPr>
+          <p:cNvPr id="2" name="Picture 1" descr="image2.jpeg"/>
+          <p:cNvPicPr>
+            <a:picLocks noChangeAspect="1"/>
+          </p:cNvPicPr>
+          <p:nvPr/>
+        </p:nvPicPr>
+        <p:blipFill>
+          <a:blip r:embed="rId2"/>
+          <a:stretch>
+            <a:fillRect/>
+          </a:stretch>
+        </p:blipFill>
+        <p:spPr>
+          <a:xfrm>
+            <a:off x="188120" y="5525929"/>
+            <a:ext cx="1143000" cy="1224229"/>
+          </a:xfrm>
+          <a:prstGeom prst="rect">
+            <a:avLst/>
+          </a:prstGeom>
+        </p:spPr>
+      </p:pic>
+      <p:pic>
+        <p:nvPicPr>
+          <p:cNvPr id="3" name="Picture 2" descr="image3.jpg"/>
+          <p:cNvPicPr>
+            <a:picLocks noChangeAspect="1"/>
+          </p:cNvPicPr>
+          <p:nvPr/>
+        </p:nvPicPr>
+        <p:blipFill>
+          <a:blip r:embed="rId3"/>
+          <a:stretch>
+            <a:fillRect/>
+          </a:stretch>
+        </p:blipFill>
+        <p:spPr>
+          <a:xfrm>
+            <a:off x="10638881" y="139366"/>
+            <a:ext cx="1410420" cy="1371600"/>
+          </a:xfrm>
+          <a:prstGeom prst="rect">
+            <a:avLst/>
+          </a:prstGeom>
+        </p:spPr>
+      </p:pic>
+      <p:sp>
+        <p:nvSpPr>
+          <p:cNvPr id="4" name="Rectangle 3"/>
           <p:cNvSpPr/>
           <p:nvPr/>
         </p:nvSpPr>
         <p:spPr>
           <a:xfrm>
-            <a:off x="493095" y="1160585"/>
-            <a:ext cx="10515600" cy="4623630"/>
+            <a:off x="838200" y="365125"/>
+            <a:ext cx="10515600" cy="1325563"/>
           </a:xfrm>
           <a:prstGeom prst="rect">
             <a:avLst/>
@@ -3282,6 +3678,45 @@
           <a:lstStyle/>
           <a:p>
             <a:r>
+              <a:t>Holy Child Project Overview</a:t>
+            </a:r>
+          </a:p>
+        </p:txBody>
+      </p:sp>
+      <p:sp>
+        <p:nvSpPr>
+          <p:cNvPr id="5" name="Rectangle 4"/>
+          <p:cNvSpPr/>
+          <p:nvPr/>
+        </p:nvSpPr>
+        <p:spPr>
+          <a:xfrm>
+            <a:off x="493095" y="1160585"/>
+            <a:ext cx="10515600" cy="4623630"/>
+          </a:xfrm>
+          <a:prstGeom prst="rect">
+            <a:avLst/>
+          </a:prstGeom>
+        </p:spPr>
+        <p:style>
+          <a:lnRef idx="1">
+            <a:schemeClr val="accent1"/>
+          </a:lnRef>
+          <a:fillRef idx="3">
+            <a:schemeClr val="accent1"/>
+          </a:fillRef>
+          <a:effectRef idx="2">
+            <a:schemeClr val="accent1"/>
+          </a:effectRef>
+          <a:fontRef idx="minor">
+            <a:schemeClr val="lt1"/>
+          </a:fontRef>
+        </p:style>
+        <p:txBody>
+          <a:bodyPr rtlCol="0" anchor="ctr"/>
+          <a:lstStyle/>
+          <a:p>
+            <a:r>
               <a:t>Mother Seton Hall art schema finishedFive main hallway sections, plus intro, closing, and side hallwaysFocus is on reproductions of masterpiece paintings and will not include photos of statues and other architectureEach main section to cover an era of history Also looking to highlight art history Intro section complete10 paintings for just over $10k Modern Era Funding Promised – Currently in RFQ StageTwo pieces awaiting final down select15 paintings for $10.5k-14kFundraising and final selection remains for following sectionsCradle of Civilization and OT Greece and Rome Paschal MysteryEarly Church to Medieval EraEstimated Costs remaining: ~40 paintings for $35k plus lightingPlanning not yet begun for Blessed Miguel Pro Hall</a:t>
             </a:r>
           </a:p>
@@ -3289,7 +3724,7 @@
       </p:sp>
       <p:sp>
         <p:nvSpPr>
-          <p:cNvPr id="3" name="Rectangle 2"/>
+          <p:cNvPr id="6" name="Rectangle 5"/>
           <p:cNvSpPr/>
           <p:nvPr/>
         </p:nvSpPr>
@@ -3344,9 +3779,57 @@
         <p:nvPr/>
       </p:nvGrpSpPr>
       <p:grpSpPr/>
-      <p:sp>
-        <p:nvSpPr>
-          <p:cNvPr id="2" name="Rectangle 1"/>
+      <p:pic>
+        <p:nvPicPr>
+          <p:cNvPr id="2" name="Picture 1" descr="image2.jpeg"/>
+          <p:cNvPicPr>
+            <a:picLocks noChangeAspect="1"/>
+          </p:cNvPicPr>
+          <p:nvPr/>
+        </p:nvPicPr>
+        <p:blipFill>
+          <a:blip r:embed="rId2"/>
+          <a:stretch>
+            <a:fillRect/>
+          </a:stretch>
+        </p:blipFill>
+        <p:spPr>
+          <a:xfrm>
+            <a:off x="188120" y="5525929"/>
+            <a:ext cx="1143000" cy="1224229"/>
+          </a:xfrm>
+          <a:prstGeom prst="rect">
+            <a:avLst/>
+          </a:prstGeom>
+        </p:spPr>
+      </p:pic>
+      <p:pic>
+        <p:nvPicPr>
+          <p:cNvPr id="3" name="Picture 2" descr="image3.jpg"/>
+          <p:cNvPicPr>
+            <a:picLocks noChangeAspect="1"/>
+          </p:cNvPicPr>
+          <p:nvPr/>
+        </p:nvPicPr>
+        <p:blipFill>
+          <a:blip r:embed="rId3"/>
+          <a:stretch>
+            <a:fillRect/>
+          </a:stretch>
+        </p:blipFill>
+        <p:spPr>
+          <a:xfrm>
+            <a:off x="10638881" y="139366"/>
+            <a:ext cx="1410420" cy="1371600"/>
+          </a:xfrm>
+          <a:prstGeom prst="rect">
+            <a:avLst/>
+          </a:prstGeom>
+        </p:spPr>
+      </p:pic>
+      <p:sp>
+        <p:nvSpPr>
+          <p:cNvPr id="4" name="Rectangle 3"/>
           <p:cNvSpPr/>
           <p:nvPr/>
         </p:nvSpPr>
@@ -3385,7 +3868,7 @@
       </p:sp>
       <p:sp>
         <p:nvSpPr>
-          <p:cNvPr id="3" name="Rectangle 2"/>
+          <p:cNvPr id="5" name="Rectangle 4"/>
           <p:cNvSpPr/>
           <p:nvPr/>
         </p:nvSpPr>
@@ -3422,6 +3905,480 @@
           </a:p>
         </p:txBody>
       </p:sp>
+      <p:pic>
+        <p:nvPicPr>
+          <p:cNvPr id="6" name="Picture 5" descr="image4.png"/>
+          <p:cNvPicPr>
+            <a:picLocks noChangeAspect="1"/>
+          </p:cNvPicPr>
+          <p:nvPr/>
+        </p:nvPicPr>
+        <p:blipFill>
+          <a:blip r:embed="rId4"/>
+          <a:stretch>
+            <a:fillRect/>
+          </a:stretch>
+        </p:blipFill>
+        <p:spPr>
+          <a:xfrm>
+            <a:off x="707407" y="1155858"/>
+            <a:ext cx="9944387" cy="3686175"/>
+          </a:xfrm>
+          <a:prstGeom prst="rect">
+            <a:avLst/>
+          </a:prstGeom>
+        </p:spPr>
+      </p:pic>
+      <p:cxnSp>
+        <p:nvCxnSpPr>
+          <p:cNvPr id="7" name="Connector 6"/>
+          <p:cNvCxnSpPr/>
+          <p:nvPr/>
+        </p:nvCxnSpPr>
+        <p:spPr>
+          <a:xfrm>
+            <a:off x="856034" y="3196147"/>
+            <a:ext cx="1741251" cy="0"/>
+          </a:xfrm>
+          <a:prstGeom prst="line">
+            <a:avLst/>
+          </a:prstGeom>
+        </p:spPr>
+        <p:style>
+          <a:lnRef idx="2">
+            <a:schemeClr val="accent1"/>
+          </a:lnRef>
+          <a:fillRef idx="0">
+            <a:schemeClr val="accent1"/>
+          </a:fillRef>
+          <a:effectRef idx="1">
+            <a:schemeClr val="accent1"/>
+          </a:effectRef>
+          <a:fontRef idx="minor">
+            <a:schemeClr val="tx1"/>
+          </a:fontRef>
+        </p:style>
+      </p:cxnSp>
+      <p:cxnSp>
+        <p:nvCxnSpPr>
+          <p:cNvPr id="8" name="Connector 7"/>
+          <p:cNvCxnSpPr/>
+          <p:nvPr/>
+        </p:nvCxnSpPr>
+        <p:spPr>
+          <a:xfrm>
+            <a:off x="2908571" y="3225331"/>
+            <a:ext cx="2423959" cy="0"/>
+          </a:xfrm>
+          <a:prstGeom prst="line">
+            <a:avLst/>
+          </a:prstGeom>
+        </p:spPr>
+        <p:style>
+          <a:lnRef idx="2">
+            <a:schemeClr val="accent1"/>
+          </a:lnRef>
+          <a:fillRef idx="0">
+            <a:schemeClr val="accent1"/>
+          </a:fillRef>
+          <a:effectRef idx="1">
+            <a:schemeClr val="accent1"/>
+          </a:effectRef>
+          <a:fontRef idx="minor">
+            <a:schemeClr val="tx1"/>
+          </a:fontRef>
+        </p:style>
+      </p:cxnSp>
+      <p:cxnSp>
+        <p:nvCxnSpPr>
+          <p:cNvPr id="9" name="Connector 8"/>
+          <p:cNvCxnSpPr/>
+          <p:nvPr/>
+        </p:nvCxnSpPr>
+        <p:spPr>
+          <a:xfrm>
+            <a:off x="856034" y="2755158"/>
+            <a:ext cx="1741251" cy="0"/>
+          </a:xfrm>
+          <a:prstGeom prst="line">
+            <a:avLst/>
+          </a:prstGeom>
+        </p:spPr>
+        <p:style>
+          <a:lnRef idx="2">
+            <a:schemeClr val="accent1"/>
+          </a:lnRef>
+          <a:fillRef idx="0">
+            <a:schemeClr val="accent1"/>
+          </a:fillRef>
+          <a:effectRef idx="1">
+            <a:schemeClr val="accent1"/>
+          </a:effectRef>
+          <a:fontRef idx="minor">
+            <a:schemeClr val="tx1"/>
+          </a:fontRef>
+        </p:style>
+      </p:cxnSp>
+      <p:cxnSp>
+        <p:nvCxnSpPr>
+          <p:cNvPr id="10" name="Connector 9"/>
+          <p:cNvCxnSpPr/>
+          <p:nvPr/>
+        </p:nvCxnSpPr>
+        <p:spPr>
+          <a:xfrm>
+            <a:off x="856033" y="4026238"/>
+            <a:ext cx="787941" cy="0"/>
+          </a:xfrm>
+          <a:prstGeom prst="line">
+            <a:avLst/>
+          </a:prstGeom>
+        </p:spPr>
+        <p:style>
+          <a:lnRef idx="2">
+            <a:schemeClr val="accent1"/>
+          </a:lnRef>
+          <a:fillRef idx="0">
+            <a:schemeClr val="accent1"/>
+          </a:fillRef>
+          <a:effectRef idx="1">
+            <a:schemeClr val="accent1"/>
+          </a:effectRef>
+          <a:fontRef idx="minor">
+            <a:schemeClr val="tx1"/>
+          </a:fontRef>
+        </p:style>
+      </p:cxnSp>
+      <p:cxnSp>
+        <p:nvCxnSpPr>
+          <p:cNvPr id="11" name="Connector 10"/>
+          <p:cNvCxnSpPr/>
+          <p:nvPr/>
+        </p:nvCxnSpPr>
+        <p:spPr>
+          <a:xfrm flipV="1">
+            <a:off x="875488" y="3196147"/>
+            <a:ext cx="1" cy="806380"/>
+          </a:xfrm>
+          <a:prstGeom prst="line">
+            <a:avLst/>
+          </a:prstGeom>
+        </p:spPr>
+        <p:style>
+          <a:lnRef idx="2">
+            <a:schemeClr val="accent1"/>
+          </a:lnRef>
+          <a:fillRef idx="0">
+            <a:schemeClr val="accent1"/>
+          </a:fillRef>
+          <a:effectRef idx="1">
+            <a:schemeClr val="accent1"/>
+          </a:effectRef>
+          <a:fontRef idx="minor">
+            <a:schemeClr val="tx1"/>
+          </a:fontRef>
+        </p:style>
+      </p:cxnSp>
+      <p:cxnSp>
+        <p:nvCxnSpPr>
+          <p:cNvPr id="12" name="Connector 11"/>
+          <p:cNvCxnSpPr/>
+          <p:nvPr/>
+        </p:nvCxnSpPr>
+        <p:spPr>
+          <a:xfrm>
+            <a:off x="5332530" y="3338820"/>
+            <a:ext cx="418364" cy="0"/>
+          </a:xfrm>
+          <a:prstGeom prst="line">
+            <a:avLst/>
+          </a:prstGeom>
+        </p:spPr>
+        <p:style>
+          <a:lnRef idx="2">
+            <a:schemeClr val="accent1"/>
+          </a:lnRef>
+          <a:fillRef idx="0">
+            <a:schemeClr val="accent1"/>
+          </a:fillRef>
+          <a:effectRef idx="1">
+            <a:schemeClr val="accent1"/>
+          </a:effectRef>
+          <a:fontRef idx="minor">
+            <a:schemeClr val="tx1"/>
+          </a:fontRef>
+        </p:style>
+      </p:cxnSp>
+      <p:cxnSp>
+        <p:nvCxnSpPr>
+          <p:cNvPr id="13" name="Connector 12"/>
+          <p:cNvCxnSpPr/>
+          <p:nvPr/>
+        </p:nvCxnSpPr>
+        <p:spPr>
+          <a:xfrm>
+            <a:off x="2908571" y="2776845"/>
+            <a:ext cx="2423959" cy="0"/>
+          </a:xfrm>
+          <a:prstGeom prst="line">
+            <a:avLst/>
+          </a:prstGeom>
+        </p:spPr>
+        <p:style>
+          <a:lnRef idx="2">
+            <a:schemeClr val="accent1"/>
+          </a:lnRef>
+          <a:fillRef idx="0">
+            <a:schemeClr val="accent1"/>
+          </a:fillRef>
+          <a:effectRef idx="1">
+            <a:schemeClr val="accent1"/>
+          </a:effectRef>
+          <a:fontRef idx="minor">
+            <a:schemeClr val="tx1"/>
+          </a:fontRef>
+        </p:style>
+      </p:cxnSp>
+      <p:cxnSp>
+        <p:nvCxnSpPr>
+          <p:cNvPr id="14" name="Connector 13"/>
+          <p:cNvCxnSpPr/>
+          <p:nvPr/>
+        </p:nvCxnSpPr>
+        <p:spPr>
+          <a:xfrm>
+            <a:off x="5658256" y="2776845"/>
+            <a:ext cx="2201693" cy="0"/>
+          </a:xfrm>
+          <a:prstGeom prst="line">
+            <a:avLst/>
+          </a:prstGeom>
+        </p:spPr>
+        <p:style>
+          <a:lnRef idx="2">
+            <a:schemeClr val="accent1"/>
+          </a:lnRef>
+          <a:fillRef idx="0">
+            <a:schemeClr val="accent1"/>
+          </a:fillRef>
+          <a:effectRef idx="1">
+            <a:schemeClr val="accent1"/>
+          </a:effectRef>
+          <a:fontRef idx="minor">
+            <a:schemeClr val="tx1"/>
+          </a:fontRef>
+        </p:style>
+      </p:cxnSp>
+      <p:cxnSp>
+        <p:nvCxnSpPr>
+          <p:cNvPr id="15" name="Connector 14"/>
+          <p:cNvCxnSpPr/>
+          <p:nvPr/>
+        </p:nvCxnSpPr>
+        <p:spPr>
+          <a:xfrm>
+            <a:off x="6066816" y="3197366"/>
+            <a:ext cx="1773677" cy="0"/>
+          </a:xfrm>
+          <a:prstGeom prst="line">
+            <a:avLst/>
+          </a:prstGeom>
+        </p:spPr>
+        <p:style>
+          <a:lnRef idx="2">
+            <a:schemeClr val="accent1"/>
+          </a:lnRef>
+          <a:fillRef idx="0">
+            <a:schemeClr val="accent1"/>
+          </a:fillRef>
+          <a:effectRef idx="1">
+            <a:schemeClr val="accent1"/>
+          </a:effectRef>
+          <a:fontRef idx="minor">
+            <a:schemeClr val="tx1"/>
+          </a:fontRef>
+        </p:style>
+      </p:cxnSp>
+      <p:cxnSp>
+        <p:nvCxnSpPr>
+          <p:cNvPr id="16" name="Connector 15"/>
+          <p:cNvCxnSpPr/>
+          <p:nvPr/>
+        </p:nvCxnSpPr>
+        <p:spPr>
+          <a:xfrm>
+            <a:off x="8164749" y="3205875"/>
+            <a:ext cx="2175753" cy="0"/>
+          </a:xfrm>
+          <a:prstGeom prst="line">
+            <a:avLst/>
+          </a:prstGeom>
+        </p:spPr>
+        <p:style>
+          <a:lnRef idx="2">
+            <a:schemeClr val="accent1"/>
+          </a:lnRef>
+          <a:fillRef idx="0">
+            <a:schemeClr val="accent1"/>
+          </a:fillRef>
+          <a:effectRef idx="1">
+            <a:schemeClr val="accent1"/>
+          </a:effectRef>
+          <a:fontRef idx="minor">
+            <a:schemeClr val="tx1"/>
+          </a:fontRef>
+        </p:style>
+      </p:cxnSp>
+      <p:cxnSp>
+        <p:nvCxnSpPr>
+          <p:cNvPr id="17" name="Connector 16"/>
+          <p:cNvCxnSpPr/>
+          <p:nvPr/>
+        </p:nvCxnSpPr>
+        <p:spPr>
+          <a:xfrm>
+            <a:off x="8164749" y="2776845"/>
+            <a:ext cx="1212715" cy="0"/>
+          </a:xfrm>
+          <a:prstGeom prst="line">
+            <a:avLst/>
+          </a:prstGeom>
+        </p:spPr>
+        <p:style>
+          <a:lnRef idx="2">
+            <a:schemeClr val="accent1"/>
+          </a:lnRef>
+          <a:fillRef idx="0">
+            <a:schemeClr val="accent1"/>
+          </a:fillRef>
+          <a:effectRef idx="1">
+            <a:schemeClr val="accent1"/>
+          </a:effectRef>
+          <a:fontRef idx="minor">
+            <a:schemeClr val="tx1"/>
+          </a:fontRef>
+        </p:style>
+      </p:cxnSp>
+      <p:cxnSp>
+        <p:nvCxnSpPr>
+          <p:cNvPr id="18" name="Connector 17"/>
+          <p:cNvCxnSpPr/>
+          <p:nvPr/>
+        </p:nvCxnSpPr>
+        <p:spPr>
+          <a:xfrm flipV="1">
+            <a:off x="6086271" y="3196147"/>
+            <a:ext cx="0" cy="532997"/>
+          </a:xfrm>
+          <a:prstGeom prst="line">
+            <a:avLst/>
+          </a:prstGeom>
+        </p:spPr>
+        <p:style>
+          <a:lnRef idx="2">
+            <a:schemeClr val="accent1"/>
+          </a:lnRef>
+          <a:fillRef idx="0">
+            <a:schemeClr val="accent1"/>
+          </a:fillRef>
+          <a:effectRef idx="1">
+            <a:schemeClr val="accent1"/>
+          </a:effectRef>
+          <a:fontRef idx="minor">
+            <a:schemeClr val="tx1"/>
+          </a:fontRef>
+        </p:style>
+      </p:cxnSp>
+      <p:cxnSp>
+        <p:nvCxnSpPr>
+          <p:cNvPr id="19" name="Connector 18"/>
+          <p:cNvCxnSpPr/>
+          <p:nvPr/>
+        </p:nvCxnSpPr>
+        <p:spPr>
+          <a:xfrm flipV="1">
+            <a:off x="5661497" y="2222162"/>
+            <a:ext cx="0" cy="375123"/>
+          </a:xfrm>
+          <a:prstGeom prst="line">
+            <a:avLst/>
+          </a:prstGeom>
+        </p:spPr>
+        <p:style>
+          <a:lnRef idx="2">
+            <a:schemeClr val="accent1"/>
+          </a:lnRef>
+          <a:fillRef idx="0">
+            <a:schemeClr val="accent1"/>
+          </a:fillRef>
+          <a:effectRef idx="1">
+            <a:schemeClr val="accent1"/>
+          </a:effectRef>
+          <a:fontRef idx="minor">
+            <a:schemeClr val="tx1"/>
+          </a:fontRef>
+        </p:style>
+      </p:cxnSp>
+      <p:cxnSp>
+        <p:nvCxnSpPr>
+          <p:cNvPr id="20" name="Connector 19"/>
+          <p:cNvCxnSpPr/>
+          <p:nvPr/>
+        </p:nvCxnSpPr>
+        <p:spPr>
+          <a:xfrm flipV="1">
+            <a:off x="5371442" y="2243848"/>
+            <a:ext cx="0" cy="532997"/>
+          </a:xfrm>
+          <a:prstGeom prst="line">
+            <a:avLst/>
+          </a:prstGeom>
+        </p:spPr>
+        <p:style>
+          <a:lnRef idx="2">
+            <a:schemeClr val="accent1"/>
+          </a:lnRef>
+          <a:fillRef idx="0">
+            <a:schemeClr val="accent1"/>
+          </a:fillRef>
+          <a:effectRef idx="1">
+            <a:schemeClr val="accent1"/>
+          </a:effectRef>
+          <a:fontRef idx="minor">
+            <a:schemeClr val="tx1"/>
+          </a:fontRef>
+        </p:style>
+      </p:cxnSp>
+      <p:cxnSp>
+        <p:nvCxnSpPr>
+          <p:cNvPr id="21" name="Connector 20"/>
+          <p:cNvCxnSpPr/>
+          <p:nvPr/>
+        </p:nvCxnSpPr>
+        <p:spPr>
+          <a:xfrm flipV="1">
+            <a:off x="5750894" y="3338820"/>
+            <a:ext cx="0" cy="193123"/>
+          </a:xfrm>
+          <a:prstGeom prst="line">
+            <a:avLst/>
+          </a:prstGeom>
+        </p:spPr>
+        <p:style>
+          <a:lnRef idx="2">
+            <a:schemeClr val="accent1"/>
+          </a:lnRef>
+          <a:fillRef idx="0">
+            <a:schemeClr val="accent1"/>
+          </a:fillRef>
+          <a:effectRef idx="1">
+            <a:schemeClr val="accent1"/>
+          </a:effectRef>
+          <a:fontRef idx="minor">
+            <a:schemeClr val="tx1"/>
+          </a:fontRef>
+        </p:style>
+      </p:cxnSp>
     </p:spTree>
   </p:cSld>
   <p:clrMapOvr>
@@ -3440,9 +4397,57 @@
         <p:nvPr/>
       </p:nvGrpSpPr>
       <p:grpSpPr/>
-      <p:sp>
-        <p:nvSpPr>
-          <p:cNvPr id="2" name="Rectangle 1"/>
+      <p:pic>
+        <p:nvPicPr>
+          <p:cNvPr id="2" name="Picture 1" descr="image2.jpeg"/>
+          <p:cNvPicPr>
+            <a:picLocks noChangeAspect="1"/>
+          </p:cNvPicPr>
+          <p:nvPr/>
+        </p:nvPicPr>
+        <p:blipFill>
+          <a:blip r:embed="rId2"/>
+          <a:stretch>
+            <a:fillRect/>
+          </a:stretch>
+        </p:blipFill>
+        <p:spPr>
+          <a:xfrm>
+            <a:off x="188120" y="5525929"/>
+            <a:ext cx="1143000" cy="1224229"/>
+          </a:xfrm>
+          <a:prstGeom prst="rect">
+            <a:avLst/>
+          </a:prstGeom>
+        </p:spPr>
+      </p:pic>
+      <p:pic>
+        <p:nvPicPr>
+          <p:cNvPr id="3" name="Picture 2" descr="image3.jpg"/>
+          <p:cNvPicPr>
+            <a:picLocks noChangeAspect="1"/>
+          </p:cNvPicPr>
+          <p:nvPr/>
+        </p:nvPicPr>
+        <p:blipFill>
+          <a:blip r:embed="rId3"/>
+          <a:stretch>
+            <a:fillRect/>
+          </a:stretch>
+        </p:blipFill>
+        <p:spPr>
+          <a:xfrm>
+            <a:off x="10638881" y="139366"/>
+            <a:ext cx="1410420" cy="1371600"/>
+          </a:xfrm>
+          <a:prstGeom prst="rect">
+            <a:avLst/>
+          </a:prstGeom>
+        </p:spPr>
+      </p:pic>
+      <p:sp>
+        <p:nvSpPr>
+          <p:cNvPr id="4" name="Rectangle 3"/>
           <p:cNvSpPr/>
           <p:nvPr/>
         </p:nvSpPr>
@@ -3481,7 +4486,7 @@
       </p:sp>
       <p:sp>
         <p:nvSpPr>
-          <p:cNvPr id="3" name="Rectangle 2"/>
+          <p:cNvPr id="5" name="Rectangle 4"/>
           <p:cNvSpPr/>
           <p:nvPr/>
         </p:nvSpPr>
@@ -3536,9 +4541,57 @@
         <p:nvPr/>
       </p:nvGrpSpPr>
       <p:grpSpPr/>
-      <p:sp>
-        <p:nvSpPr>
-          <p:cNvPr id="2" name="Rectangle 1"/>
+      <p:pic>
+        <p:nvPicPr>
+          <p:cNvPr id="2" name="Picture 1" descr="image2.jpeg"/>
+          <p:cNvPicPr>
+            <a:picLocks noChangeAspect="1"/>
+          </p:cNvPicPr>
+          <p:nvPr/>
+        </p:nvPicPr>
+        <p:blipFill>
+          <a:blip r:embed="rId2"/>
+          <a:stretch>
+            <a:fillRect/>
+          </a:stretch>
+        </p:blipFill>
+        <p:spPr>
+          <a:xfrm>
+            <a:off x="188120" y="5525929"/>
+            <a:ext cx="1143000" cy="1224229"/>
+          </a:xfrm>
+          <a:prstGeom prst="rect">
+            <a:avLst/>
+          </a:prstGeom>
+        </p:spPr>
+      </p:pic>
+      <p:pic>
+        <p:nvPicPr>
+          <p:cNvPr id="3" name="Picture 2" descr="image3.jpg"/>
+          <p:cNvPicPr>
+            <a:picLocks noChangeAspect="1"/>
+          </p:cNvPicPr>
+          <p:nvPr/>
+        </p:nvPicPr>
+        <p:blipFill>
+          <a:blip r:embed="rId3"/>
+          <a:stretch>
+            <a:fillRect/>
+          </a:stretch>
+        </p:blipFill>
+        <p:spPr>
+          <a:xfrm>
+            <a:off x="10638881" y="139366"/>
+            <a:ext cx="1410420" cy="1371600"/>
+          </a:xfrm>
+          <a:prstGeom prst="rect">
+            <a:avLst/>
+          </a:prstGeom>
+        </p:spPr>
+      </p:pic>
+      <p:sp>
+        <p:nvSpPr>
+          <p:cNvPr id="4" name="Rectangle 3"/>
           <p:cNvSpPr/>
           <p:nvPr/>
         </p:nvSpPr>
@@ -3577,7 +4630,7 @@
       </p:sp>
       <p:sp>
         <p:nvSpPr>
-          <p:cNvPr id="3" name="Rectangle 2"/>
+          <p:cNvPr id="5" name="Rectangle 4"/>
           <p:cNvSpPr/>
           <p:nvPr/>
         </p:nvSpPr>
@@ -3632,9 +4685,57 @@
         <p:nvPr/>
       </p:nvGrpSpPr>
       <p:grpSpPr/>
-      <p:sp>
-        <p:nvSpPr>
-          <p:cNvPr id="2" name="Rectangle 1"/>
+      <p:pic>
+        <p:nvPicPr>
+          <p:cNvPr id="2" name="Picture 1" descr="image2.jpeg"/>
+          <p:cNvPicPr>
+            <a:picLocks noChangeAspect="1"/>
+          </p:cNvPicPr>
+          <p:nvPr/>
+        </p:nvPicPr>
+        <p:blipFill>
+          <a:blip r:embed="rId2"/>
+          <a:stretch>
+            <a:fillRect/>
+          </a:stretch>
+        </p:blipFill>
+        <p:spPr>
+          <a:xfrm>
+            <a:off x="188120" y="5525929"/>
+            <a:ext cx="1143000" cy="1224229"/>
+          </a:xfrm>
+          <a:prstGeom prst="rect">
+            <a:avLst/>
+          </a:prstGeom>
+        </p:spPr>
+      </p:pic>
+      <p:pic>
+        <p:nvPicPr>
+          <p:cNvPr id="3" name="Picture 2" descr="image3.jpg"/>
+          <p:cNvPicPr>
+            <a:picLocks noChangeAspect="1"/>
+          </p:cNvPicPr>
+          <p:nvPr/>
+        </p:nvPicPr>
+        <p:blipFill>
+          <a:blip r:embed="rId3"/>
+          <a:stretch>
+            <a:fillRect/>
+          </a:stretch>
+        </p:blipFill>
+        <p:spPr>
+          <a:xfrm>
+            <a:off x="10638881" y="139366"/>
+            <a:ext cx="1410420" cy="1371600"/>
+          </a:xfrm>
+          <a:prstGeom prst="rect">
+            <a:avLst/>
+          </a:prstGeom>
+        </p:spPr>
+      </p:pic>
+      <p:sp>
+        <p:nvSpPr>
+          <p:cNvPr id="4" name="Rectangle 3"/>
           <p:cNvSpPr/>
           <p:nvPr/>
         </p:nvSpPr>
@@ -3673,7 +4774,7 @@
       </p:sp>
       <p:sp>
         <p:nvSpPr>
-          <p:cNvPr id="3" name="Rectangle 2"/>
+          <p:cNvPr id="5" name="Rectangle 4"/>
           <p:cNvSpPr/>
           <p:nvPr/>
         </p:nvSpPr>
@@ -3728,9 +4829,57 @@
         <p:nvPr/>
       </p:nvGrpSpPr>
       <p:grpSpPr/>
-      <p:sp>
-        <p:nvSpPr>
-          <p:cNvPr id="2" name="Rectangle 1"/>
+      <p:pic>
+        <p:nvPicPr>
+          <p:cNvPr id="2" name="Picture 1" descr="image2.jpeg"/>
+          <p:cNvPicPr>
+            <a:picLocks noChangeAspect="1"/>
+          </p:cNvPicPr>
+          <p:nvPr/>
+        </p:nvPicPr>
+        <p:blipFill>
+          <a:blip r:embed="rId2"/>
+          <a:stretch>
+            <a:fillRect/>
+          </a:stretch>
+        </p:blipFill>
+        <p:spPr>
+          <a:xfrm>
+            <a:off x="188120" y="5525929"/>
+            <a:ext cx="1143000" cy="1224229"/>
+          </a:xfrm>
+          <a:prstGeom prst="rect">
+            <a:avLst/>
+          </a:prstGeom>
+        </p:spPr>
+      </p:pic>
+      <p:pic>
+        <p:nvPicPr>
+          <p:cNvPr id="3" name="Picture 2" descr="image3.jpg"/>
+          <p:cNvPicPr>
+            <a:picLocks noChangeAspect="1"/>
+          </p:cNvPicPr>
+          <p:nvPr/>
+        </p:nvPicPr>
+        <p:blipFill>
+          <a:blip r:embed="rId3"/>
+          <a:stretch>
+            <a:fillRect/>
+          </a:stretch>
+        </p:blipFill>
+        <p:spPr>
+          <a:xfrm>
+            <a:off x="10638881" y="139366"/>
+            <a:ext cx="1410420" cy="1371600"/>
+          </a:xfrm>
+          <a:prstGeom prst="rect">
+            <a:avLst/>
+          </a:prstGeom>
+        </p:spPr>
+      </p:pic>
+      <p:sp>
+        <p:nvSpPr>
+          <p:cNvPr id="4" name="Rectangle 3"/>
           <p:cNvSpPr/>
           <p:nvPr/>
         </p:nvSpPr>
@@ -3769,7 +4918,7 @@
       </p:sp>
       <p:sp>
         <p:nvSpPr>
-          <p:cNvPr id="3" name="Rectangle 2"/>
+          <p:cNvPr id="5" name="Rectangle 4"/>
           <p:cNvSpPr/>
           <p:nvPr/>
         </p:nvSpPr>
@@ -3824,9 +4973,57 @@
         <p:nvPr/>
       </p:nvGrpSpPr>
       <p:grpSpPr/>
-      <p:sp>
-        <p:nvSpPr>
-          <p:cNvPr id="2" name="Rectangle 1"/>
+      <p:pic>
+        <p:nvPicPr>
+          <p:cNvPr id="2" name="Picture 1" descr="image2.jpeg"/>
+          <p:cNvPicPr>
+            <a:picLocks noChangeAspect="1"/>
+          </p:cNvPicPr>
+          <p:nvPr/>
+        </p:nvPicPr>
+        <p:blipFill>
+          <a:blip r:embed="rId2"/>
+          <a:stretch>
+            <a:fillRect/>
+          </a:stretch>
+        </p:blipFill>
+        <p:spPr>
+          <a:xfrm>
+            <a:off x="188120" y="5525929"/>
+            <a:ext cx="1143000" cy="1224229"/>
+          </a:xfrm>
+          <a:prstGeom prst="rect">
+            <a:avLst/>
+          </a:prstGeom>
+        </p:spPr>
+      </p:pic>
+      <p:pic>
+        <p:nvPicPr>
+          <p:cNvPr id="3" name="Picture 2" descr="image3.jpg"/>
+          <p:cNvPicPr>
+            <a:picLocks noChangeAspect="1"/>
+          </p:cNvPicPr>
+          <p:nvPr/>
+        </p:nvPicPr>
+        <p:blipFill>
+          <a:blip r:embed="rId3"/>
+          <a:stretch>
+            <a:fillRect/>
+          </a:stretch>
+        </p:blipFill>
+        <p:spPr>
+          <a:xfrm>
+            <a:off x="10638881" y="139366"/>
+            <a:ext cx="1410420" cy="1371600"/>
+          </a:xfrm>
+          <a:prstGeom prst="rect">
+            <a:avLst/>
+          </a:prstGeom>
+        </p:spPr>
+      </p:pic>
+      <p:sp>
+        <p:nvSpPr>
+          <p:cNvPr id="4" name="Rectangle 3"/>
           <p:cNvSpPr/>
           <p:nvPr/>
         </p:nvSpPr>
@@ -3865,7 +5062,7 @@
       </p:sp>
       <p:sp>
         <p:nvSpPr>
-          <p:cNvPr id="3" name="Rectangle 2"/>
+          <p:cNvPr id="5" name="Rectangle 4"/>
           <p:cNvSpPr/>
           <p:nvPr/>
         </p:nvSpPr>
@@ -3904,7 +5101,7 @@
       </p:sp>
       <p:sp>
         <p:nvSpPr>
-          <p:cNvPr id="4" name="Rectangle 3"/>
+          <p:cNvPr id="6" name="Rectangle 5"/>
           <p:cNvSpPr/>
           <p:nvPr/>
         </p:nvSpPr>

--- a/examples/recreations/03_Box_Secretary__ArtNonprofit_Info_Planning_Meeting_20201220/out_mat2ppt.pptx
+++ b/examples/recreations/03_Box_Secretary__ArtNonprofit_Info_Planning_Meeting_20201220/out_mat2ppt.pptx
@@ -3242,57 +3242,9 @@
         <p:nvPr/>
       </p:nvGrpSpPr>
       <p:grpSpPr/>
-      <p:pic>
-        <p:nvPicPr>
-          <p:cNvPr id="2" name="Picture 1" descr="image2.jpeg"/>
-          <p:cNvPicPr>
-            <a:picLocks noChangeAspect="1"/>
-          </p:cNvPicPr>
-          <p:nvPr/>
-        </p:nvPicPr>
-        <p:blipFill>
-          <a:blip r:embed="rId2"/>
-          <a:stretch>
-            <a:fillRect/>
-          </a:stretch>
-        </p:blipFill>
-        <p:spPr>
-          <a:xfrm>
-            <a:off x="188120" y="5525929"/>
-            <a:ext cx="1143000" cy="1224229"/>
-          </a:xfrm>
-          <a:prstGeom prst="rect">
-            <a:avLst/>
-          </a:prstGeom>
-        </p:spPr>
-      </p:pic>
-      <p:pic>
-        <p:nvPicPr>
-          <p:cNvPr id="3" name="Picture 2" descr="image3.jpg"/>
-          <p:cNvPicPr>
-            <a:picLocks noChangeAspect="1"/>
-          </p:cNvPicPr>
-          <p:nvPr/>
-        </p:nvPicPr>
-        <p:blipFill>
-          <a:blip r:embed="rId3"/>
-          <a:stretch>
-            <a:fillRect/>
-          </a:stretch>
-        </p:blipFill>
-        <p:spPr>
-          <a:xfrm>
-            <a:off x="10638881" y="139366"/>
-            <a:ext cx="1410420" cy="1371600"/>
-          </a:xfrm>
-          <a:prstGeom prst="rect">
-            <a:avLst/>
-          </a:prstGeom>
-        </p:spPr>
-      </p:pic>
-      <p:sp>
-        <p:nvSpPr>
-          <p:cNvPr id="4" name="Rectangle 3"/>
+      <p:sp>
+        <p:nvSpPr>
+          <p:cNvPr id="2" name="Rectangle 1"/>
           <p:cNvSpPr/>
           <p:nvPr/>
         </p:nvSpPr>
@@ -3347,57 +3299,9 @@
         <p:nvPr/>
       </p:nvGrpSpPr>
       <p:grpSpPr/>
-      <p:pic>
-        <p:nvPicPr>
-          <p:cNvPr id="2" name="Picture 1" descr="image2.jpeg"/>
-          <p:cNvPicPr>
-            <a:picLocks noChangeAspect="1"/>
-          </p:cNvPicPr>
-          <p:nvPr/>
-        </p:nvPicPr>
-        <p:blipFill>
-          <a:blip r:embed="rId2"/>
-          <a:stretch>
-            <a:fillRect/>
-          </a:stretch>
-        </p:blipFill>
-        <p:spPr>
-          <a:xfrm>
-            <a:off x="188120" y="5525929"/>
-            <a:ext cx="1143000" cy="1224229"/>
-          </a:xfrm>
-          <a:prstGeom prst="rect">
-            <a:avLst/>
-          </a:prstGeom>
-        </p:spPr>
-      </p:pic>
-      <p:pic>
-        <p:nvPicPr>
-          <p:cNvPr id="3" name="Picture 2" descr="image3.jpg"/>
-          <p:cNvPicPr>
-            <a:picLocks noChangeAspect="1"/>
-          </p:cNvPicPr>
-          <p:nvPr/>
-        </p:nvPicPr>
-        <p:blipFill>
-          <a:blip r:embed="rId3"/>
-          <a:stretch>
-            <a:fillRect/>
-          </a:stretch>
-        </p:blipFill>
-        <p:spPr>
-          <a:xfrm>
-            <a:off x="10638881" y="139366"/>
-            <a:ext cx="1410420" cy="1371600"/>
-          </a:xfrm>
-          <a:prstGeom prst="rect">
-            <a:avLst/>
-          </a:prstGeom>
-        </p:spPr>
-      </p:pic>
-      <p:sp>
-        <p:nvSpPr>
-          <p:cNvPr id="4" name="Rectangle 3"/>
+      <p:sp>
+        <p:nvSpPr>
+          <p:cNvPr id="2" name="Rectangle 1"/>
           <p:cNvSpPr/>
           <p:nvPr/>
         </p:nvSpPr>
@@ -3452,57 +3356,9 @@
         <p:nvPr/>
       </p:nvGrpSpPr>
       <p:grpSpPr/>
-      <p:pic>
-        <p:nvPicPr>
-          <p:cNvPr id="2" name="Picture 1" descr="image2.jpeg"/>
-          <p:cNvPicPr>
-            <a:picLocks noChangeAspect="1"/>
-          </p:cNvPicPr>
-          <p:nvPr/>
-        </p:nvPicPr>
-        <p:blipFill>
-          <a:blip r:embed="rId2"/>
-          <a:stretch>
-            <a:fillRect/>
-          </a:stretch>
-        </p:blipFill>
-        <p:spPr>
-          <a:xfrm>
-            <a:off x="188120" y="5525929"/>
-            <a:ext cx="1143000" cy="1224229"/>
-          </a:xfrm>
-          <a:prstGeom prst="rect">
-            <a:avLst/>
-          </a:prstGeom>
-        </p:spPr>
-      </p:pic>
-      <p:pic>
-        <p:nvPicPr>
-          <p:cNvPr id="3" name="Picture 2" descr="image3.jpg"/>
-          <p:cNvPicPr>
-            <a:picLocks noChangeAspect="1"/>
-          </p:cNvPicPr>
-          <p:nvPr/>
-        </p:nvPicPr>
-        <p:blipFill>
-          <a:blip r:embed="rId3"/>
-          <a:stretch>
-            <a:fillRect/>
-          </a:stretch>
-        </p:blipFill>
-        <p:spPr>
-          <a:xfrm>
-            <a:off x="10638881" y="139366"/>
-            <a:ext cx="1410420" cy="1371600"/>
-          </a:xfrm>
-          <a:prstGeom prst="rect">
-            <a:avLst/>
-          </a:prstGeom>
-        </p:spPr>
-      </p:pic>
-      <p:sp>
-        <p:nvSpPr>
-          <p:cNvPr id="4" name="Rectangle 3"/>
+      <p:sp>
+        <p:nvSpPr>
+          <p:cNvPr id="2" name="Rectangle 1"/>
           <p:cNvSpPr/>
           <p:nvPr/>
         </p:nvSpPr>
@@ -3541,7 +3397,7 @@
       </p:sp>
       <p:sp>
         <p:nvSpPr>
-          <p:cNvPr id="5" name="Rectangle 4"/>
+          <p:cNvPr id="3" name="Rectangle 2"/>
           <p:cNvSpPr/>
           <p:nvPr/>
         </p:nvSpPr>
@@ -3596,57 +3452,9 @@
         <p:nvPr/>
       </p:nvGrpSpPr>
       <p:grpSpPr/>
-      <p:pic>
-        <p:nvPicPr>
-          <p:cNvPr id="2" name="Picture 1" descr="image2.jpeg"/>
-          <p:cNvPicPr>
-            <a:picLocks noChangeAspect="1"/>
-          </p:cNvPicPr>
-          <p:nvPr/>
-        </p:nvPicPr>
-        <p:blipFill>
-          <a:blip r:embed="rId2"/>
-          <a:stretch>
-            <a:fillRect/>
-          </a:stretch>
-        </p:blipFill>
-        <p:spPr>
-          <a:xfrm>
-            <a:off x="188120" y="5525929"/>
-            <a:ext cx="1143000" cy="1224229"/>
-          </a:xfrm>
-          <a:prstGeom prst="rect">
-            <a:avLst/>
-          </a:prstGeom>
-        </p:spPr>
-      </p:pic>
-      <p:pic>
-        <p:nvPicPr>
-          <p:cNvPr id="3" name="Picture 2" descr="image3.jpg"/>
-          <p:cNvPicPr>
-            <a:picLocks noChangeAspect="1"/>
-          </p:cNvPicPr>
-          <p:nvPr/>
-        </p:nvPicPr>
-        <p:blipFill>
-          <a:blip r:embed="rId3"/>
-          <a:stretch>
-            <a:fillRect/>
-          </a:stretch>
-        </p:blipFill>
-        <p:spPr>
-          <a:xfrm>
-            <a:off x="10638881" y="139366"/>
-            <a:ext cx="1410420" cy="1371600"/>
-          </a:xfrm>
-          <a:prstGeom prst="rect">
-            <a:avLst/>
-          </a:prstGeom>
-        </p:spPr>
-      </p:pic>
-      <p:sp>
-        <p:nvSpPr>
-          <p:cNvPr id="4" name="Rectangle 3"/>
+      <p:sp>
+        <p:nvSpPr>
+          <p:cNvPr id="2" name="Rectangle 1"/>
           <p:cNvSpPr/>
           <p:nvPr/>
         </p:nvSpPr>
@@ -3685,7 +3493,7 @@
       </p:sp>
       <p:sp>
         <p:nvSpPr>
-          <p:cNvPr id="5" name="Rectangle 4"/>
+          <p:cNvPr id="3" name="Rectangle 2"/>
           <p:cNvSpPr/>
           <p:nvPr/>
         </p:nvSpPr>
@@ -3724,7 +3532,7 @@
       </p:sp>
       <p:sp>
         <p:nvSpPr>
-          <p:cNvPr id="6" name="Rectangle 5"/>
+          <p:cNvPr id="4" name="Rectangle 3"/>
           <p:cNvSpPr/>
           <p:nvPr/>
         </p:nvSpPr>
@@ -3779,9 +3587,87 @@
         <p:nvPr/>
       </p:nvGrpSpPr>
       <p:grpSpPr/>
+      <p:sp>
+        <p:nvSpPr>
+          <p:cNvPr id="2" name="Rectangle 1"/>
+          <p:cNvSpPr/>
+          <p:nvPr/>
+        </p:nvSpPr>
+        <p:spPr>
+          <a:xfrm>
+            <a:off x="493095" y="1226"/>
+            <a:ext cx="10515600" cy="1072559"/>
+          </a:xfrm>
+          <a:prstGeom prst="rect">
+            <a:avLst/>
+          </a:prstGeom>
+        </p:spPr>
+        <p:style>
+          <a:lnRef idx="1">
+            <a:schemeClr val="accent1"/>
+          </a:lnRef>
+          <a:fillRef idx="3">
+            <a:schemeClr val="accent1"/>
+          </a:fillRef>
+          <a:effectRef idx="2">
+            <a:schemeClr val="accent1"/>
+          </a:effectRef>
+          <a:fontRef idx="minor">
+            <a:schemeClr val="lt1"/>
+          </a:fontRef>
+        </p:style>
+        <p:txBody>
+          <a:bodyPr rtlCol="0" anchor="ctr"/>
+          <a:lstStyle/>
+          <a:p>
+            <a:r>
+              <a:t>Mother Seton Hall Art Schema</a:t>
+            </a:r>
+          </a:p>
+        </p:txBody>
+      </p:sp>
+      <p:sp>
+        <p:nvSpPr>
+          <p:cNvPr id="3" name="Rectangle 2"/>
+          <p:cNvSpPr/>
+          <p:nvPr/>
+        </p:nvSpPr>
+        <p:spPr>
+          <a:xfrm>
+            <a:off x="1436528" y="4766554"/>
+            <a:ext cx="2863098" cy="1384625"/>
+          </a:xfrm>
+          <a:prstGeom prst="rect">
+            <a:avLst/>
+          </a:prstGeom>
+        </p:spPr>
+        <p:style>
+          <a:lnRef idx="1">
+            <a:schemeClr val="accent1"/>
+          </a:lnRef>
+          <a:fillRef idx="3">
+            <a:schemeClr val="accent1"/>
+          </a:fillRef>
+          <a:effectRef idx="2">
+            <a:schemeClr val="accent1"/>
+          </a:effectRef>
+          <a:fontRef idx="minor">
+            <a:schemeClr val="lt1"/>
+          </a:fontRef>
+        </p:style>
+        <p:txBody>
+          <a:bodyPr rtlCol="0" anchor="ctr"/>
+          <a:lstStyle/>
+          <a:p>
+            <a:r>
+              <a:t>CompletedIn-progressPlanning Stages</a:t>
+            </a:r>
+          </a:p>
+        </p:txBody>
+      </p:sp>
       <p:pic>
         <p:nvPicPr>
-          <p:cNvPr id="2" name="Picture 1" descr="image2.jpeg"/>
+          <p:cNvPr id="4" name="Picture 3" descr="image4.png"/>
           <p:cNvPicPr>
             <a:picLocks noChangeAspect="1"/>
           </p:cNvPicPr>
@@ -3795,140 +3681,74 @@
         </p:blipFill>
         <p:spPr>
           <a:xfrm>
-            <a:off x="188120" y="5525929"/>
-            <a:ext cx="1143000" cy="1224229"/>
+            <a:off x="707407" y="1155858"/>
+            <a:ext cx="9944387" cy="3686175"/>
           </a:xfrm>
           <a:prstGeom prst="rect">
             <a:avLst/>
           </a:prstGeom>
         </p:spPr>
       </p:pic>
-      <p:pic>
-        <p:nvPicPr>
-          <p:cNvPr id="3" name="Picture 2" descr="image3.jpg"/>
-          <p:cNvPicPr>
-            <a:picLocks noChangeAspect="1"/>
-          </p:cNvPicPr>
+      <p:cxnSp>
+        <p:nvCxnSpPr>
+          <p:cNvPr id="5" name="Connector 4"/>
+          <p:cNvCxnSpPr/>
           <p:nvPr/>
-        </p:nvPicPr>
-        <p:blipFill>
-          <a:blip r:embed="rId3"/>
-          <a:stretch>
-            <a:fillRect/>
-          </a:stretch>
-        </p:blipFill>
-        <p:spPr>
-          <a:xfrm>
-            <a:off x="10638881" y="139366"/>
-            <a:ext cx="1410420" cy="1371600"/>
-          </a:xfrm>
-          <a:prstGeom prst="rect">
+        </p:nvCxnSpPr>
+        <p:spPr>
+          <a:xfrm>
+            <a:off x="856034" y="3196147"/>
+            <a:ext cx="1741251" cy="0"/>
+          </a:xfrm>
+          <a:prstGeom prst="line">
             <a:avLst/>
           </a:prstGeom>
         </p:spPr>
-      </p:pic>
-      <p:sp>
-        <p:nvSpPr>
-          <p:cNvPr id="4" name="Rectangle 3"/>
-          <p:cNvSpPr/>
+        <p:style>
+          <a:lnRef idx="2">
+            <a:schemeClr val="accent1"/>
+          </a:lnRef>
+          <a:fillRef idx="0">
+            <a:schemeClr val="accent1"/>
+          </a:fillRef>
+          <a:effectRef idx="1">
+            <a:schemeClr val="accent1"/>
+          </a:effectRef>
+          <a:fontRef idx="minor">
+            <a:schemeClr val="tx1"/>
+          </a:fontRef>
+        </p:style>
+      </p:cxnSp>
+      <p:cxnSp>
+        <p:nvCxnSpPr>
+          <p:cNvPr id="6" name="Connector 5"/>
+          <p:cNvCxnSpPr/>
           <p:nvPr/>
-        </p:nvSpPr>
-        <p:spPr>
-          <a:xfrm>
-            <a:off x="493095" y="1226"/>
-            <a:ext cx="10515600" cy="1072559"/>
-          </a:xfrm>
-          <a:prstGeom prst="rect">
+        </p:nvCxnSpPr>
+        <p:spPr>
+          <a:xfrm>
+            <a:off x="2908571" y="3225331"/>
+            <a:ext cx="2423959" cy="0"/>
+          </a:xfrm>
+          <a:prstGeom prst="line">
             <a:avLst/>
           </a:prstGeom>
         </p:spPr>
         <p:style>
-          <a:lnRef idx="1">
+          <a:lnRef idx="2">
             <a:schemeClr val="accent1"/>
           </a:lnRef>
-          <a:fillRef idx="3">
+          <a:fillRef idx="0">
             <a:schemeClr val="accent1"/>
           </a:fillRef>
-          <a:effectRef idx="2">
+          <a:effectRef idx="1">
             <a:schemeClr val="accent1"/>
           </a:effectRef>
           <a:fontRef idx="minor">
-            <a:schemeClr val="lt1"/>
+            <a:schemeClr val="tx1"/>
           </a:fontRef>
         </p:style>
-        <p:txBody>
-          <a:bodyPr rtlCol="0" anchor="ctr"/>
-          <a:lstStyle/>
-          <a:p>
-            <a:r>
-              <a:t>Mother Seton Hall Art Schema</a:t>
-            </a:r>
-          </a:p>
-        </p:txBody>
-      </p:sp>
-      <p:sp>
-        <p:nvSpPr>
-          <p:cNvPr id="5" name="Rectangle 4"/>
-          <p:cNvSpPr/>
-          <p:nvPr/>
-        </p:nvSpPr>
-        <p:spPr>
-          <a:xfrm>
-            <a:off x="1436528" y="4766554"/>
-            <a:ext cx="2863098" cy="1384625"/>
-          </a:xfrm>
-          <a:prstGeom prst="rect">
-            <a:avLst/>
-          </a:prstGeom>
-        </p:spPr>
-        <p:style>
-          <a:lnRef idx="1">
-            <a:schemeClr val="accent1"/>
-          </a:lnRef>
-          <a:fillRef idx="3">
-            <a:schemeClr val="accent1"/>
-          </a:fillRef>
-          <a:effectRef idx="2">
-            <a:schemeClr val="accent1"/>
-          </a:effectRef>
-          <a:fontRef idx="minor">
-            <a:schemeClr val="lt1"/>
-          </a:fontRef>
-        </p:style>
-        <p:txBody>
-          <a:bodyPr rtlCol="0" anchor="ctr"/>
-          <a:lstStyle/>
-          <a:p>
-            <a:r>
-              <a:t>CompletedIn-progressPlanning Stages</a:t>
-            </a:r>
-          </a:p>
-        </p:txBody>
-      </p:sp>
-      <p:pic>
-        <p:nvPicPr>
-          <p:cNvPr id="6" name="Picture 5" descr="image4.png"/>
-          <p:cNvPicPr>
-            <a:picLocks noChangeAspect="1"/>
-          </p:cNvPicPr>
-          <p:nvPr/>
-        </p:nvPicPr>
-        <p:blipFill>
-          <a:blip r:embed="rId4"/>
-          <a:stretch>
-            <a:fillRect/>
-          </a:stretch>
-        </p:blipFill>
-        <p:spPr>
-          <a:xfrm>
-            <a:off x="707407" y="1155858"/>
-            <a:ext cx="9944387" cy="3686175"/>
-          </a:xfrm>
-          <a:prstGeom prst="rect">
-            <a:avLst/>
-          </a:prstGeom>
-        </p:spPr>
-      </p:pic>
+      </p:cxnSp>
       <p:cxnSp>
         <p:nvCxnSpPr>
           <p:cNvPr id="7" name="Connector 6"/>
@@ -3937,7 +3757,7 @@
         </p:nvCxnSpPr>
         <p:spPr>
           <a:xfrm>
-            <a:off x="856034" y="3196147"/>
+            <a:off x="856034" y="2755158"/>
             <a:ext cx="1741251" cy="0"/>
           </a:xfrm>
           <a:prstGeom prst="line">
@@ -3967,8 +3787,8 @@
         </p:nvCxnSpPr>
         <p:spPr>
           <a:xfrm>
-            <a:off x="2908571" y="3225331"/>
-            <a:ext cx="2423959" cy="0"/>
+            <a:off x="856033" y="4026238"/>
+            <a:ext cx="787941" cy="0"/>
           </a:xfrm>
           <a:prstGeom prst="line">
             <a:avLst/>
@@ -3996,9 +3816,9 @@
           <p:nvPr/>
         </p:nvCxnSpPr>
         <p:spPr>
-          <a:xfrm>
-            <a:off x="856034" y="2755158"/>
-            <a:ext cx="1741251" cy="0"/>
+          <a:xfrm flipV="1">
+            <a:off x="875488" y="3196147"/>
+            <a:ext cx="1" cy="806380"/>
           </a:xfrm>
           <a:prstGeom prst="line">
             <a:avLst/>
@@ -4027,8 +3847,8 @@
         </p:nvCxnSpPr>
         <p:spPr>
           <a:xfrm>
-            <a:off x="856033" y="4026238"/>
-            <a:ext cx="787941" cy="0"/>
+            <a:off x="5332530" y="3338820"/>
+            <a:ext cx="418364" cy="0"/>
           </a:xfrm>
           <a:prstGeom prst="line">
             <a:avLst/>
@@ -4056,9 +3876,9 @@
           <p:nvPr/>
         </p:nvCxnSpPr>
         <p:spPr>
-          <a:xfrm flipV="1">
-            <a:off x="875488" y="3196147"/>
-            <a:ext cx="1" cy="806380"/>
+          <a:xfrm>
+            <a:off x="2908571" y="2776845"/>
+            <a:ext cx="2423959" cy="0"/>
           </a:xfrm>
           <a:prstGeom prst="line">
             <a:avLst/>
@@ -4087,8 +3907,8 @@
         </p:nvCxnSpPr>
         <p:spPr>
           <a:xfrm>
-            <a:off x="5332530" y="3338820"/>
-            <a:ext cx="418364" cy="0"/>
+            <a:off x="5658256" y="2776845"/>
+            <a:ext cx="2201693" cy="0"/>
           </a:xfrm>
           <a:prstGeom prst="line">
             <a:avLst/>
@@ -4117,8 +3937,8 @@
         </p:nvCxnSpPr>
         <p:spPr>
           <a:xfrm>
-            <a:off x="2908571" y="2776845"/>
-            <a:ext cx="2423959" cy="0"/>
+            <a:off x="6066816" y="3197366"/>
+            <a:ext cx="1773677" cy="0"/>
           </a:xfrm>
           <a:prstGeom prst="line">
             <a:avLst/>
@@ -4147,8 +3967,8 @@
         </p:nvCxnSpPr>
         <p:spPr>
           <a:xfrm>
-            <a:off x="5658256" y="2776845"/>
-            <a:ext cx="2201693" cy="0"/>
+            <a:off x="8164749" y="3205875"/>
+            <a:ext cx="2175753" cy="0"/>
           </a:xfrm>
           <a:prstGeom prst="line">
             <a:avLst/>
@@ -4177,8 +3997,8 @@
         </p:nvCxnSpPr>
         <p:spPr>
           <a:xfrm>
-            <a:off x="6066816" y="3197366"/>
-            <a:ext cx="1773677" cy="0"/>
+            <a:off x="8164749" y="2776845"/>
+            <a:ext cx="1212715" cy="0"/>
           </a:xfrm>
           <a:prstGeom prst="line">
             <a:avLst/>
@@ -4206,9 +4026,9 @@
           <p:nvPr/>
         </p:nvCxnSpPr>
         <p:spPr>
-          <a:xfrm>
-            <a:off x="8164749" y="3205875"/>
-            <a:ext cx="2175753" cy="0"/>
+          <a:xfrm flipV="1">
+            <a:off x="6086271" y="3196147"/>
+            <a:ext cx="0" cy="532997"/>
           </a:xfrm>
           <a:prstGeom prst="line">
             <a:avLst/>
@@ -4236,9 +4056,9 @@
           <p:nvPr/>
         </p:nvCxnSpPr>
         <p:spPr>
-          <a:xfrm>
-            <a:off x="8164749" y="2776845"/>
-            <a:ext cx="1212715" cy="0"/>
+          <a:xfrm flipV="1">
+            <a:off x="5661497" y="2222162"/>
+            <a:ext cx="0" cy="375123"/>
           </a:xfrm>
           <a:prstGeom prst="line">
             <a:avLst/>
@@ -4267,7 +4087,7 @@
         </p:nvCxnSpPr>
         <p:spPr>
           <a:xfrm flipV="1">
-            <a:off x="6086271" y="3196147"/>
+            <a:off x="5371442" y="2243848"/>
             <a:ext cx="0" cy="532997"/>
           </a:xfrm>
           <a:prstGeom prst="line">
@@ -4292,66 +4112,6 @@
       <p:cxnSp>
         <p:nvCxnSpPr>
           <p:cNvPr id="19" name="Connector 18"/>
-          <p:cNvCxnSpPr/>
-          <p:nvPr/>
-        </p:nvCxnSpPr>
-        <p:spPr>
-          <a:xfrm flipV="1">
-            <a:off x="5661497" y="2222162"/>
-            <a:ext cx="0" cy="375123"/>
-          </a:xfrm>
-          <a:prstGeom prst="line">
-            <a:avLst/>
-          </a:prstGeom>
-        </p:spPr>
-        <p:style>
-          <a:lnRef idx="2">
-            <a:schemeClr val="accent1"/>
-          </a:lnRef>
-          <a:fillRef idx="0">
-            <a:schemeClr val="accent1"/>
-          </a:fillRef>
-          <a:effectRef idx="1">
-            <a:schemeClr val="accent1"/>
-          </a:effectRef>
-          <a:fontRef idx="minor">
-            <a:schemeClr val="tx1"/>
-          </a:fontRef>
-        </p:style>
-      </p:cxnSp>
-      <p:cxnSp>
-        <p:nvCxnSpPr>
-          <p:cNvPr id="20" name="Connector 19"/>
-          <p:cNvCxnSpPr/>
-          <p:nvPr/>
-        </p:nvCxnSpPr>
-        <p:spPr>
-          <a:xfrm flipV="1">
-            <a:off x="5371442" y="2243848"/>
-            <a:ext cx="0" cy="532997"/>
-          </a:xfrm>
-          <a:prstGeom prst="line">
-            <a:avLst/>
-          </a:prstGeom>
-        </p:spPr>
-        <p:style>
-          <a:lnRef idx="2">
-            <a:schemeClr val="accent1"/>
-          </a:lnRef>
-          <a:fillRef idx="0">
-            <a:schemeClr val="accent1"/>
-          </a:fillRef>
-          <a:effectRef idx="1">
-            <a:schemeClr val="accent1"/>
-          </a:effectRef>
-          <a:fontRef idx="minor">
-            <a:schemeClr val="tx1"/>
-          </a:fontRef>
-        </p:style>
-      </p:cxnSp>
-      <p:cxnSp>
-        <p:nvCxnSpPr>
-          <p:cNvPr id="21" name="Connector 20"/>
           <p:cNvCxnSpPr/>
           <p:nvPr/>
         </p:nvCxnSpPr>
@@ -4397,57 +4157,9 @@
         <p:nvPr/>
       </p:nvGrpSpPr>
       <p:grpSpPr/>
-      <p:pic>
-        <p:nvPicPr>
-          <p:cNvPr id="2" name="Picture 1" descr="image2.jpeg"/>
-          <p:cNvPicPr>
-            <a:picLocks noChangeAspect="1"/>
-          </p:cNvPicPr>
-          <p:nvPr/>
-        </p:nvPicPr>
-        <p:blipFill>
-          <a:blip r:embed="rId2"/>
-          <a:stretch>
-            <a:fillRect/>
-          </a:stretch>
-        </p:blipFill>
-        <p:spPr>
-          <a:xfrm>
-            <a:off x="188120" y="5525929"/>
-            <a:ext cx="1143000" cy="1224229"/>
-          </a:xfrm>
-          <a:prstGeom prst="rect">
-            <a:avLst/>
-          </a:prstGeom>
-        </p:spPr>
-      </p:pic>
-      <p:pic>
-        <p:nvPicPr>
-          <p:cNvPr id="3" name="Picture 2" descr="image3.jpg"/>
-          <p:cNvPicPr>
-            <a:picLocks noChangeAspect="1"/>
-          </p:cNvPicPr>
-          <p:nvPr/>
-        </p:nvPicPr>
-        <p:blipFill>
-          <a:blip r:embed="rId3"/>
-          <a:stretch>
-            <a:fillRect/>
-          </a:stretch>
-        </p:blipFill>
-        <p:spPr>
-          <a:xfrm>
-            <a:off x="10638881" y="139366"/>
-            <a:ext cx="1410420" cy="1371600"/>
-          </a:xfrm>
-          <a:prstGeom prst="rect">
-            <a:avLst/>
-          </a:prstGeom>
-        </p:spPr>
-      </p:pic>
-      <p:sp>
-        <p:nvSpPr>
-          <p:cNvPr id="4" name="Rectangle 3"/>
+      <p:sp>
+        <p:nvSpPr>
+          <p:cNvPr id="2" name="Rectangle 1"/>
           <p:cNvSpPr/>
           <p:nvPr/>
         </p:nvSpPr>
@@ -4486,7 +4198,7 @@
       </p:sp>
       <p:sp>
         <p:nvSpPr>
-          <p:cNvPr id="5" name="Rectangle 4"/>
+          <p:cNvPr id="3" name="Rectangle 2"/>
           <p:cNvSpPr/>
           <p:nvPr/>
         </p:nvSpPr>
@@ -4541,57 +4253,9 @@
         <p:nvPr/>
       </p:nvGrpSpPr>
       <p:grpSpPr/>
-      <p:pic>
-        <p:nvPicPr>
-          <p:cNvPr id="2" name="Picture 1" descr="image2.jpeg"/>
-          <p:cNvPicPr>
-            <a:picLocks noChangeAspect="1"/>
-          </p:cNvPicPr>
-          <p:nvPr/>
-        </p:nvPicPr>
-        <p:blipFill>
-          <a:blip r:embed="rId2"/>
-          <a:stretch>
-            <a:fillRect/>
-          </a:stretch>
-        </p:blipFill>
-        <p:spPr>
-          <a:xfrm>
-            <a:off x="188120" y="5525929"/>
-            <a:ext cx="1143000" cy="1224229"/>
-          </a:xfrm>
-          <a:prstGeom prst="rect">
-            <a:avLst/>
-          </a:prstGeom>
-        </p:spPr>
-      </p:pic>
-      <p:pic>
-        <p:nvPicPr>
-          <p:cNvPr id="3" name="Picture 2" descr="image3.jpg"/>
-          <p:cNvPicPr>
-            <a:picLocks noChangeAspect="1"/>
-          </p:cNvPicPr>
-          <p:nvPr/>
-        </p:nvPicPr>
-        <p:blipFill>
-          <a:blip r:embed="rId3"/>
-          <a:stretch>
-            <a:fillRect/>
-          </a:stretch>
-        </p:blipFill>
-        <p:spPr>
-          <a:xfrm>
-            <a:off x="10638881" y="139366"/>
-            <a:ext cx="1410420" cy="1371600"/>
-          </a:xfrm>
-          <a:prstGeom prst="rect">
-            <a:avLst/>
-          </a:prstGeom>
-        </p:spPr>
-      </p:pic>
-      <p:sp>
-        <p:nvSpPr>
-          <p:cNvPr id="4" name="Rectangle 3"/>
+      <p:sp>
+        <p:nvSpPr>
+          <p:cNvPr id="2" name="Rectangle 1"/>
           <p:cNvSpPr/>
           <p:nvPr/>
         </p:nvSpPr>
@@ -4630,7 +4294,7 @@
       </p:sp>
       <p:sp>
         <p:nvSpPr>
-          <p:cNvPr id="5" name="Rectangle 4"/>
+          <p:cNvPr id="3" name="Rectangle 2"/>
           <p:cNvSpPr/>
           <p:nvPr/>
         </p:nvSpPr>
@@ -4685,57 +4349,9 @@
         <p:nvPr/>
       </p:nvGrpSpPr>
       <p:grpSpPr/>
-      <p:pic>
-        <p:nvPicPr>
-          <p:cNvPr id="2" name="Picture 1" descr="image2.jpeg"/>
-          <p:cNvPicPr>
-            <a:picLocks noChangeAspect="1"/>
-          </p:cNvPicPr>
-          <p:nvPr/>
-        </p:nvPicPr>
-        <p:blipFill>
-          <a:blip r:embed="rId2"/>
-          <a:stretch>
-            <a:fillRect/>
-          </a:stretch>
-        </p:blipFill>
-        <p:spPr>
-          <a:xfrm>
-            <a:off x="188120" y="5525929"/>
-            <a:ext cx="1143000" cy="1224229"/>
-          </a:xfrm>
-          <a:prstGeom prst="rect">
-            <a:avLst/>
-          </a:prstGeom>
-        </p:spPr>
-      </p:pic>
-      <p:pic>
-        <p:nvPicPr>
-          <p:cNvPr id="3" name="Picture 2" descr="image3.jpg"/>
-          <p:cNvPicPr>
-            <a:picLocks noChangeAspect="1"/>
-          </p:cNvPicPr>
-          <p:nvPr/>
-        </p:nvPicPr>
-        <p:blipFill>
-          <a:blip r:embed="rId3"/>
-          <a:stretch>
-            <a:fillRect/>
-          </a:stretch>
-        </p:blipFill>
-        <p:spPr>
-          <a:xfrm>
-            <a:off x="10638881" y="139366"/>
-            <a:ext cx="1410420" cy="1371600"/>
-          </a:xfrm>
-          <a:prstGeom prst="rect">
-            <a:avLst/>
-          </a:prstGeom>
-        </p:spPr>
-      </p:pic>
-      <p:sp>
-        <p:nvSpPr>
-          <p:cNvPr id="4" name="Rectangle 3"/>
+      <p:sp>
+        <p:nvSpPr>
+          <p:cNvPr id="2" name="Rectangle 1"/>
           <p:cNvSpPr/>
           <p:nvPr/>
         </p:nvSpPr>
@@ -4774,7 +4390,7 @@
       </p:sp>
       <p:sp>
         <p:nvSpPr>
-          <p:cNvPr id="5" name="Rectangle 4"/>
+          <p:cNvPr id="3" name="Rectangle 2"/>
           <p:cNvSpPr/>
           <p:nvPr/>
         </p:nvSpPr>
@@ -4829,57 +4445,9 @@
         <p:nvPr/>
       </p:nvGrpSpPr>
       <p:grpSpPr/>
-      <p:pic>
-        <p:nvPicPr>
-          <p:cNvPr id="2" name="Picture 1" descr="image2.jpeg"/>
-          <p:cNvPicPr>
-            <a:picLocks noChangeAspect="1"/>
-          </p:cNvPicPr>
-          <p:nvPr/>
-        </p:nvPicPr>
-        <p:blipFill>
-          <a:blip r:embed="rId2"/>
-          <a:stretch>
-            <a:fillRect/>
-          </a:stretch>
-        </p:blipFill>
-        <p:spPr>
-          <a:xfrm>
-            <a:off x="188120" y="5525929"/>
-            <a:ext cx="1143000" cy="1224229"/>
-          </a:xfrm>
-          <a:prstGeom prst="rect">
-            <a:avLst/>
-          </a:prstGeom>
-        </p:spPr>
-      </p:pic>
-      <p:pic>
-        <p:nvPicPr>
-          <p:cNvPr id="3" name="Picture 2" descr="image3.jpg"/>
-          <p:cNvPicPr>
-            <a:picLocks noChangeAspect="1"/>
-          </p:cNvPicPr>
-          <p:nvPr/>
-        </p:nvPicPr>
-        <p:blipFill>
-          <a:blip r:embed="rId3"/>
-          <a:stretch>
-            <a:fillRect/>
-          </a:stretch>
-        </p:blipFill>
-        <p:spPr>
-          <a:xfrm>
-            <a:off x="10638881" y="139366"/>
-            <a:ext cx="1410420" cy="1371600"/>
-          </a:xfrm>
-          <a:prstGeom prst="rect">
-            <a:avLst/>
-          </a:prstGeom>
-        </p:spPr>
-      </p:pic>
-      <p:sp>
-        <p:nvSpPr>
-          <p:cNvPr id="4" name="Rectangle 3"/>
+      <p:sp>
+        <p:nvSpPr>
+          <p:cNvPr id="2" name="Rectangle 1"/>
           <p:cNvSpPr/>
           <p:nvPr/>
         </p:nvSpPr>
@@ -4918,7 +4486,7 @@
       </p:sp>
       <p:sp>
         <p:nvSpPr>
-          <p:cNvPr id="5" name="Rectangle 4"/>
+          <p:cNvPr id="3" name="Rectangle 2"/>
           <p:cNvSpPr/>
           <p:nvPr/>
         </p:nvSpPr>
@@ -4973,57 +4541,9 @@
         <p:nvPr/>
       </p:nvGrpSpPr>
       <p:grpSpPr/>
-      <p:pic>
-        <p:nvPicPr>
-          <p:cNvPr id="2" name="Picture 1" descr="image2.jpeg"/>
-          <p:cNvPicPr>
-            <a:picLocks noChangeAspect="1"/>
-          </p:cNvPicPr>
-          <p:nvPr/>
-        </p:nvPicPr>
-        <p:blipFill>
-          <a:blip r:embed="rId2"/>
-          <a:stretch>
-            <a:fillRect/>
-          </a:stretch>
-        </p:blipFill>
-        <p:spPr>
-          <a:xfrm>
-            <a:off x="188120" y="5525929"/>
-            <a:ext cx="1143000" cy="1224229"/>
-          </a:xfrm>
-          <a:prstGeom prst="rect">
-            <a:avLst/>
-          </a:prstGeom>
-        </p:spPr>
-      </p:pic>
-      <p:pic>
-        <p:nvPicPr>
-          <p:cNvPr id="3" name="Picture 2" descr="image3.jpg"/>
-          <p:cNvPicPr>
-            <a:picLocks noChangeAspect="1"/>
-          </p:cNvPicPr>
-          <p:nvPr/>
-        </p:nvPicPr>
-        <p:blipFill>
-          <a:blip r:embed="rId3"/>
-          <a:stretch>
-            <a:fillRect/>
-          </a:stretch>
-        </p:blipFill>
-        <p:spPr>
-          <a:xfrm>
-            <a:off x="10638881" y="139366"/>
-            <a:ext cx="1410420" cy="1371600"/>
-          </a:xfrm>
-          <a:prstGeom prst="rect">
-            <a:avLst/>
-          </a:prstGeom>
-        </p:spPr>
-      </p:pic>
-      <p:sp>
-        <p:nvSpPr>
-          <p:cNvPr id="4" name="Rectangle 3"/>
+      <p:sp>
+        <p:nvSpPr>
+          <p:cNvPr id="2" name="Rectangle 1"/>
           <p:cNvSpPr/>
           <p:nvPr/>
         </p:nvSpPr>
@@ -5062,7 +4582,7 @@
       </p:sp>
       <p:sp>
         <p:nvSpPr>
-          <p:cNvPr id="5" name="Rectangle 4"/>
+          <p:cNvPr id="3" name="Rectangle 2"/>
           <p:cNvSpPr/>
           <p:nvPr/>
         </p:nvSpPr>
@@ -5101,7 +4621,7 @@
       </p:sp>
       <p:sp>
         <p:nvSpPr>
-          <p:cNvPr id="6" name="Rectangle 5"/>
+          <p:cNvPr id="4" name="Rectangle 3"/>
           <p:cNvSpPr/>
           <p:nvPr/>
         </p:nvSpPr>

--- a/examples/recreations/03_Box_Secretary__ArtNonprofit_Info_Planning_Meeting_20201220/out_mat2ppt.pptx
+++ b/examples/recreations/03_Box_Secretary__ArtNonprofit_Info_Planning_Meeting_20201220/out_mat2ppt.pptx
@@ -3154,8 +3154,8 @@
         </p:nvSpPr>
         <p:spPr>
           <a:xfrm>
-            <a:off x="838200" y="365125"/>
-            <a:ext cx="10515600" cy="1325563"/>
+            <a:off x="1524000" y="1122363"/>
+            <a:ext cx="9144000" cy="2387600"/>
           </a:xfrm>
           <a:prstGeom prst="rect">
             <a:avLst/>
@@ -3193,8 +3193,8 @@
         </p:nvSpPr>
         <p:spPr>
           <a:xfrm>
-            <a:off x="838200" y="365125"/>
-            <a:ext cx="10515600" cy="1325563"/>
+            <a:off x="1524000" y="3602038"/>
+            <a:ext cx="9144000" cy="1655762"/>
           </a:xfrm>
           <a:prstGeom prst="rect">
             <a:avLst/>
@@ -3307,7 +3307,7 @@
         </p:nvSpPr>
         <p:spPr>
           <a:xfrm>
-            <a:off x="838200" y="365125"/>
+            <a:off x="493095" y="1226"/>
             <a:ext cx="10515600" cy="1325563"/>
           </a:xfrm>
           <a:prstGeom prst="rect">
@@ -3335,6 +3335,43 @@
             <a:r>
               <a:t>Resources</a:t>
             </a:r>
+          </a:p>
+        </p:txBody>
+      </p:sp>
+      <p:sp>
+        <p:nvSpPr>
+          <p:cNvPr id="3" name="Rectangle 2"/>
+          <p:cNvSpPr/>
+          <p:nvPr/>
+        </p:nvSpPr>
+        <p:spPr>
+          <a:xfrm>
+            <a:off x="493095" y="1432877"/>
+            <a:ext cx="10515600" cy="4351338"/>
+          </a:xfrm>
+          <a:prstGeom prst="rect">
+            <a:avLst/>
+          </a:prstGeom>
+        </p:spPr>
+        <p:style>
+          <a:lnRef idx="1">
+            <a:schemeClr val="accent1"/>
+          </a:lnRef>
+          <a:fillRef idx="3">
+            <a:schemeClr val="accent1"/>
+          </a:fillRef>
+          <a:effectRef idx="2">
+            <a:schemeClr val="accent1"/>
+          </a:effectRef>
+          <a:fontRef idx="minor">
+            <a:schemeClr val="lt1"/>
+          </a:fontRef>
+        </p:style>
+        <p:txBody>
+          <a:bodyPr rtlCol="0" anchor="ctr"/>
+          <a:lstStyle/>
+          <a:p>
+            <a:pPr algn="ctr"/>
           </a:p>
         </p:txBody>
       </p:sp>
@@ -3364,7 +3401,7 @@
         </p:nvSpPr>
         <p:spPr>
           <a:xfrm>
-            <a:off x="838200" y="365125"/>
+            <a:off x="493095" y="1226"/>
             <a:ext cx="10515600" cy="1325563"/>
           </a:xfrm>
           <a:prstGeom prst="rect">
@@ -3460,7 +3497,7 @@
         </p:nvSpPr>
         <p:spPr>
           <a:xfrm>
-            <a:off x="838200" y="365125"/>
+            <a:off x="493095" y="1226"/>
             <a:ext cx="10515600" cy="1325563"/>
           </a:xfrm>
           <a:prstGeom prst="rect">

--- a/examples/recreations/03_Box_Secretary__ArtNonprofit_Info_Planning_Meeting_20201220/out_mat2ppt.pptx
+++ b/examples/recreations/03_Box_Secretary__ArtNonprofit_Info_Planning_Meeting_20201220/out_mat2ppt.pptx
@@ -1,24 +1,27 @@
 
 <file path=ppt/presentation.xml><?xml version="1.0" encoding="utf-8"?>
-<p:presentation xmlns:a="http://schemas.openxmlformats.org/drawingml/2006/main" xmlns:r="http://schemas.openxmlformats.org/officeDocument/2006/relationships" xmlns:p="http://schemas.openxmlformats.org/presentationml/2006/main" saveSubsetFonts="1" autoCompressPictures="0">
+<p:presentation xmlns:a="http://schemas.openxmlformats.org/drawingml/2006/main" xmlns:r="http://schemas.openxmlformats.org/officeDocument/2006/relationships" xmlns:p="http://schemas.openxmlformats.org/presentationml/2006/main" saveSubsetFonts="1">
   <p:sldMasterIdLst>
-    <p:sldMasterId id="2147483648" r:id="rId1"/>
+    <p:sldMasterId id="2147483673" r:id="rId1"/>
   </p:sldMasterIdLst>
+  <p:notesMasterIdLst>
+    <p:notesMasterId r:id="rId13"/>
+  </p:notesMasterIdLst>
   <p:sldIdLst>
-    <p:sldId id="256" r:id="rId7"/>
-    <p:sldId id="257" r:id="rId8"/>
-    <p:sldId id="258" r:id="rId9"/>
-    <p:sldId id="259" r:id="rId10"/>
-    <p:sldId id="260" r:id="rId11"/>
-    <p:sldId id="261" r:id="rId12"/>
-    <p:sldId id="262" r:id="rId13"/>
-    <p:sldId id="263" r:id="rId14"/>
-    <p:sldId id="264" r:id="rId15"/>
-    <p:sldId id="265" r:id="rId16"/>
-    <p:sldId id="266" r:id="rId17"/>
+    <p:sldId id="256" r:id="rId18"/>
+    <p:sldId id="257" r:id="rId19"/>
+    <p:sldId id="258" r:id="rId20"/>
+    <p:sldId id="259" r:id="rId21"/>
+    <p:sldId id="260" r:id="rId22"/>
+    <p:sldId id="261" r:id="rId23"/>
+    <p:sldId id="262" r:id="rId24"/>
+    <p:sldId id="263" r:id="rId25"/>
+    <p:sldId id="264" r:id="rId26"/>
+    <p:sldId id="265" r:id="rId27"/>
+    <p:sldId id="266" r:id="rId28"/>
   </p:sldIdLst>
-  <p:sldSz cx="12192000" cy="6858000" type="screen4x3"/>
-  <p:notesSz cx="6858000" cy="9144000"/>
+  <p:sldSz cx="12192000" cy="6858000"/>
+  <p:notesSz cx="7023100" cy="9309100"/>
   <p:defaultTextStyle>
     <a:defPPr>
       <a:defRPr lang="en-US"/>
@@ -114,7 +117,372 @@
       </a:defRPr>
     </a:lvl9pPr>
   </p:defaultTextStyle>
+  <p:extLst>
+    <p:ext uri="{EFAFB233-063F-42B5-8137-9DF3F51BA10A}">
+      <p15:sldGuideLst xmlns:p15="http://schemas.microsoft.com/office/powerpoint/2012/main">
+        <p15:guide id="1" orient="horz" pos="2160" userDrawn="1">
+          <p15:clr>
+            <a:srgbClr val="A4A3A4"/>
+          </p15:clr>
+        </p15:guide>
+        <p15:guide id="2" pos="3840" userDrawn="1">
+          <p15:clr>
+            <a:srgbClr val="A4A3A4"/>
+          </p15:clr>
+        </p15:guide>
+      </p15:sldGuideLst>
+    </p:ext>
+  </p:extLst>
 </p:presentation>
+</file>
+
+<file path=ppt/notesMasters/notesMaster1.xml><?xml version="1.0" encoding="utf-8"?>
+<p:notesMaster xmlns:a="http://schemas.openxmlformats.org/drawingml/2006/main" xmlns:r="http://schemas.openxmlformats.org/officeDocument/2006/relationships" xmlns:p="http://schemas.openxmlformats.org/presentationml/2006/main">
+  <p:cSld>
+    <p:bg>
+      <p:bgRef idx="1001">
+        <a:schemeClr val="bg1"/>
+      </p:bgRef>
+    </p:bg>
+    <p:spTree>
+      <p:nvGrpSpPr>
+        <p:cNvPr id="1" name=""/>
+        <p:cNvGrpSpPr/>
+        <p:nvPr/>
+      </p:nvGrpSpPr>
+      <p:grpSpPr>
+        <a:xfrm>
+          <a:off x="0" y="0"/>
+          <a:ext cx="0" cy="0"/>
+          <a:chOff x="0" y="0"/>
+          <a:chExt cx="0" cy="0"/>
+        </a:xfrm>
+      </p:grpSpPr>
+      <p:sp>
+        <p:nvSpPr>
+          <p:cNvPr id="2" name="Header Placeholder 1"/>
+          <p:cNvSpPr>
+            <a:spLocks noGrp="1"/>
+          </p:cNvSpPr>
+          <p:nvPr>
+            <p:ph type="hdr" sz="quarter"/>
+          </p:nvPr>
+        </p:nvSpPr>
+        <p:spPr>
+          <a:xfrm>
+            <a:off x="0" y="1"/>
+            <a:ext cx="3043343" cy="467071"/>
+          </a:xfrm>
+          <a:prstGeom prst="rect">
+            <a:avLst/>
+          </a:prstGeom>
+        </p:spPr>
+        <p:txBody>
+          <a:bodyPr vert="horz" lIns="93304" tIns="46653" rIns="93304" bIns="46653" rtlCol="0"/>
+          <a:lstStyle>
+            <a:lvl1pPr algn="l">
+              <a:defRPr sz="1200"/>
+            </a:lvl1pPr>
+          </a:lstStyle>
+          <a:p>
+            <a:endParaRPr lang="en-US"/>
+          </a:p>
+        </p:txBody>
+      </p:sp>
+      <p:sp>
+        <p:nvSpPr>
+          <p:cNvPr id="3" name="Date Placeholder 2"/>
+          <p:cNvSpPr>
+            <a:spLocks noGrp="1"/>
+          </p:cNvSpPr>
+          <p:nvPr>
+            <p:ph type="dt" idx="1"/>
+          </p:nvPr>
+        </p:nvSpPr>
+        <p:spPr>
+          <a:xfrm>
+            <a:off x="3978132" y="1"/>
+            <a:ext cx="3043343" cy="467071"/>
+          </a:xfrm>
+          <a:prstGeom prst="rect">
+            <a:avLst/>
+          </a:prstGeom>
+        </p:spPr>
+        <p:txBody>
+          <a:bodyPr vert="horz" lIns="93304" tIns="46653" rIns="93304" bIns="46653" rtlCol="0"/>
+          <a:lstStyle>
+            <a:lvl1pPr algn="r">
+              <a:defRPr sz="1200"/>
+            </a:lvl1pPr>
+          </a:lstStyle>
+          <a:p>
+            <a:fld id="{7F7B82D3-D4F7-4B8B-8BE1-460FB89887CB}" type="datetimeFigureOut">
+              <a:rPr lang="en-US" smtClean="0"/>
+              <a:t>12/20/2020</a:t>
+            </a:fld>
+            <a:endParaRPr lang="en-US"/>
+          </a:p>
+        </p:txBody>
+      </p:sp>
+      <p:sp>
+        <p:nvSpPr>
+          <p:cNvPr id="4" name="Slide Image Placeholder 3"/>
+          <p:cNvSpPr>
+            <a:spLocks noGrp="1" noRot="1" noChangeAspect="1"/>
+          </p:cNvSpPr>
+          <p:nvPr>
+            <p:ph type="sldImg" idx="2"/>
+          </p:nvPr>
+        </p:nvSpPr>
+        <p:spPr>
+          <a:xfrm>
+            <a:off x="719138" y="1163638"/>
+            <a:ext cx="5584825" cy="3141662"/>
+          </a:xfrm>
+          <a:prstGeom prst="rect">
+            <a:avLst/>
+          </a:prstGeom>
+          <a:noFill/>
+          <a:ln w="12700">
+            <a:solidFill>
+              <a:prstClr val="black"/>
+            </a:solidFill>
+          </a:ln>
+        </p:spPr>
+        <p:txBody>
+          <a:bodyPr vert="horz" lIns="93304" tIns="46653" rIns="93304" bIns="46653" rtlCol="0" anchor="ctr"/>
+          <a:lstStyle/>
+          <a:p>
+            <a:endParaRPr lang="en-US"/>
+          </a:p>
+        </p:txBody>
+      </p:sp>
+      <p:sp>
+        <p:nvSpPr>
+          <p:cNvPr id="5" name="Notes Placeholder 4"/>
+          <p:cNvSpPr>
+            <a:spLocks noGrp="1"/>
+          </p:cNvSpPr>
+          <p:nvPr>
+            <p:ph type="body" sz="quarter" idx="3"/>
+          </p:nvPr>
+        </p:nvSpPr>
+        <p:spPr>
+          <a:xfrm>
+            <a:off x="702310" y="4480005"/>
+            <a:ext cx="5618480" cy="3665459"/>
+          </a:xfrm>
+          <a:prstGeom prst="rect">
+            <a:avLst/>
+          </a:prstGeom>
+        </p:spPr>
+        <p:txBody>
+          <a:bodyPr vert="horz" lIns="93304" tIns="46653" rIns="93304" bIns="46653" rtlCol="0"/>
+          <a:lstStyle/>
+          <a:p>
+            <a:pPr lvl="0"/>
+            <a:r>
+              <a:rPr lang="en-US"/>
+              <a:t>Click to edit Master text styles</a:t>
+            </a:r>
+          </a:p>
+          <a:p>
+            <a:pPr lvl="1"/>
+            <a:r>
+              <a:rPr lang="en-US"/>
+              <a:t>Second level</a:t>
+            </a:r>
+          </a:p>
+          <a:p>
+            <a:pPr lvl="2"/>
+            <a:r>
+              <a:rPr lang="en-US"/>
+              <a:t>Third level</a:t>
+            </a:r>
+          </a:p>
+          <a:p>
+            <a:pPr lvl="3"/>
+            <a:r>
+              <a:rPr lang="en-US"/>
+              <a:t>Fourth level</a:t>
+            </a:r>
+          </a:p>
+          <a:p>
+            <a:pPr lvl="4"/>
+            <a:r>
+              <a:rPr lang="en-US"/>
+              <a:t>Fifth level</a:t>
+            </a:r>
+          </a:p>
+        </p:txBody>
+      </p:sp>
+      <p:sp>
+        <p:nvSpPr>
+          <p:cNvPr id="6" name="Footer Placeholder 5"/>
+          <p:cNvSpPr>
+            <a:spLocks noGrp="1"/>
+          </p:cNvSpPr>
+          <p:nvPr>
+            <p:ph type="ftr" sz="quarter" idx="4"/>
+          </p:nvPr>
+        </p:nvSpPr>
+        <p:spPr>
+          <a:xfrm>
+            <a:off x="0" y="8842030"/>
+            <a:ext cx="3043343" cy="467070"/>
+          </a:xfrm>
+          <a:prstGeom prst="rect">
+            <a:avLst/>
+          </a:prstGeom>
+        </p:spPr>
+        <p:txBody>
+          <a:bodyPr vert="horz" lIns="93304" tIns="46653" rIns="93304" bIns="46653" rtlCol="0" anchor="b"/>
+          <a:lstStyle>
+            <a:lvl1pPr algn="l">
+              <a:defRPr sz="1200"/>
+            </a:lvl1pPr>
+          </a:lstStyle>
+          <a:p>
+            <a:endParaRPr lang="en-US"/>
+          </a:p>
+        </p:txBody>
+      </p:sp>
+      <p:sp>
+        <p:nvSpPr>
+          <p:cNvPr id="7" name="Slide Number Placeholder 6"/>
+          <p:cNvSpPr>
+            <a:spLocks noGrp="1"/>
+          </p:cNvSpPr>
+          <p:nvPr>
+            <p:ph type="sldNum" sz="quarter" idx="5"/>
+          </p:nvPr>
+        </p:nvSpPr>
+        <p:spPr>
+          <a:xfrm>
+            <a:off x="3978132" y="8842030"/>
+            <a:ext cx="3043343" cy="467070"/>
+          </a:xfrm>
+          <a:prstGeom prst="rect">
+            <a:avLst/>
+          </a:prstGeom>
+        </p:spPr>
+        <p:txBody>
+          <a:bodyPr vert="horz" lIns="93304" tIns="46653" rIns="93304" bIns="46653" rtlCol="0" anchor="b"/>
+          <a:lstStyle>
+            <a:lvl1pPr algn="r">
+              <a:defRPr sz="1200"/>
+            </a:lvl1pPr>
+          </a:lstStyle>
+          <a:p>
+            <a:fld id="{211EEFB6-8312-4F1B-A70E-46D57B978E77}" type="slidenum">
+              <a:rPr lang="en-US" smtClean="0"/>
+              <a:t>‹#›</a:t>
+            </a:fld>
+            <a:endParaRPr lang="en-US"/>
+          </a:p>
+        </p:txBody>
+      </p:sp>
+    </p:spTree>
+    <p:extLst>
+      <p:ext uri="{BB962C8B-B14F-4D97-AF65-F5344CB8AC3E}">
+        <p14:creationId xmlns:p14="http://schemas.microsoft.com/office/powerpoint/2010/main" val="2286616826"/>
+      </p:ext>
+    </p:extLst>
+  </p:cSld>
+  <p:clrMap bg1="lt1" tx1="dk1" bg2="lt2" tx2="dk2" accent1="accent1" accent2="accent2" accent3="accent3" accent4="accent4" accent5="accent5" accent6="accent6" hlink="hlink" folHlink="folHlink"/>
+  <p:notesStyle>
+    <a:lvl1pPr marL="0" algn="l" defTabSz="914400" rtl="0" eaLnBrk="1" latinLnBrk="0" hangingPunct="1">
+      <a:defRPr sz="1200" kern="1200">
+        <a:solidFill>
+          <a:schemeClr val="tx1"/>
+        </a:solidFill>
+        <a:latin typeface="+mn-lt"/>
+        <a:ea typeface="+mn-ea"/>
+        <a:cs typeface="+mn-cs"/>
+      </a:defRPr>
+    </a:lvl1pPr>
+    <a:lvl2pPr marL="457200" algn="l" defTabSz="914400" rtl="0" eaLnBrk="1" latinLnBrk="0" hangingPunct="1">
+      <a:defRPr sz="1200" kern="1200">
+        <a:solidFill>
+          <a:schemeClr val="tx1"/>
+        </a:solidFill>
+        <a:latin typeface="+mn-lt"/>
+        <a:ea typeface="+mn-ea"/>
+        <a:cs typeface="+mn-cs"/>
+      </a:defRPr>
+    </a:lvl2pPr>
+    <a:lvl3pPr marL="914400" algn="l" defTabSz="914400" rtl="0" eaLnBrk="1" latinLnBrk="0" hangingPunct="1">
+      <a:defRPr sz="1200" kern="1200">
+        <a:solidFill>
+          <a:schemeClr val="tx1"/>
+        </a:solidFill>
+        <a:latin typeface="+mn-lt"/>
+        <a:ea typeface="+mn-ea"/>
+        <a:cs typeface="+mn-cs"/>
+      </a:defRPr>
+    </a:lvl3pPr>
+    <a:lvl4pPr marL="1371600" algn="l" defTabSz="914400" rtl="0" eaLnBrk="1" latinLnBrk="0" hangingPunct="1">
+      <a:defRPr sz="1200" kern="1200">
+        <a:solidFill>
+          <a:schemeClr val="tx1"/>
+        </a:solidFill>
+        <a:latin typeface="+mn-lt"/>
+        <a:ea typeface="+mn-ea"/>
+        <a:cs typeface="+mn-cs"/>
+      </a:defRPr>
+    </a:lvl4pPr>
+    <a:lvl5pPr marL="1828800" algn="l" defTabSz="914400" rtl="0" eaLnBrk="1" latinLnBrk="0" hangingPunct="1">
+      <a:defRPr sz="1200" kern="1200">
+        <a:solidFill>
+          <a:schemeClr val="tx1"/>
+        </a:solidFill>
+        <a:latin typeface="+mn-lt"/>
+        <a:ea typeface="+mn-ea"/>
+        <a:cs typeface="+mn-cs"/>
+      </a:defRPr>
+    </a:lvl5pPr>
+    <a:lvl6pPr marL="2286000" algn="l" defTabSz="914400" rtl="0" eaLnBrk="1" latinLnBrk="0" hangingPunct="1">
+      <a:defRPr sz="1200" kern="1200">
+        <a:solidFill>
+          <a:schemeClr val="tx1"/>
+        </a:solidFill>
+        <a:latin typeface="+mn-lt"/>
+        <a:ea typeface="+mn-ea"/>
+        <a:cs typeface="+mn-cs"/>
+      </a:defRPr>
+    </a:lvl6pPr>
+    <a:lvl7pPr marL="2743200" algn="l" defTabSz="914400" rtl="0" eaLnBrk="1" latinLnBrk="0" hangingPunct="1">
+      <a:defRPr sz="1200" kern="1200">
+        <a:solidFill>
+          <a:schemeClr val="tx1"/>
+        </a:solidFill>
+        <a:latin typeface="+mn-lt"/>
+        <a:ea typeface="+mn-ea"/>
+        <a:cs typeface="+mn-cs"/>
+      </a:defRPr>
+    </a:lvl7pPr>
+    <a:lvl8pPr marL="3200400" algn="l" defTabSz="914400" rtl="0" eaLnBrk="1" latinLnBrk="0" hangingPunct="1">
+      <a:defRPr sz="1200" kern="1200">
+        <a:solidFill>
+          <a:schemeClr val="tx1"/>
+        </a:solidFill>
+        <a:latin typeface="+mn-lt"/>
+        <a:ea typeface="+mn-ea"/>
+        <a:cs typeface="+mn-cs"/>
+      </a:defRPr>
+    </a:lvl8pPr>
+    <a:lvl9pPr marL="3657600" algn="l" defTabSz="914400" rtl="0" eaLnBrk="1" latinLnBrk="0" hangingPunct="1">
+      <a:defRPr sz="1200" kern="1200">
+        <a:solidFill>
+          <a:schemeClr val="tx1"/>
+        </a:solidFill>
+        <a:latin typeface="+mn-lt"/>
+        <a:ea typeface="+mn-ea"/>
+        <a:cs typeface="+mn-cs"/>
+      </a:defRPr>
+    </a:lvl9pPr>
+  </p:notesStyle>
+</p:notesMaster>
 </file>
 
 <file path=ppt/slideLayouts/slideLayout1.xml><?xml version="1.0" encoding="utf-8"?>
@@ -146,19 +514,23 @@
         </p:nvSpPr>
         <p:spPr>
           <a:xfrm>
-            <a:off x="685800" y="2130425"/>
-            <a:ext cx="7772400" cy="1470025"/>
-          </a:xfrm>
-        </p:spPr>
-        <p:txBody>
-          <a:bodyPr/>
-          <a:lstStyle/>
-          <a:p>
-            <a:r>
-              <a:rPr lang="en-US" smtClean="0"/>
+            <a:off x="1524000" y="1122363"/>
+            <a:ext cx="9144000" cy="2387600"/>
+          </a:xfrm>
+        </p:spPr>
+        <p:txBody>
+          <a:bodyPr anchor="b"/>
+          <a:lstStyle>
+            <a:lvl1pPr algn="ctr">
+              <a:defRPr sz="6000"/>
+            </a:lvl1pPr>
+          </a:lstStyle>
+          <a:p>
+            <a:r>
+              <a:rPr lang="en-US"/>
               <a:t>Click to edit Master title style</a:t>
             </a:r>
-            <a:endParaRPr lang="en-US"/>
+            <a:endParaRPr lang="en-US" dirty="0"/>
           </a:p>
         </p:txBody>
       </p:sp>
@@ -174,8 +546,8 @@
         </p:nvSpPr>
         <p:spPr>
           <a:xfrm>
-            <a:off x="1371600" y="3886200"/>
-            <a:ext cx="6400800" cy="1752600"/>
+            <a:off x="1524000" y="3602038"/>
+            <a:ext cx="9144000" cy="1655762"/>
           </a:xfrm>
         </p:spPr>
         <p:txBody>
@@ -183,112 +555,101 @@
           <a:lstStyle>
             <a:lvl1pPr marL="0" indent="0" algn="ctr">
               <a:buNone/>
-              <a:defRPr>
-                <a:solidFill>
-                  <a:schemeClr val="tx1">
-                    <a:tint val="75000"/>
-                  </a:schemeClr>
-                </a:solidFill>
-              </a:defRPr>
+              <a:defRPr sz="2400"/>
             </a:lvl1pPr>
             <a:lvl2pPr marL="457200" indent="0" algn="ctr">
               <a:buNone/>
-              <a:defRPr>
-                <a:solidFill>
-                  <a:schemeClr val="tx1">
-                    <a:tint val="75000"/>
-                  </a:schemeClr>
-                </a:solidFill>
-              </a:defRPr>
+              <a:defRPr sz="2000"/>
             </a:lvl2pPr>
             <a:lvl3pPr marL="914400" indent="0" algn="ctr">
               <a:buNone/>
-              <a:defRPr>
-                <a:solidFill>
-                  <a:schemeClr val="tx1">
-                    <a:tint val="75000"/>
-                  </a:schemeClr>
-                </a:solidFill>
-              </a:defRPr>
+              <a:defRPr sz="1800"/>
             </a:lvl3pPr>
             <a:lvl4pPr marL="1371600" indent="0" algn="ctr">
               <a:buNone/>
-              <a:defRPr>
-                <a:solidFill>
-                  <a:schemeClr val="tx1">
-                    <a:tint val="75000"/>
-                  </a:schemeClr>
-                </a:solidFill>
-              </a:defRPr>
+              <a:defRPr sz="1600"/>
             </a:lvl4pPr>
             <a:lvl5pPr marL="1828800" indent="0" algn="ctr">
               <a:buNone/>
-              <a:defRPr>
-                <a:solidFill>
-                  <a:schemeClr val="tx1">
-                    <a:tint val="75000"/>
-                  </a:schemeClr>
-                </a:solidFill>
-              </a:defRPr>
+              <a:defRPr sz="1600"/>
             </a:lvl5pPr>
             <a:lvl6pPr marL="2286000" indent="0" algn="ctr">
               <a:buNone/>
-              <a:defRPr>
-                <a:solidFill>
-                  <a:schemeClr val="tx1">
-                    <a:tint val="75000"/>
-                  </a:schemeClr>
-                </a:solidFill>
-              </a:defRPr>
+              <a:defRPr sz="1600"/>
             </a:lvl6pPr>
             <a:lvl7pPr marL="2743200" indent="0" algn="ctr">
               <a:buNone/>
-              <a:defRPr>
-                <a:solidFill>
-                  <a:schemeClr val="tx1">
-                    <a:tint val="75000"/>
-                  </a:schemeClr>
-                </a:solidFill>
-              </a:defRPr>
+              <a:defRPr sz="1600"/>
             </a:lvl7pPr>
             <a:lvl8pPr marL="3200400" indent="0" algn="ctr">
               <a:buNone/>
-              <a:defRPr>
-                <a:solidFill>
-                  <a:schemeClr val="tx1">
-                    <a:tint val="75000"/>
-                  </a:schemeClr>
-                </a:solidFill>
-              </a:defRPr>
+              <a:defRPr sz="1600"/>
             </a:lvl8pPr>
             <a:lvl9pPr marL="3657600" indent="0" algn="ctr">
               <a:buNone/>
-              <a:defRPr>
-                <a:solidFill>
-                  <a:schemeClr val="tx1">
-                    <a:tint val="75000"/>
-                  </a:schemeClr>
-                </a:solidFill>
-              </a:defRPr>
+              <a:defRPr sz="1600"/>
             </a:lvl9pPr>
           </a:lstStyle>
           <a:p>
             <a:r>
+              <a:rPr lang="en-US"/>
+              <a:t>Click to edit Master subtitle style</a:t>
+            </a:r>
+            <a:endParaRPr lang="en-US" dirty="0"/>
+          </a:p>
+        </p:txBody>
+      </p:sp>
+      <p:sp>
+        <p:nvSpPr>
+          <p:cNvPr id="4" name="Date Placeholder 3"/>
+          <p:cNvSpPr>
+            <a:spLocks noGrp="1"/>
+          </p:cNvSpPr>
+          <p:nvPr>
+            <p:ph type="dt" sz="half" idx="10"/>
+          </p:nvPr>
+        </p:nvSpPr>
+        <p:spPr/>
+        <p:txBody>
+          <a:bodyPr/>
+          <a:lstStyle/>
+          <a:p>
+            <a:fld id="{971C0534-AC82-40C9-9D5F-C772AE9BC3F8}" type="datetimeFigureOut">
               <a:rPr lang="en-US" smtClean="0"/>
-              <a:t>Click to edit Master subtitle style</a:t>
-            </a:r>
+              <a:pPr/>
+              <a:t>12/20/2020</a:t>
+            </a:fld>
+            <a:endParaRPr lang="en-US" dirty="0"/>
+          </a:p>
+        </p:txBody>
+      </p:sp>
+      <p:sp>
+        <p:nvSpPr>
+          <p:cNvPr id="5" name="Footer Placeholder 4"/>
+          <p:cNvSpPr>
+            <a:spLocks noGrp="1"/>
+          </p:cNvSpPr>
+          <p:nvPr>
+            <p:ph type="ftr" sz="quarter" idx="11"/>
+          </p:nvPr>
+        </p:nvSpPr>
+        <p:spPr/>
+        <p:txBody>
+          <a:bodyPr/>
+          <a:lstStyle/>
+          <a:p>
             <a:endParaRPr lang="en-US"/>
           </a:p>
         </p:txBody>
       </p:sp>
       <p:sp>
         <p:nvSpPr>
-          <p:cNvPr id="4" name="Date Placeholder 3"/>
-          <p:cNvSpPr>
-            <a:spLocks noGrp="1"/>
-          </p:cNvSpPr>
-          <p:nvPr>
-            <p:ph type="dt" sz="half" idx="10"/>
+          <p:cNvPr id="6" name="Slide Number Placeholder 5"/>
+          <p:cNvSpPr>
+            <a:spLocks noGrp="1"/>
+          </p:cNvSpPr>
+          <p:nvPr>
+            <p:ph type="sldNum" sz="quarter" idx="12"/>
           </p:nvPr>
         </p:nvSpPr>
         <p:spPr/>
@@ -296,49 +657,7 @@
           <a:bodyPr/>
           <a:lstStyle/>
           <a:p>
-            <a:fld id="{5BCAD085-E8A6-8845-BD4E-CB4CCA059FC4}" type="datetimeFigureOut">
-              <a:rPr lang="en-US" smtClean="0"/>
-              <a:t>1/27/13</a:t>
-            </a:fld>
-            <a:endParaRPr lang="en-US"/>
-          </a:p>
-        </p:txBody>
-      </p:sp>
-      <p:sp>
-        <p:nvSpPr>
-          <p:cNvPr id="5" name="Footer Placeholder 4"/>
-          <p:cNvSpPr>
-            <a:spLocks noGrp="1"/>
-          </p:cNvSpPr>
-          <p:nvPr>
-            <p:ph type="ftr" sz="quarter" idx="11"/>
-          </p:nvPr>
-        </p:nvSpPr>
-        <p:spPr/>
-        <p:txBody>
-          <a:bodyPr/>
-          <a:lstStyle/>
-          <a:p>
-            <a:endParaRPr lang="en-US"/>
-          </a:p>
-        </p:txBody>
-      </p:sp>
-      <p:sp>
-        <p:nvSpPr>
-          <p:cNvPr id="6" name="Slide Number Placeholder 5"/>
-          <p:cNvSpPr>
-            <a:spLocks noGrp="1"/>
-          </p:cNvSpPr>
-          <p:nvPr>
-            <p:ph type="sldNum" sz="quarter" idx="12"/>
-          </p:nvPr>
-        </p:nvSpPr>
-        <p:spPr/>
-        <p:txBody>
-          <a:bodyPr/>
-          <a:lstStyle/>
-          <a:p>
-            <a:fld id="{C1FF6DA9-008F-8B48-92A6-B652298478BF}" type="slidenum">
+            <a:fld id="{A58BF1B2-8942-48EC-B5EF-B915FB58F230}" type="slidenum">
               <a:rPr lang="en-US" smtClean="0"/>
               <a:t>‹#›</a:t>
             </a:fld>
@@ -346,10 +665,171 @@
           </a:p>
         </p:txBody>
       </p:sp>
+      <p:sp>
+        <p:nvSpPr>
+          <p:cNvPr id="7" name="Rectangle 6">
+            <a:extLst>
+              <a:ext uri="{FF2B5EF4-FFF2-40B4-BE49-F238E27FC236}">
+                <a16:creationId xmlns:a16="http://schemas.microsoft.com/office/drawing/2014/main" id="{4669A8AA-85C3-4D8C-9C61-3E926044398E}"/>
+              </a:ext>
+            </a:extLst>
+          </p:cNvPr>
+          <p:cNvSpPr/>
+          <p:nvPr userDrawn="1"/>
+        </p:nvSpPr>
+        <p:spPr>
+          <a:xfrm>
+            <a:off x="9682645" y="-4747"/>
+            <a:ext cx="2509355" cy="6869866"/>
+          </a:xfrm>
+          <a:prstGeom prst="rect">
+            <a:avLst/>
+          </a:prstGeom>
+          <a:solidFill>
+            <a:srgbClr val="9B99B3"/>
+          </a:solidFill>
+          <a:ln>
+            <a:noFill/>
+          </a:ln>
+        </p:spPr>
+        <p:style>
+          <a:lnRef idx="2">
+            <a:schemeClr val="accent1">
+              <a:shade val="50000"/>
+            </a:schemeClr>
+          </a:lnRef>
+          <a:fillRef idx="1">
+            <a:schemeClr val="accent1"/>
+          </a:fillRef>
+          <a:effectRef idx="0">
+            <a:schemeClr val="accent1"/>
+          </a:effectRef>
+          <a:fontRef idx="minor">
+            <a:schemeClr val="lt1"/>
+          </a:fontRef>
+        </p:style>
+        <p:txBody>
+          <a:bodyPr rtlCol="0" anchor="ctr"/>
+          <a:lstStyle/>
+          <a:p>
+            <a:pPr algn="ctr"/>
+            <a:endParaRPr lang="en-US" sz="1800"/>
+          </a:p>
+        </p:txBody>
+      </p:sp>
+      <p:sp>
+        <p:nvSpPr>
+          <p:cNvPr id="8" name="Rectangle 7">
+            <a:extLst>
+              <a:ext uri="{FF2B5EF4-FFF2-40B4-BE49-F238E27FC236}">
+                <a16:creationId xmlns:a16="http://schemas.microsoft.com/office/drawing/2014/main" id="{358B2F07-B815-45D0-9D66-9BD0EA66D7C8}"/>
+              </a:ext>
+            </a:extLst>
+          </p:cNvPr>
+          <p:cNvSpPr/>
+          <p:nvPr userDrawn="1"/>
+        </p:nvSpPr>
+        <p:spPr>
+          <a:xfrm>
+            <a:off x="1" y="-4745"/>
+            <a:ext cx="2623225" cy="6869865"/>
+          </a:xfrm>
+          <a:prstGeom prst="rect">
+            <a:avLst/>
+          </a:prstGeom>
+          <a:solidFill>
+            <a:srgbClr val="9B99B3"/>
+          </a:solidFill>
+          <a:ln>
+            <a:noFill/>
+          </a:ln>
+        </p:spPr>
+        <p:style>
+          <a:lnRef idx="2">
+            <a:schemeClr val="accent1">
+              <a:shade val="50000"/>
+            </a:schemeClr>
+          </a:lnRef>
+          <a:fillRef idx="1">
+            <a:schemeClr val="accent1"/>
+          </a:fillRef>
+          <a:effectRef idx="0">
+            <a:schemeClr val="accent1"/>
+          </a:effectRef>
+          <a:fontRef idx="minor">
+            <a:schemeClr val="lt1"/>
+          </a:fontRef>
+        </p:style>
+        <p:txBody>
+          <a:bodyPr rtlCol="0" anchor="ctr"/>
+          <a:lstStyle/>
+          <a:p>
+            <a:pPr algn="ctr"/>
+            <a:endParaRPr lang="en-US" sz="1800"/>
+          </a:p>
+        </p:txBody>
+      </p:sp>
+      <p:sp>
+        <p:nvSpPr>
+          <p:cNvPr id="9" name="Rectangle 8">
+            <a:extLst>
+              <a:ext uri="{FF2B5EF4-FFF2-40B4-BE49-F238E27FC236}">
+                <a16:creationId xmlns:a16="http://schemas.microsoft.com/office/drawing/2014/main" id="{30FBFD15-DCFC-4A08-A2A1-02ACD5A3FF90}"/>
+              </a:ext>
+            </a:extLst>
+          </p:cNvPr>
+          <p:cNvSpPr/>
+          <p:nvPr userDrawn="1"/>
+        </p:nvSpPr>
+        <p:spPr>
+          <a:xfrm>
+            <a:off x="2623226" y="-4747"/>
+            <a:ext cx="7059420" cy="6869866"/>
+          </a:xfrm>
+          <a:prstGeom prst="rect">
+            <a:avLst/>
+          </a:prstGeom>
+          <a:blipFill>
+            <a:blip r:embed="rId2">
+              <a:alphaModFix amt="40000"/>
+            </a:blip>
+            <a:stretch>
+              <a:fillRect/>
+            </a:stretch>
+          </a:blipFill>
+          <a:ln>
+            <a:noFill/>
+          </a:ln>
+        </p:spPr>
+        <p:style>
+          <a:lnRef idx="2">
+            <a:schemeClr val="accent1">
+              <a:shade val="50000"/>
+            </a:schemeClr>
+          </a:lnRef>
+          <a:fillRef idx="1">
+            <a:schemeClr val="accent1"/>
+          </a:fillRef>
+          <a:effectRef idx="0">
+            <a:schemeClr val="accent1"/>
+          </a:effectRef>
+          <a:fontRef idx="minor">
+            <a:schemeClr val="lt1"/>
+          </a:fontRef>
+        </p:style>
+        <p:txBody>
+          <a:bodyPr rtlCol="0" anchor="ctr"/>
+          <a:lstStyle/>
+          <a:p>
+            <a:pPr algn="ctr"/>
+            <a:endParaRPr lang="en-US" sz="1800"/>
+          </a:p>
+        </p:txBody>
+      </p:sp>
     </p:spTree>
     <p:extLst>
       <p:ext uri="{BB962C8B-B14F-4D97-AF65-F5344CB8AC3E}">
-        <p14:creationId xmlns:p14="http://schemas.microsoft.com/office/powerpoint/2010/main" val="3168075583"/>
+        <p14:creationId xmlns:p14="http://schemas.microsoft.com/office/powerpoint/2010/main" val="2628064887"/>
       </p:ext>
     </p:extLst>
   </p:cSld>
@@ -392,83 +872,83 @@
           <a:lstStyle/>
           <a:p>
             <a:r>
+              <a:rPr lang="en-US"/>
+              <a:t>Click to edit Master title style</a:t>
+            </a:r>
+            <a:endParaRPr lang="en-US" dirty="0"/>
+          </a:p>
+        </p:txBody>
+      </p:sp>
+      <p:sp>
+        <p:nvSpPr>
+          <p:cNvPr id="3" name="Vertical Text Placeholder 2"/>
+          <p:cNvSpPr>
+            <a:spLocks noGrp="1"/>
+          </p:cNvSpPr>
+          <p:nvPr>
+            <p:ph type="body" orient="vert" idx="1"/>
+          </p:nvPr>
+        </p:nvSpPr>
+        <p:spPr/>
+        <p:txBody>
+          <a:bodyPr vert="eaVert"/>
+          <a:lstStyle/>
+          <a:p>
+            <a:pPr lvl="0"/>
+            <a:r>
+              <a:rPr lang="en-US"/>
+              <a:t>Edit Master text styles</a:t>
+            </a:r>
+          </a:p>
+          <a:p>
+            <a:pPr lvl="1"/>
+            <a:r>
+              <a:rPr lang="en-US"/>
+              <a:t>Second level</a:t>
+            </a:r>
+          </a:p>
+          <a:p>
+            <a:pPr lvl="2"/>
+            <a:r>
+              <a:rPr lang="en-US"/>
+              <a:t>Third level</a:t>
+            </a:r>
+          </a:p>
+          <a:p>
+            <a:pPr lvl="3"/>
+            <a:r>
+              <a:rPr lang="en-US"/>
+              <a:t>Fourth level</a:t>
+            </a:r>
+          </a:p>
+          <a:p>
+            <a:pPr lvl="4"/>
+            <a:r>
+              <a:rPr lang="en-US"/>
+              <a:t>Fifth level</a:t>
+            </a:r>
+            <a:endParaRPr lang="en-US" dirty="0"/>
+          </a:p>
+        </p:txBody>
+      </p:sp>
+      <p:sp>
+        <p:nvSpPr>
+          <p:cNvPr id="4" name="Date Placeholder 3"/>
+          <p:cNvSpPr>
+            <a:spLocks noGrp="1"/>
+          </p:cNvSpPr>
+          <p:nvPr>
+            <p:ph type="dt" sz="half" idx="10"/>
+          </p:nvPr>
+        </p:nvSpPr>
+        <p:spPr/>
+        <p:txBody>
+          <a:bodyPr/>
+          <a:lstStyle/>
+          <a:p>
+            <a:fld id="{971C0534-AC82-40C9-9D5F-C772AE9BC3F8}" type="datetimeFigureOut">
               <a:rPr lang="en-US" smtClean="0"/>
-              <a:t>Click to edit Master title style</a:t>
-            </a:r>
-            <a:endParaRPr lang="en-US"/>
-          </a:p>
-        </p:txBody>
-      </p:sp>
-      <p:sp>
-        <p:nvSpPr>
-          <p:cNvPr id="3" name="Vertical Text Placeholder 2"/>
-          <p:cNvSpPr>
-            <a:spLocks noGrp="1"/>
-          </p:cNvSpPr>
-          <p:nvPr>
-            <p:ph type="body" orient="vert" idx="1"/>
-          </p:nvPr>
-        </p:nvSpPr>
-        <p:spPr/>
-        <p:txBody>
-          <a:bodyPr vert="eaVert"/>
-          <a:lstStyle/>
-          <a:p>
-            <a:pPr lvl="0"/>
-            <a:r>
-              <a:rPr lang="en-US" smtClean="0"/>
-              <a:t>Click to edit Master text styles</a:t>
-            </a:r>
-          </a:p>
-          <a:p>
-            <a:pPr lvl="1"/>
-            <a:r>
-              <a:rPr lang="en-US" smtClean="0"/>
-              <a:t>Second level</a:t>
-            </a:r>
-          </a:p>
-          <a:p>
-            <a:pPr lvl="2"/>
-            <a:r>
-              <a:rPr lang="en-US" smtClean="0"/>
-              <a:t>Third level</a:t>
-            </a:r>
-          </a:p>
-          <a:p>
-            <a:pPr lvl="3"/>
-            <a:r>
-              <a:rPr lang="en-US" smtClean="0"/>
-              <a:t>Fourth level</a:t>
-            </a:r>
-          </a:p>
-          <a:p>
-            <a:pPr lvl="4"/>
-            <a:r>
-              <a:rPr lang="en-US" smtClean="0"/>
-              <a:t>Fifth level</a:t>
-            </a:r>
-            <a:endParaRPr lang="en-US"/>
-          </a:p>
-        </p:txBody>
-      </p:sp>
-      <p:sp>
-        <p:nvSpPr>
-          <p:cNvPr id="4" name="Date Placeholder 3"/>
-          <p:cNvSpPr>
-            <a:spLocks noGrp="1"/>
-          </p:cNvSpPr>
-          <p:nvPr>
-            <p:ph type="dt" sz="half" idx="10"/>
-          </p:nvPr>
-        </p:nvSpPr>
-        <p:spPr/>
-        <p:txBody>
-          <a:bodyPr/>
-          <a:lstStyle/>
-          <a:p>
-            <a:fld id="{5BCAD085-E8A6-8845-BD4E-CB4CCA059FC4}" type="datetimeFigureOut">
-              <a:rPr lang="en-US" smtClean="0"/>
-              <a:t>1/27/13</a:t>
+              <a:t>12/20/2020</a:t>
             </a:fld>
             <a:endParaRPr lang="en-US"/>
           </a:p>
@@ -508,7 +988,7 @@
           <a:bodyPr/>
           <a:lstStyle/>
           <a:p>
-            <a:fld id="{C1FF6DA9-008F-8B48-92A6-B652298478BF}" type="slidenum">
+            <a:fld id="{A58BF1B2-8942-48EC-B5EF-B915FB58F230}" type="slidenum">
               <a:rPr lang="en-US" smtClean="0"/>
               <a:t>‹#›</a:t>
             </a:fld>
@@ -519,7 +999,7 @@
     </p:spTree>
     <p:extLst>
       <p:ext uri="{BB962C8B-B14F-4D97-AF65-F5344CB8AC3E}">
-        <p14:creationId xmlns:p14="http://schemas.microsoft.com/office/powerpoint/2010/main" val="2910927964"/>
+        <p14:creationId xmlns:p14="http://schemas.microsoft.com/office/powerpoint/2010/main" val="1879894713"/>
       </p:ext>
     </p:extLst>
   </p:cSld>
@@ -558,8 +1038,8 @@
         </p:nvSpPr>
         <p:spPr>
           <a:xfrm>
-            <a:off x="6629400" y="274638"/>
-            <a:ext cx="2057400" cy="5851525"/>
+            <a:off x="8724900" y="365125"/>
+            <a:ext cx="2628900" cy="5811838"/>
           </a:xfrm>
         </p:spPr>
         <p:txBody>
@@ -567,88 +1047,88 @@
           <a:lstStyle/>
           <a:p>
             <a:r>
+              <a:rPr lang="en-US"/>
+              <a:t>Click to edit Master title style</a:t>
+            </a:r>
+            <a:endParaRPr lang="en-US" dirty="0"/>
+          </a:p>
+        </p:txBody>
+      </p:sp>
+      <p:sp>
+        <p:nvSpPr>
+          <p:cNvPr id="3" name="Vertical Text Placeholder 2"/>
+          <p:cNvSpPr>
+            <a:spLocks noGrp="1"/>
+          </p:cNvSpPr>
+          <p:nvPr>
+            <p:ph type="body" orient="vert" idx="1"/>
+          </p:nvPr>
+        </p:nvSpPr>
+        <p:spPr>
+          <a:xfrm>
+            <a:off x="838200" y="365125"/>
+            <a:ext cx="7734300" cy="5811838"/>
+          </a:xfrm>
+        </p:spPr>
+        <p:txBody>
+          <a:bodyPr vert="eaVert"/>
+          <a:lstStyle/>
+          <a:p>
+            <a:pPr lvl="0"/>
+            <a:r>
+              <a:rPr lang="en-US"/>
+              <a:t>Edit Master text styles</a:t>
+            </a:r>
+          </a:p>
+          <a:p>
+            <a:pPr lvl="1"/>
+            <a:r>
+              <a:rPr lang="en-US"/>
+              <a:t>Second level</a:t>
+            </a:r>
+          </a:p>
+          <a:p>
+            <a:pPr lvl="2"/>
+            <a:r>
+              <a:rPr lang="en-US"/>
+              <a:t>Third level</a:t>
+            </a:r>
+          </a:p>
+          <a:p>
+            <a:pPr lvl="3"/>
+            <a:r>
+              <a:rPr lang="en-US"/>
+              <a:t>Fourth level</a:t>
+            </a:r>
+          </a:p>
+          <a:p>
+            <a:pPr lvl="4"/>
+            <a:r>
+              <a:rPr lang="en-US"/>
+              <a:t>Fifth level</a:t>
+            </a:r>
+            <a:endParaRPr lang="en-US" dirty="0"/>
+          </a:p>
+        </p:txBody>
+      </p:sp>
+      <p:sp>
+        <p:nvSpPr>
+          <p:cNvPr id="4" name="Date Placeholder 3"/>
+          <p:cNvSpPr>
+            <a:spLocks noGrp="1"/>
+          </p:cNvSpPr>
+          <p:nvPr>
+            <p:ph type="dt" sz="half" idx="10"/>
+          </p:nvPr>
+        </p:nvSpPr>
+        <p:spPr/>
+        <p:txBody>
+          <a:bodyPr/>
+          <a:lstStyle/>
+          <a:p>
+            <a:fld id="{971C0534-AC82-40C9-9D5F-C772AE9BC3F8}" type="datetimeFigureOut">
               <a:rPr lang="en-US" smtClean="0"/>
-              <a:t>Click to edit Master title style</a:t>
-            </a:r>
-            <a:endParaRPr lang="en-US"/>
-          </a:p>
-        </p:txBody>
-      </p:sp>
-      <p:sp>
-        <p:nvSpPr>
-          <p:cNvPr id="3" name="Vertical Text Placeholder 2"/>
-          <p:cNvSpPr>
-            <a:spLocks noGrp="1"/>
-          </p:cNvSpPr>
-          <p:nvPr>
-            <p:ph type="body" orient="vert" idx="1"/>
-          </p:nvPr>
-        </p:nvSpPr>
-        <p:spPr>
-          <a:xfrm>
-            <a:off x="457200" y="274638"/>
-            <a:ext cx="6019800" cy="5851525"/>
-          </a:xfrm>
-        </p:spPr>
-        <p:txBody>
-          <a:bodyPr vert="eaVert"/>
-          <a:lstStyle/>
-          <a:p>
-            <a:pPr lvl="0"/>
-            <a:r>
-              <a:rPr lang="en-US" smtClean="0"/>
-              <a:t>Click to edit Master text styles</a:t>
-            </a:r>
-          </a:p>
-          <a:p>
-            <a:pPr lvl="1"/>
-            <a:r>
-              <a:rPr lang="en-US" smtClean="0"/>
-              <a:t>Second level</a:t>
-            </a:r>
-          </a:p>
-          <a:p>
-            <a:pPr lvl="2"/>
-            <a:r>
-              <a:rPr lang="en-US" smtClean="0"/>
-              <a:t>Third level</a:t>
-            </a:r>
-          </a:p>
-          <a:p>
-            <a:pPr lvl="3"/>
-            <a:r>
-              <a:rPr lang="en-US" smtClean="0"/>
-              <a:t>Fourth level</a:t>
-            </a:r>
-          </a:p>
-          <a:p>
-            <a:pPr lvl="4"/>
-            <a:r>
-              <a:rPr lang="en-US" smtClean="0"/>
-              <a:t>Fifth level</a:t>
-            </a:r>
-            <a:endParaRPr lang="en-US"/>
-          </a:p>
-        </p:txBody>
-      </p:sp>
-      <p:sp>
-        <p:nvSpPr>
-          <p:cNvPr id="4" name="Date Placeholder 3"/>
-          <p:cNvSpPr>
-            <a:spLocks noGrp="1"/>
-          </p:cNvSpPr>
-          <p:nvPr>
-            <p:ph type="dt" sz="half" idx="10"/>
-          </p:nvPr>
-        </p:nvSpPr>
-        <p:spPr/>
-        <p:txBody>
-          <a:bodyPr/>
-          <a:lstStyle/>
-          <a:p>
-            <a:fld id="{5BCAD085-E8A6-8845-BD4E-CB4CCA059FC4}" type="datetimeFigureOut">
-              <a:rPr lang="en-US" smtClean="0"/>
-              <a:t>1/27/13</a:t>
+              <a:t>12/20/2020</a:t>
             </a:fld>
             <a:endParaRPr lang="en-US"/>
           </a:p>
@@ -688,7 +1168,7 @@
           <a:bodyPr/>
           <a:lstStyle/>
           <a:p>
-            <a:fld id="{C1FF6DA9-008F-8B48-92A6-B652298478BF}" type="slidenum">
+            <a:fld id="{A58BF1B2-8942-48EC-B5EF-B915FB58F230}" type="slidenum">
               <a:rPr lang="en-US" smtClean="0"/>
               <a:t>‹#›</a:t>
             </a:fld>
@@ -699,7 +1179,7 @@
     </p:spTree>
     <p:extLst>
       <p:ext uri="{BB962C8B-B14F-4D97-AF65-F5344CB8AC3E}">
-        <p14:creationId xmlns:p14="http://schemas.microsoft.com/office/powerpoint/2010/main" val="3612223792"/>
+        <p14:creationId xmlns:p14="http://schemas.microsoft.com/office/powerpoint/2010/main" val="3536767186"/>
       </p:ext>
     </p:extLst>
   </p:cSld>
@@ -736,27 +1216,112 @@
             <p:ph type="title"/>
           </p:nvPr>
         </p:nvSpPr>
+        <p:spPr>
+          <a:xfrm>
+            <a:off x="493095" y="1226"/>
+            <a:ext cx="10515600" cy="1325563"/>
+          </a:xfrm>
+        </p:spPr>
+        <p:txBody>
+          <a:bodyPr/>
+          <a:lstStyle/>
+          <a:p>
+            <a:r>
+              <a:rPr lang="en-US"/>
+              <a:t>Click to edit Master title style</a:t>
+            </a:r>
+            <a:endParaRPr lang="en-US" dirty="0"/>
+          </a:p>
+        </p:txBody>
+      </p:sp>
+      <p:sp>
+        <p:nvSpPr>
+          <p:cNvPr id="3" name="Content Placeholder 2"/>
+          <p:cNvSpPr>
+            <a:spLocks noGrp="1"/>
+          </p:cNvSpPr>
+          <p:nvPr>
+            <p:ph idx="1"/>
+          </p:nvPr>
+        </p:nvSpPr>
+        <p:spPr>
+          <a:xfrm>
+            <a:off x="493095" y="1432877"/>
+            <a:ext cx="10515600" cy="4351338"/>
+          </a:xfrm>
+        </p:spPr>
+        <p:txBody>
+          <a:bodyPr/>
+          <a:lstStyle/>
+          <a:p>
+            <a:pPr lvl="0"/>
+            <a:r>
+              <a:rPr lang="en-US"/>
+              <a:t>Edit Master text styles</a:t>
+            </a:r>
+          </a:p>
+          <a:p>
+            <a:pPr lvl="1"/>
+            <a:r>
+              <a:rPr lang="en-US"/>
+              <a:t>Second level</a:t>
+            </a:r>
+          </a:p>
+          <a:p>
+            <a:pPr lvl="2"/>
+            <a:r>
+              <a:rPr lang="en-US"/>
+              <a:t>Third level</a:t>
+            </a:r>
+          </a:p>
+          <a:p>
+            <a:pPr lvl="3"/>
+            <a:r>
+              <a:rPr lang="en-US"/>
+              <a:t>Fourth level</a:t>
+            </a:r>
+          </a:p>
+          <a:p>
+            <a:pPr lvl="4"/>
+            <a:r>
+              <a:rPr lang="en-US"/>
+              <a:t>Fifth level</a:t>
+            </a:r>
+            <a:endParaRPr lang="en-US" dirty="0"/>
+          </a:p>
+        </p:txBody>
+      </p:sp>
+      <p:sp>
+        <p:nvSpPr>
+          <p:cNvPr id="4" name="Date Placeholder 3"/>
+          <p:cNvSpPr>
+            <a:spLocks noGrp="1"/>
+          </p:cNvSpPr>
+          <p:nvPr>
+            <p:ph type="dt" sz="half" idx="10"/>
+          </p:nvPr>
+        </p:nvSpPr>
         <p:spPr/>
         <p:txBody>
           <a:bodyPr/>
           <a:lstStyle/>
           <a:p>
-            <a:r>
+            <a:fld id="{C764DE79-268F-4C1A-8933-263129D2AF90}" type="datetimeFigureOut">
               <a:rPr lang="en-US" smtClean="0"/>
-              <a:t>Click to edit Master title style</a:t>
-            </a:r>
-            <a:endParaRPr lang="en-US"/>
-          </a:p>
-        </p:txBody>
-      </p:sp>
-      <p:sp>
-        <p:nvSpPr>
-          <p:cNvPr id="3" name="Content Placeholder 2"/>
-          <p:cNvSpPr>
-            <a:spLocks noGrp="1"/>
-          </p:cNvSpPr>
-          <p:nvPr>
-            <p:ph idx="1"/>
+              <a:t>12/20/2020</a:t>
+            </a:fld>
+            <a:endParaRPr lang="en-US" dirty="0"/>
+          </a:p>
+        </p:txBody>
+      </p:sp>
+      <p:sp>
+        <p:nvSpPr>
+          <p:cNvPr id="5" name="Footer Placeholder 4"/>
+          <p:cNvSpPr>
+            <a:spLocks noGrp="1"/>
+          </p:cNvSpPr>
+          <p:nvPr>
+            <p:ph type="ftr" sz="quarter" idx="11"/>
           </p:nvPr>
         </p:nvSpPr>
         <p:spPr/>
@@ -764,51 +1329,18 @@
           <a:bodyPr/>
           <a:lstStyle/>
           <a:p>
-            <a:pPr lvl="0"/>
-            <a:r>
-              <a:rPr lang="en-US" smtClean="0"/>
-              <a:t>Click to edit Master text styles</a:t>
-            </a:r>
-          </a:p>
-          <a:p>
-            <a:pPr lvl="1"/>
-            <a:r>
-              <a:rPr lang="en-US" smtClean="0"/>
-              <a:t>Second level</a:t>
-            </a:r>
-          </a:p>
-          <a:p>
-            <a:pPr lvl="2"/>
-            <a:r>
-              <a:rPr lang="en-US" smtClean="0"/>
-              <a:t>Third level</a:t>
-            </a:r>
-          </a:p>
-          <a:p>
-            <a:pPr lvl="3"/>
-            <a:r>
-              <a:rPr lang="en-US" smtClean="0"/>
-              <a:t>Fourth level</a:t>
-            </a:r>
-          </a:p>
-          <a:p>
-            <a:pPr lvl="4"/>
-            <a:r>
-              <a:rPr lang="en-US" smtClean="0"/>
-              <a:t>Fifth level</a:t>
-            </a:r>
-            <a:endParaRPr lang="en-US"/>
-          </a:p>
-        </p:txBody>
-      </p:sp>
-      <p:sp>
-        <p:nvSpPr>
-          <p:cNvPr id="4" name="Date Placeholder 3"/>
-          <p:cNvSpPr>
-            <a:spLocks noGrp="1"/>
-          </p:cNvSpPr>
-          <p:nvPr>
-            <p:ph type="dt" sz="half" idx="10"/>
+            <a:endParaRPr lang="en-US" dirty="0"/>
+          </a:p>
+        </p:txBody>
+      </p:sp>
+      <p:sp>
+        <p:nvSpPr>
+          <p:cNvPr id="6" name="Slide Number Placeholder 5"/>
+          <p:cNvSpPr>
+            <a:spLocks noGrp="1"/>
+          </p:cNvSpPr>
+          <p:nvPr>
+            <p:ph type="sldNum" sz="quarter" idx="12"/>
           </p:nvPr>
         </p:nvSpPr>
         <p:spPr/>
@@ -816,60 +1348,235 @@
           <a:bodyPr/>
           <a:lstStyle/>
           <a:p>
-            <a:fld id="{5BCAD085-E8A6-8845-BD4E-CB4CCA059FC4}" type="datetimeFigureOut">
-              <a:rPr lang="en-US" smtClean="0"/>
-              <a:t>1/27/13</a:t>
-            </a:fld>
-            <a:endParaRPr lang="en-US"/>
-          </a:p>
-        </p:txBody>
-      </p:sp>
-      <p:sp>
-        <p:nvSpPr>
-          <p:cNvPr id="5" name="Footer Placeholder 4"/>
-          <p:cNvSpPr>
-            <a:spLocks noGrp="1"/>
-          </p:cNvSpPr>
-          <p:nvPr>
-            <p:ph type="ftr" sz="quarter" idx="11"/>
-          </p:nvPr>
-        </p:nvSpPr>
-        <p:spPr/>
-        <p:txBody>
-          <a:bodyPr/>
-          <a:lstStyle/>
-          <a:p>
-            <a:endParaRPr lang="en-US"/>
-          </a:p>
-        </p:txBody>
-      </p:sp>
-      <p:sp>
-        <p:nvSpPr>
-          <p:cNvPr id="6" name="Slide Number Placeholder 5"/>
-          <p:cNvSpPr>
-            <a:spLocks noGrp="1"/>
-          </p:cNvSpPr>
-          <p:nvPr>
-            <p:ph type="sldNum" sz="quarter" idx="12"/>
-          </p:nvPr>
-        </p:nvSpPr>
-        <p:spPr/>
-        <p:txBody>
-          <a:bodyPr/>
-          <a:lstStyle/>
-          <a:p>
-            <a:fld id="{C1FF6DA9-008F-8B48-92A6-B652298478BF}" type="slidenum">
+            <a:fld id="{48F63A3B-78C7-47BE-AE5E-E10140E04643}" type="slidenum">
               <a:rPr lang="en-US" smtClean="0"/>
               <a:t>‹#›</a:t>
             </a:fld>
-            <a:endParaRPr lang="en-US"/>
-          </a:p>
-        </p:txBody>
-      </p:sp>
+            <a:endParaRPr lang="en-US" dirty="0"/>
+          </a:p>
+        </p:txBody>
+      </p:sp>
+      <p:pic>
+        <p:nvPicPr>
+          <p:cNvPr id="7" name="Picture 6" descr="http://holychildcatholicschool.org/images/AMDG.jpg">
+            <a:extLst>
+              <a:ext uri="{FF2B5EF4-FFF2-40B4-BE49-F238E27FC236}">
+                <a16:creationId xmlns:a16="http://schemas.microsoft.com/office/drawing/2014/main" id="{1A075D24-58FB-45E0-97FB-D110E42AAD23}"/>
+              </a:ext>
+            </a:extLst>
+          </p:cNvPr>
+          <p:cNvPicPr>
+            <a:picLocks noChangeAspect="1" noChangeArrowheads="1"/>
+          </p:cNvPicPr>
+          <p:nvPr userDrawn="1"/>
+        </p:nvPicPr>
+        <p:blipFill>
+          <a:blip r:embed="rId2">
+            <a:extLst>
+              <a:ext uri="{28A0092B-C50C-407E-A947-70E740481C1C}">
+                <a14:useLocalDpi xmlns:a14="http://schemas.microsoft.com/office/drawing/2010/main" val="0"/>
+              </a:ext>
+            </a:extLst>
+          </a:blip>
+          <a:srcRect/>
+          <a:stretch>
+            <a:fillRect/>
+          </a:stretch>
+        </p:blipFill>
+        <p:spPr bwMode="auto">
+          <a:xfrm>
+            <a:off x="188120" y="5525929"/>
+            <a:ext cx="1143000" cy="1224229"/>
+          </a:xfrm>
+          <a:prstGeom prst="rect">
+            <a:avLst/>
+          </a:prstGeom>
+          <a:noFill/>
+          <a:extLst>
+            <a:ext uri="{909E8E84-426E-40DD-AFC4-6F175D3DCCD1}">
+              <a14:hiddenFill xmlns:a14="http://schemas.microsoft.com/office/drawing/2010/main">
+                <a:solidFill>
+                  <a:srgbClr val="FFFFFF"/>
+                </a:solidFill>
+              </a14:hiddenFill>
+            </a:ext>
+          </a:extLst>
+        </p:spPr>
+      </p:pic>
+      <p:pic>
+        <p:nvPicPr>
+          <p:cNvPr id="8" name="Content Placeholder 5">
+            <a:extLst>
+              <a:ext uri="{FF2B5EF4-FFF2-40B4-BE49-F238E27FC236}">
+                <a16:creationId xmlns:a16="http://schemas.microsoft.com/office/drawing/2014/main" id="{FB4AF569-35E8-469F-B966-1D4991D7CAC2}"/>
+              </a:ext>
+            </a:extLst>
+          </p:cNvPr>
+          <p:cNvPicPr>
+            <a:picLocks noChangeAspect="1"/>
+          </p:cNvPicPr>
+          <p:nvPr userDrawn="1"/>
+        </p:nvPicPr>
+        <p:blipFill>
+          <a:blip r:embed="rId3">
+            <a:extLst>
+              <a:ext uri="{28A0092B-C50C-407E-A947-70E740481C1C}">
+                <a14:useLocalDpi xmlns:a14="http://schemas.microsoft.com/office/drawing/2010/main" val="0"/>
+              </a:ext>
+            </a:extLst>
+          </a:blip>
+          <a:stretch>
+            <a:fillRect/>
+          </a:stretch>
+        </p:blipFill>
+        <p:spPr>
+          <a:xfrm>
+            <a:off x="10638881" y="139366"/>
+            <a:ext cx="1410420" cy="1371600"/>
+          </a:xfrm>
+          <a:prstGeom prst="rect">
+            <a:avLst/>
+          </a:prstGeom>
+        </p:spPr>
+      </p:pic>
+      <p:sp>
+        <p:nvSpPr>
+          <p:cNvPr id="9" name="TextBox 8">
+            <a:extLst>
+              <a:ext uri="{FF2B5EF4-FFF2-40B4-BE49-F238E27FC236}">
+                <a16:creationId xmlns:a16="http://schemas.microsoft.com/office/drawing/2014/main" id="{B84A9ABD-6110-4F9E-A27C-F9036C891C1E}"/>
+              </a:ext>
+            </a:extLst>
+          </p:cNvPr>
+          <p:cNvSpPr txBox="1"/>
+          <p:nvPr userDrawn="1"/>
+        </p:nvSpPr>
+        <p:spPr>
+          <a:xfrm>
+            <a:off x="3201787" y="6315104"/>
+            <a:ext cx="8534400" cy="369332"/>
+          </a:xfrm>
+          <a:prstGeom prst="rect">
+            <a:avLst/>
+          </a:prstGeom>
+          <a:noFill/>
+        </p:spPr>
+        <p:txBody>
+          <a:bodyPr wrap="square" rtlCol="0">
+            <a:spAutoFit/>
+          </a:bodyPr>
+          <a:lstStyle/>
+          <a:p>
+            <a:pPr algn="r"/>
+            <a:r>
+              <a:rPr lang="en-US" sz="1800" b="1" dirty="0">
+                <a:solidFill>
+                  <a:schemeClr val="accent1">
+                    <a:lumMod val="50000"/>
+                  </a:schemeClr>
+                </a:solidFill>
+                <a:latin typeface="Times New Roman" panose="02020603050405020304" pitchFamily="18" charset="0"/>
+                <a:cs typeface="Times New Roman" panose="02020603050405020304" pitchFamily="18" charset="0"/>
+              </a:rPr>
+              <a:t>HOLY CHILD CATHOLIC SCHOOL: RAISING SAINTS, FORMING SCHOLARS</a:t>
+            </a:r>
+          </a:p>
+        </p:txBody>
+      </p:sp>
+      <p:cxnSp>
+        <p:nvCxnSpPr>
+          <p:cNvPr id="10" name="Straight Connector 9">
+            <a:extLst>
+              <a:ext uri="{FF2B5EF4-FFF2-40B4-BE49-F238E27FC236}">
+                <a16:creationId xmlns:a16="http://schemas.microsoft.com/office/drawing/2014/main" id="{388B6997-9B4F-4EE7-914A-92A8BA753781}"/>
+              </a:ext>
+            </a:extLst>
+          </p:cNvPr>
+          <p:cNvCxnSpPr>
+            <a:cxnSpLocks/>
+          </p:cNvCxnSpPr>
+          <p:nvPr userDrawn="1"/>
+        </p:nvCxnSpPr>
+        <p:spPr>
+          <a:xfrm>
+            <a:off x="1449421" y="6176963"/>
+            <a:ext cx="10302312" cy="0"/>
+          </a:xfrm>
+          <a:prstGeom prst="line">
+            <a:avLst/>
+          </a:prstGeom>
+          <a:ln w="76200">
+            <a:solidFill>
+              <a:schemeClr val="accent1">
+                <a:lumMod val="50000"/>
+              </a:schemeClr>
+            </a:solidFill>
+          </a:ln>
+        </p:spPr>
+        <p:style>
+          <a:lnRef idx="1">
+            <a:schemeClr val="accent1"/>
+          </a:lnRef>
+          <a:fillRef idx="0">
+            <a:schemeClr val="accent1"/>
+          </a:fillRef>
+          <a:effectRef idx="0">
+            <a:schemeClr val="accent1"/>
+          </a:effectRef>
+          <a:fontRef idx="minor">
+            <a:schemeClr val="tx1"/>
+          </a:fontRef>
+        </p:style>
+      </p:cxnSp>
+      <p:cxnSp>
+        <p:nvCxnSpPr>
+          <p:cNvPr id="11" name="Straight Connector 10">
+            <a:extLst>
+              <a:ext uri="{FF2B5EF4-FFF2-40B4-BE49-F238E27FC236}">
+                <a16:creationId xmlns:a16="http://schemas.microsoft.com/office/drawing/2014/main" id="{03000B35-988C-48A1-ADC2-1647C99D651C}"/>
+              </a:ext>
+            </a:extLst>
+          </p:cNvPr>
+          <p:cNvCxnSpPr>
+            <a:cxnSpLocks/>
+          </p:cNvCxnSpPr>
+          <p:nvPr userDrawn="1"/>
+        </p:nvCxnSpPr>
+        <p:spPr>
+          <a:xfrm>
+            <a:off x="535022" y="1083971"/>
+            <a:ext cx="10029217" cy="0"/>
+          </a:xfrm>
+          <a:prstGeom prst="line">
+            <a:avLst/>
+          </a:prstGeom>
+          <a:ln w="76200">
+            <a:solidFill>
+              <a:schemeClr val="accent1">
+                <a:lumMod val="50000"/>
+              </a:schemeClr>
+            </a:solidFill>
+          </a:ln>
+        </p:spPr>
+        <p:style>
+          <a:lnRef idx="1">
+            <a:schemeClr val="accent1"/>
+          </a:lnRef>
+          <a:fillRef idx="0">
+            <a:schemeClr val="accent1"/>
+          </a:fillRef>
+          <a:effectRef idx="0">
+            <a:schemeClr val="accent1"/>
+          </a:effectRef>
+          <a:fontRef idx="minor">
+            <a:schemeClr val="tx1"/>
+          </a:fontRef>
+        </p:style>
+      </p:cxnSp>
     </p:spTree>
     <p:extLst>
       <p:ext uri="{BB962C8B-B14F-4D97-AF65-F5344CB8AC3E}">
-        <p14:creationId xmlns:p14="http://schemas.microsoft.com/office/powerpoint/2010/main" val="2614314258"/>
+        <p14:creationId xmlns:p14="http://schemas.microsoft.com/office/powerpoint/2010/main" val="2625680947"/>
       </p:ext>
     </p:extLst>
   </p:cSld>
@@ -908,23 +1615,23 @@
         </p:nvSpPr>
         <p:spPr>
           <a:xfrm>
-            <a:off x="722313" y="4406900"/>
-            <a:ext cx="7772400" cy="1362075"/>
-          </a:xfrm>
-        </p:spPr>
-        <p:txBody>
-          <a:bodyPr anchor="t"/>
+            <a:off x="831850" y="1709738"/>
+            <a:ext cx="10515600" cy="2852737"/>
+          </a:xfrm>
+        </p:spPr>
+        <p:txBody>
+          <a:bodyPr anchor="b"/>
           <a:lstStyle>
-            <a:lvl1pPr algn="l">
-              <a:defRPr sz="4000" b="1" cap="all"/>
+            <a:lvl1pPr>
+              <a:defRPr sz="6000"/>
             </a:lvl1pPr>
           </a:lstStyle>
           <a:p>
             <a:r>
-              <a:rPr lang="en-US" smtClean="0"/>
+              <a:rPr lang="en-US"/>
               <a:t>Click to edit Master title style</a:t>
             </a:r>
-            <a:endParaRPr lang="en-US"/>
+            <a:endParaRPr lang="en-US" dirty="0"/>
           </a:p>
         </p:txBody>
       </p:sp>
@@ -940,16 +1647,16 @@
         </p:nvSpPr>
         <p:spPr>
           <a:xfrm>
-            <a:off x="722313" y="2906713"/>
-            <a:ext cx="7772400" cy="1500187"/>
-          </a:xfrm>
-        </p:spPr>
-        <p:txBody>
-          <a:bodyPr anchor="b"/>
+            <a:off x="831850" y="4589463"/>
+            <a:ext cx="10515600" cy="1500187"/>
+          </a:xfrm>
+        </p:spPr>
+        <p:txBody>
+          <a:bodyPr/>
           <a:lstStyle>
             <a:lvl1pPr marL="0" indent="0">
               <a:buNone/>
-              <a:defRPr sz="2000">
+              <a:defRPr sz="2400">
                 <a:solidFill>
                   <a:schemeClr val="tx1">
                     <a:tint val="75000"/>
@@ -959,7 +1666,7 @@
             </a:lvl1pPr>
             <a:lvl2pPr marL="457200" indent="0">
               <a:buNone/>
-              <a:defRPr sz="1800">
+              <a:defRPr sz="2000">
                 <a:solidFill>
                   <a:schemeClr val="tx1">
                     <a:tint val="75000"/>
@@ -969,7 +1676,7 @@
             </a:lvl2pPr>
             <a:lvl3pPr marL="914400" indent="0">
               <a:buNone/>
-              <a:defRPr sz="1600">
+              <a:defRPr sz="1800">
                 <a:solidFill>
                   <a:schemeClr val="tx1">
                     <a:tint val="75000"/>
@@ -979,7 +1686,7 @@
             </a:lvl3pPr>
             <a:lvl4pPr marL="1371600" indent="0">
               <a:buNone/>
-              <a:defRPr sz="1400">
+              <a:defRPr sz="1600">
                 <a:solidFill>
                   <a:schemeClr val="tx1">
                     <a:tint val="75000"/>
@@ -989,7 +1696,7 @@
             </a:lvl4pPr>
             <a:lvl5pPr marL="1828800" indent="0">
               <a:buNone/>
-              <a:defRPr sz="1400">
+              <a:defRPr sz="1600">
                 <a:solidFill>
                   <a:schemeClr val="tx1">
                     <a:tint val="75000"/>
@@ -999,7 +1706,7 @@
             </a:lvl5pPr>
             <a:lvl6pPr marL="2286000" indent="0">
               <a:buNone/>
-              <a:defRPr sz="1400">
+              <a:defRPr sz="1600">
                 <a:solidFill>
                   <a:schemeClr val="tx1">
                     <a:tint val="75000"/>
@@ -1009,7 +1716,7 @@
             </a:lvl6pPr>
             <a:lvl7pPr marL="2743200" indent="0">
               <a:buNone/>
-              <a:defRPr sz="1400">
+              <a:defRPr sz="1600">
                 <a:solidFill>
                   <a:schemeClr val="tx1">
                     <a:tint val="75000"/>
@@ -1019,7 +1726,7 @@
             </a:lvl7pPr>
             <a:lvl8pPr marL="3200400" indent="0">
               <a:buNone/>
-              <a:defRPr sz="1400">
+              <a:defRPr sz="1600">
                 <a:solidFill>
                   <a:schemeClr val="tx1">
                     <a:tint val="75000"/>
@@ -1029,7 +1736,7 @@
             </a:lvl8pPr>
             <a:lvl9pPr marL="3657600" indent="0">
               <a:buNone/>
-              <a:defRPr sz="1400">
+              <a:defRPr sz="1600">
                 <a:solidFill>
                   <a:schemeClr val="tx1">
                     <a:tint val="75000"/>
@@ -1041,30 +1748,30 @@
           <a:p>
             <a:pPr lvl="0"/>
             <a:r>
+              <a:rPr lang="en-US"/>
+              <a:t>Edit Master text styles</a:t>
+            </a:r>
+          </a:p>
+        </p:txBody>
+      </p:sp>
+      <p:sp>
+        <p:nvSpPr>
+          <p:cNvPr id="4" name="Date Placeholder 3"/>
+          <p:cNvSpPr>
+            <a:spLocks noGrp="1"/>
+          </p:cNvSpPr>
+          <p:nvPr>
+            <p:ph type="dt" sz="half" idx="10"/>
+          </p:nvPr>
+        </p:nvSpPr>
+        <p:spPr/>
+        <p:txBody>
+          <a:bodyPr/>
+          <a:lstStyle/>
+          <a:p>
+            <a:fld id="{971C0534-AC82-40C9-9D5F-C772AE9BC3F8}" type="datetimeFigureOut">
               <a:rPr lang="en-US" smtClean="0"/>
-              <a:t>Click to edit Master text styles</a:t>
-            </a:r>
-          </a:p>
-        </p:txBody>
-      </p:sp>
-      <p:sp>
-        <p:nvSpPr>
-          <p:cNvPr id="4" name="Date Placeholder 3"/>
-          <p:cNvSpPr>
-            <a:spLocks noGrp="1"/>
-          </p:cNvSpPr>
-          <p:nvPr>
-            <p:ph type="dt" sz="half" idx="10"/>
-          </p:nvPr>
-        </p:nvSpPr>
-        <p:spPr/>
-        <p:txBody>
-          <a:bodyPr/>
-          <a:lstStyle/>
-          <a:p>
-            <a:fld id="{5BCAD085-E8A6-8845-BD4E-CB4CCA059FC4}" type="datetimeFigureOut">
-              <a:rPr lang="en-US" smtClean="0"/>
-              <a:t>1/27/13</a:t>
+              <a:t>12/20/2020</a:t>
             </a:fld>
             <a:endParaRPr lang="en-US"/>
           </a:p>
@@ -1104,7 +1811,7 @@
           <a:bodyPr/>
           <a:lstStyle/>
           <a:p>
-            <a:fld id="{C1FF6DA9-008F-8B48-92A6-B652298478BF}" type="slidenum">
+            <a:fld id="{A58BF1B2-8942-48EC-B5EF-B915FB58F230}" type="slidenum">
               <a:rPr lang="en-US" smtClean="0"/>
               <a:t>‹#›</a:t>
             </a:fld>
@@ -1115,7 +1822,7 @@
     </p:spTree>
     <p:extLst>
       <p:ext uri="{BB962C8B-B14F-4D97-AF65-F5344CB8AC3E}">
-        <p14:creationId xmlns:p14="http://schemas.microsoft.com/office/powerpoint/2010/main" val="960648375"/>
+        <p14:creationId xmlns:p14="http://schemas.microsoft.com/office/powerpoint/2010/main" val="3458680407"/>
       </p:ext>
     </p:extLst>
   </p:cSld>
@@ -1158,201 +1865,145 @@
           <a:lstStyle/>
           <a:p>
             <a:r>
+              <a:rPr lang="en-US"/>
+              <a:t>Click to edit Master title style</a:t>
+            </a:r>
+            <a:endParaRPr lang="en-US" dirty="0"/>
+          </a:p>
+        </p:txBody>
+      </p:sp>
+      <p:sp>
+        <p:nvSpPr>
+          <p:cNvPr id="3" name="Content Placeholder 2"/>
+          <p:cNvSpPr>
+            <a:spLocks noGrp="1"/>
+          </p:cNvSpPr>
+          <p:nvPr>
+            <p:ph sz="half" idx="1"/>
+          </p:nvPr>
+        </p:nvSpPr>
+        <p:spPr>
+          <a:xfrm>
+            <a:off x="838200" y="1825625"/>
+            <a:ext cx="5181600" cy="4351338"/>
+          </a:xfrm>
+        </p:spPr>
+        <p:txBody>
+          <a:bodyPr/>
+          <a:lstStyle/>
+          <a:p>
+            <a:pPr lvl="0"/>
+            <a:r>
+              <a:rPr lang="en-US"/>
+              <a:t>Edit Master text styles</a:t>
+            </a:r>
+          </a:p>
+          <a:p>
+            <a:pPr lvl="1"/>
+            <a:r>
+              <a:rPr lang="en-US"/>
+              <a:t>Second level</a:t>
+            </a:r>
+          </a:p>
+          <a:p>
+            <a:pPr lvl="2"/>
+            <a:r>
+              <a:rPr lang="en-US"/>
+              <a:t>Third level</a:t>
+            </a:r>
+          </a:p>
+          <a:p>
+            <a:pPr lvl="3"/>
+            <a:r>
+              <a:rPr lang="en-US"/>
+              <a:t>Fourth level</a:t>
+            </a:r>
+          </a:p>
+          <a:p>
+            <a:pPr lvl="4"/>
+            <a:r>
+              <a:rPr lang="en-US"/>
+              <a:t>Fifth level</a:t>
+            </a:r>
+            <a:endParaRPr lang="en-US" dirty="0"/>
+          </a:p>
+        </p:txBody>
+      </p:sp>
+      <p:sp>
+        <p:nvSpPr>
+          <p:cNvPr id="4" name="Content Placeholder 3"/>
+          <p:cNvSpPr>
+            <a:spLocks noGrp="1"/>
+          </p:cNvSpPr>
+          <p:nvPr>
+            <p:ph sz="half" idx="2"/>
+          </p:nvPr>
+        </p:nvSpPr>
+        <p:spPr>
+          <a:xfrm>
+            <a:off x="6172200" y="1825625"/>
+            <a:ext cx="5181600" cy="4351338"/>
+          </a:xfrm>
+        </p:spPr>
+        <p:txBody>
+          <a:bodyPr/>
+          <a:lstStyle/>
+          <a:p>
+            <a:pPr lvl="0"/>
+            <a:r>
+              <a:rPr lang="en-US"/>
+              <a:t>Edit Master text styles</a:t>
+            </a:r>
+          </a:p>
+          <a:p>
+            <a:pPr lvl="1"/>
+            <a:r>
+              <a:rPr lang="en-US"/>
+              <a:t>Second level</a:t>
+            </a:r>
+          </a:p>
+          <a:p>
+            <a:pPr lvl="2"/>
+            <a:r>
+              <a:rPr lang="en-US"/>
+              <a:t>Third level</a:t>
+            </a:r>
+          </a:p>
+          <a:p>
+            <a:pPr lvl="3"/>
+            <a:r>
+              <a:rPr lang="en-US"/>
+              <a:t>Fourth level</a:t>
+            </a:r>
+          </a:p>
+          <a:p>
+            <a:pPr lvl="4"/>
+            <a:r>
+              <a:rPr lang="en-US"/>
+              <a:t>Fifth level</a:t>
+            </a:r>
+            <a:endParaRPr lang="en-US" dirty="0"/>
+          </a:p>
+        </p:txBody>
+      </p:sp>
+      <p:sp>
+        <p:nvSpPr>
+          <p:cNvPr id="5" name="Date Placeholder 4"/>
+          <p:cNvSpPr>
+            <a:spLocks noGrp="1"/>
+          </p:cNvSpPr>
+          <p:nvPr>
+            <p:ph type="dt" sz="half" idx="10"/>
+          </p:nvPr>
+        </p:nvSpPr>
+        <p:spPr/>
+        <p:txBody>
+          <a:bodyPr/>
+          <a:lstStyle/>
+          <a:p>
+            <a:fld id="{971C0534-AC82-40C9-9D5F-C772AE9BC3F8}" type="datetimeFigureOut">
               <a:rPr lang="en-US" smtClean="0"/>
-              <a:t>Click to edit Master title style</a:t>
-            </a:r>
-            <a:endParaRPr lang="en-US"/>
-          </a:p>
-        </p:txBody>
-      </p:sp>
-      <p:sp>
-        <p:nvSpPr>
-          <p:cNvPr id="3" name="Content Placeholder 2"/>
-          <p:cNvSpPr>
-            <a:spLocks noGrp="1"/>
-          </p:cNvSpPr>
-          <p:nvPr>
-            <p:ph sz="half" idx="1"/>
-          </p:nvPr>
-        </p:nvSpPr>
-        <p:spPr>
-          <a:xfrm>
-            <a:off x="457200" y="1600200"/>
-            <a:ext cx="4038600" cy="4525963"/>
-          </a:xfrm>
-        </p:spPr>
-        <p:txBody>
-          <a:bodyPr/>
-          <a:lstStyle>
-            <a:lvl1pPr>
-              <a:defRPr sz="2800"/>
-            </a:lvl1pPr>
-            <a:lvl2pPr>
-              <a:defRPr sz="2400"/>
-            </a:lvl2pPr>
-            <a:lvl3pPr>
-              <a:defRPr sz="2000"/>
-            </a:lvl3pPr>
-            <a:lvl4pPr>
-              <a:defRPr sz="1800"/>
-            </a:lvl4pPr>
-            <a:lvl5pPr>
-              <a:defRPr sz="1800"/>
-            </a:lvl5pPr>
-            <a:lvl6pPr>
-              <a:defRPr sz="1800"/>
-            </a:lvl6pPr>
-            <a:lvl7pPr>
-              <a:defRPr sz="1800"/>
-            </a:lvl7pPr>
-            <a:lvl8pPr>
-              <a:defRPr sz="1800"/>
-            </a:lvl8pPr>
-            <a:lvl9pPr>
-              <a:defRPr sz="1800"/>
-            </a:lvl9pPr>
-          </a:lstStyle>
-          <a:p>
-            <a:pPr lvl="0"/>
-            <a:r>
-              <a:rPr lang="en-US" smtClean="0"/>
-              <a:t>Click to edit Master text styles</a:t>
-            </a:r>
-          </a:p>
-          <a:p>
-            <a:pPr lvl="1"/>
-            <a:r>
-              <a:rPr lang="en-US" smtClean="0"/>
-              <a:t>Second level</a:t>
-            </a:r>
-          </a:p>
-          <a:p>
-            <a:pPr lvl="2"/>
-            <a:r>
-              <a:rPr lang="en-US" smtClean="0"/>
-              <a:t>Third level</a:t>
-            </a:r>
-          </a:p>
-          <a:p>
-            <a:pPr lvl="3"/>
-            <a:r>
-              <a:rPr lang="en-US" smtClean="0"/>
-              <a:t>Fourth level</a:t>
-            </a:r>
-          </a:p>
-          <a:p>
-            <a:pPr lvl="4"/>
-            <a:r>
-              <a:rPr lang="en-US" smtClean="0"/>
-              <a:t>Fifth level</a:t>
-            </a:r>
-            <a:endParaRPr lang="en-US"/>
-          </a:p>
-        </p:txBody>
-      </p:sp>
-      <p:sp>
-        <p:nvSpPr>
-          <p:cNvPr id="4" name="Content Placeholder 3"/>
-          <p:cNvSpPr>
-            <a:spLocks noGrp="1"/>
-          </p:cNvSpPr>
-          <p:nvPr>
-            <p:ph sz="half" idx="2"/>
-          </p:nvPr>
-        </p:nvSpPr>
-        <p:spPr>
-          <a:xfrm>
-            <a:off x="4648200" y="1600200"/>
-            <a:ext cx="4038600" cy="4525963"/>
-          </a:xfrm>
-        </p:spPr>
-        <p:txBody>
-          <a:bodyPr/>
-          <a:lstStyle>
-            <a:lvl1pPr>
-              <a:defRPr sz="2800"/>
-            </a:lvl1pPr>
-            <a:lvl2pPr>
-              <a:defRPr sz="2400"/>
-            </a:lvl2pPr>
-            <a:lvl3pPr>
-              <a:defRPr sz="2000"/>
-            </a:lvl3pPr>
-            <a:lvl4pPr>
-              <a:defRPr sz="1800"/>
-            </a:lvl4pPr>
-            <a:lvl5pPr>
-              <a:defRPr sz="1800"/>
-            </a:lvl5pPr>
-            <a:lvl6pPr>
-              <a:defRPr sz="1800"/>
-            </a:lvl6pPr>
-            <a:lvl7pPr>
-              <a:defRPr sz="1800"/>
-            </a:lvl7pPr>
-            <a:lvl8pPr>
-              <a:defRPr sz="1800"/>
-            </a:lvl8pPr>
-            <a:lvl9pPr>
-              <a:defRPr sz="1800"/>
-            </a:lvl9pPr>
-          </a:lstStyle>
-          <a:p>
-            <a:pPr lvl="0"/>
-            <a:r>
-              <a:rPr lang="en-US" smtClean="0"/>
-              <a:t>Click to edit Master text styles</a:t>
-            </a:r>
-          </a:p>
-          <a:p>
-            <a:pPr lvl="1"/>
-            <a:r>
-              <a:rPr lang="en-US" smtClean="0"/>
-              <a:t>Second level</a:t>
-            </a:r>
-          </a:p>
-          <a:p>
-            <a:pPr lvl="2"/>
-            <a:r>
-              <a:rPr lang="en-US" smtClean="0"/>
-              <a:t>Third level</a:t>
-            </a:r>
-          </a:p>
-          <a:p>
-            <a:pPr lvl="3"/>
-            <a:r>
-              <a:rPr lang="en-US" smtClean="0"/>
-              <a:t>Fourth level</a:t>
-            </a:r>
-          </a:p>
-          <a:p>
-            <a:pPr lvl="4"/>
-            <a:r>
-              <a:rPr lang="en-US" smtClean="0"/>
-              <a:t>Fifth level</a:t>
-            </a:r>
-            <a:endParaRPr lang="en-US"/>
-          </a:p>
-        </p:txBody>
-      </p:sp>
-      <p:sp>
-        <p:nvSpPr>
-          <p:cNvPr id="5" name="Date Placeholder 4"/>
-          <p:cNvSpPr>
-            <a:spLocks noGrp="1"/>
-          </p:cNvSpPr>
-          <p:nvPr>
-            <p:ph type="dt" sz="half" idx="10"/>
-          </p:nvPr>
-        </p:nvSpPr>
-        <p:spPr/>
-        <p:txBody>
-          <a:bodyPr/>
-          <a:lstStyle/>
-          <a:p>
-            <a:fld id="{5BCAD085-E8A6-8845-BD4E-CB4CCA059FC4}" type="datetimeFigureOut">
-              <a:rPr lang="en-US" smtClean="0"/>
-              <a:t>1/27/13</a:t>
+              <a:t>12/20/2020</a:t>
             </a:fld>
             <a:endParaRPr lang="en-US"/>
           </a:p>
@@ -1392,7 +2043,7 @@
           <a:bodyPr/>
           <a:lstStyle/>
           <a:p>
-            <a:fld id="{C1FF6DA9-008F-8B48-92A6-B652298478BF}" type="slidenum">
+            <a:fld id="{A58BF1B2-8942-48EC-B5EF-B915FB58F230}" type="slidenum">
               <a:rPr lang="en-US" smtClean="0"/>
               <a:t>‹#›</a:t>
             </a:fld>
@@ -1403,7 +2054,7 @@
     </p:spTree>
     <p:extLst>
       <p:ext uri="{BB962C8B-B14F-4D97-AF65-F5344CB8AC3E}">
-        <p14:creationId xmlns:p14="http://schemas.microsoft.com/office/powerpoint/2010/main" val="2782244947"/>
+        <p14:creationId xmlns:p14="http://schemas.microsoft.com/office/powerpoint/2010/main" val="4051028432"/>
       </p:ext>
     </p:extLst>
   </p:cSld>
@@ -1440,20 +2091,21 @@
             <p:ph type="title"/>
           </p:nvPr>
         </p:nvSpPr>
-        <p:spPr/>
+        <p:spPr>
+          <a:xfrm>
+            <a:off x="839788" y="365125"/>
+            <a:ext cx="10515600" cy="1325563"/>
+          </a:xfrm>
+        </p:spPr>
         <p:txBody>
           <a:bodyPr/>
-          <a:lstStyle>
-            <a:lvl1pPr>
-              <a:defRPr/>
-            </a:lvl1pPr>
-          </a:lstStyle>
-          <a:p>
-            <a:r>
-              <a:rPr lang="en-US" smtClean="0"/>
+          <a:lstStyle/>
+          <a:p>
+            <a:r>
+              <a:rPr lang="en-US"/>
               <a:t>Click to edit Master title style</a:t>
             </a:r>
-            <a:endParaRPr lang="en-US"/>
+            <a:endParaRPr lang="en-US" dirty="0"/>
           </a:p>
         </p:txBody>
       </p:sp>
@@ -1469,8 +2121,8 @@
         </p:nvSpPr>
         <p:spPr>
           <a:xfrm>
-            <a:off x="457200" y="1535113"/>
-            <a:ext cx="4040188" cy="639762"/>
+            <a:off x="839788" y="1681163"/>
+            <a:ext cx="5157787" cy="823912"/>
           </a:xfrm>
         </p:spPr>
         <p:txBody>
@@ -1516,8 +2168,8 @@
           <a:p>
             <a:pPr lvl="0"/>
             <a:r>
-              <a:rPr lang="en-US" smtClean="0"/>
-              <a:t>Click to edit Master text styles</a:t>
+              <a:rPr lang="en-US"/>
+              <a:t>Edit Master text styles</a:t>
             </a:r>
           </a:p>
         </p:txBody>
@@ -1534,76 +2186,48 @@
         </p:nvSpPr>
         <p:spPr>
           <a:xfrm>
-            <a:off x="457200" y="2174875"/>
-            <a:ext cx="4040188" cy="3951288"/>
+            <a:off x="839788" y="2505075"/>
+            <a:ext cx="5157787" cy="3684588"/>
           </a:xfrm>
         </p:spPr>
         <p:txBody>
           <a:bodyPr/>
-          <a:lstStyle>
-            <a:lvl1pPr>
-              <a:defRPr sz="2400"/>
-            </a:lvl1pPr>
-            <a:lvl2pPr>
-              <a:defRPr sz="2000"/>
-            </a:lvl2pPr>
-            <a:lvl3pPr>
-              <a:defRPr sz="1800"/>
-            </a:lvl3pPr>
-            <a:lvl4pPr>
-              <a:defRPr sz="1600"/>
-            </a:lvl4pPr>
-            <a:lvl5pPr>
-              <a:defRPr sz="1600"/>
-            </a:lvl5pPr>
-            <a:lvl6pPr>
-              <a:defRPr sz="1600"/>
-            </a:lvl6pPr>
-            <a:lvl7pPr>
-              <a:defRPr sz="1600"/>
-            </a:lvl7pPr>
-            <a:lvl8pPr>
-              <a:defRPr sz="1600"/>
-            </a:lvl8pPr>
-            <a:lvl9pPr>
-              <a:defRPr sz="1600"/>
-            </a:lvl9pPr>
-          </a:lstStyle>
+          <a:lstStyle/>
           <a:p>
             <a:pPr lvl="0"/>
             <a:r>
-              <a:rPr lang="en-US" smtClean="0"/>
-              <a:t>Click to edit Master text styles</a:t>
+              <a:rPr lang="en-US"/>
+              <a:t>Edit Master text styles</a:t>
             </a:r>
           </a:p>
           <a:p>
             <a:pPr lvl="1"/>
             <a:r>
-              <a:rPr lang="en-US" smtClean="0"/>
+              <a:rPr lang="en-US"/>
               <a:t>Second level</a:t>
             </a:r>
           </a:p>
           <a:p>
             <a:pPr lvl="2"/>
             <a:r>
-              <a:rPr lang="en-US" smtClean="0"/>
+              <a:rPr lang="en-US"/>
               <a:t>Third level</a:t>
             </a:r>
           </a:p>
           <a:p>
             <a:pPr lvl="3"/>
             <a:r>
-              <a:rPr lang="en-US" smtClean="0"/>
+              <a:rPr lang="en-US"/>
               <a:t>Fourth level</a:t>
             </a:r>
           </a:p>
           <a:p>
             <a:pPr lvl="4"/>
             <a:r>
-              <a:rPr lang="en-US" smtClean="0"/>
+              <a:rPr lang="en-US"/>
               <a:t>Fifth level</a:t>
             </a:r>
-            <a:endParaRPr lang="en-US"/>
+            <a:endParaRPr lang="en-US" dirty="0"/>
           </a:p>
         </p:txBody>
       </p:sp>
@@ -1619,8 +2243,8 @@
         </p:nvSpPr>
         <p:spPr>
           <a:xfrm>
-            <a:off x="4645025" y="1535113"/>
-            <a:ext cx="4041775" cy="639762"/>
+            <a:off x="6172200" y="1681163"/>
+            <a:ext cx="5183188" cy="823912"/>
           </a:xfrm>
         </p:spPr>
         <p:txBody>
@@ -1666,115 +2290,87 @@
           <a:p>
             <a:pPr lvl="0"/>
             <a:r>
+              <a:rPr lang="en-US"/>
+              <a:t>Edit Master text styles</a:t>
+            </a:r>
+          </a:p>
+        </p:txBody>
+      </p:sp>
+      <p:sp>
+        <p:nvSpPr>
+          <p:cNvPr id="6" name="Content Placeholder 5"/>
+          <p:cNvSpPr>
+            <a:spLocks noGrp="1"/>
+          </p:cNvSpPr>
+          <p:nvPr>
+            <p:ph sz="quarter" idx="4"/>
+          </p:nvPr>
+        </p:nvSpPr>
+        <p:spPr>
+          <a:xfrm>
+            <a:off x="6172200" y="2505075"/>
+            <a:ext cx="5183188" cy="3684588"/>
+          </a:xfrm>
+        </p:spPr>
+        <p:txBody>
+          <a:bodyPr/>
+          <a:lstStyle/>
+          <a:p>
+            <a:pPr lvl="0"/>
+            <a:r>
+              <a:rPr lang="en-US"/>
+              <a:t>Edit Master text styles</a:t>
+            </a:r>
+          </a:p>
+          <a:p>
+            <a:pPr lvl="1"/>
+            <a:r>
+              <a:rPr lang="en-US"/>
+              <a:t>Second level</a:t>
+            </a:r>
+          </a:p>
+          <a:p>
+            <a:pPr lvl="2"/>
+            <a:r>
+              <a:rPr lang="en-US"/>
+              <a:t>Third level</a:t>
+            </a:r>
+          </a:p>
+          <a:p>
+            <a:pPr lvl="3"/>
+            <a:r>
+              <a:rPr lang="en-US"/>
+              <a:t>Fourth level</a:t>
+            </a:r>
+          </a:p>
+          <a:p>
+            <a:pPr lvl="4"/>
+            <a:r>
+              <a:rPr lang="en-US"/>
+              <a:t>Fifth level</a:t>
+            </a:r>
+            <a:endParaRPr lang="en-US" dirty="0"/>
+          </a:p>
+        </p:txBody>
+      </p:sp>
+      <p:sp>
+        <p:nvSpPr>
+          <p:cNvPr id="7" name="Date Placeholder 6"/>
+          <p:cNvSpPr>
+            <a:spLocks noGrp="1"/>
+          </p:cNvSpPr>
+          <p:nvPr>
+            <p:ph type="dt" sz="half" idx="10"/>
+          </p:nvPr>
+        </p:nvSpPr>
+        <p:spPr/>
+        <p:txBody>
+          <a:bodyPr/>
+          <a:lstStyle/>
+          <a:p>
+            <a:fld id="{971C0534-AC82-40C9-9D5F-C772AE9BC3F8}" type="datetimeFigureOut">
               <a:rPr lang="en-US" smtClean="0"/>
-              <a:t>Click to edit Master text styles</a:t>
-            </a:r>
-          </a:p>
-        </p:txBody>
-      </p:sp>
-      <p:sp>
-        <p:nvSpPr>
-          <p:cNvPr id="6" name="Content Placeholder 5"/>
-          <p:cNvSpPr>
-            <a:spLocks noGrp="1"/>
-          </p:cNvSpPr>
-          <p:nvPr>
-            <p:ph sz="quarter" idx="4"/>
-          </p:nvPr>
-        </p:nvSpPr>
-        <p:spPr>
-          <a:xfrm>
-            <a:off x="4645025" y="2174875"/>
-            <a:ext cx="4041775" cy="3951288"/>
-          </a:xfrm>
-        </p:spPr>
-        <p:txBody>
-          <a:bodyPr/>
-          <a:lstStyle>
-            <a:lvl1pPr>
-              <a:defRPr sz="2400"/>
-            </a:lvl1pPr>
-            <a:lvl2pPr>
-              <a:defRPr sz="2000"/>
-            </a:lvl2pPr>
-            <a:lvl3pPr>
-              <a:defRPr sz="1800"/>
-            </a:lvl3pPr>
-            <a:lvl4pPr>
-              <a:defRPr sz="1600"/>
-            </a:lvl4pPr>
-            <a:lvl5pPr>
-              <a:defRPr sz="1600"/>
-            </a:lvl5pPr>
-            <a:lvl6pPr>
-              <a:defRPr sz="1600"/>
-            </a:lvl6pPr>
-            <a:lvl7pPr>
-              <a:defRPr sz="1600"/>
-            </a:lvl7pPr>
-            <a:lvl8pPr>
-              <a:defRPr sz="1600"/>
-            </a:lvl8pPr>
-            <a:lvl9pPr>
-              <a:defRPr sz="1600"/>
-            </a:lvl9pPr>
-          </a:lstStyle>
-          <a:p>
-            <a:pPr lvl="0"/>
-            <a:r>
-              <a:rPr lang="en-US" smtClean="0"/>
-              <a:t>Click to edit Master text styles</a:t>
-            </a:r>
-          </a:p>
-          <a:p>
-            <a:pPr lvl="1"/>
-            <a:r>
-              <a:rPr lang="en-US" smtClean="0"/>
-              <a:t>Second level</a:t>
-            </a:r>
-          </a:p>
-          <a:p>
-            <a:pPr lvl="2"/>
-            <a:r>
-              <a:rPr lang="en-US" smtClean="0"/>
-              <a:t>Third level</a:t>
-            </a:r>
-          </a:p>
-          <a:p>
-            <a:pPr lvl="3"/>
-            <a:r>
-              <a:rPr lang="en-US" smtClean="0"/>
-              <a:t>Fourth level</a:t>
-            </a:r>
-          </a:p>
-          <a:p>
-            <a:pPr lvl="4"/>
-            <a:r>
-              <a:rPr lang="en-US" smtClean="0"/>
-              <a:t>Fifth level</a:t>
-            </a:r>
-            <a:endParaRPr lang="en-US"/>
-          </a:p>
-        </p:txBody>
-      </p:sp>
-      <p:sp>
-        <p:nvSpPr>
-          <p:cNvPr id="7" name="Date Placeholder 6"/>
-          <p:cNvSpPr>
-            <a:spLocks noGrp="1"/>
-          </p:cNvSpPr>
-          <p:nvPr>
-            <p:ph type="dt" sz="half" idx="10"/>
-          </p:nvPr>
-        </p:nvSpPr>
-        <p:spPr/>
-        <p:txBody>
-          <a:bodyPr/>
-          <a:lstStyle/>
-          <a:p>
-            <a:fld id="{5BCAD085-E8A6-8845-BD4E-CB4CCA059FC4}" type="datetimeFigureOut">
-              <a:rPr lang="en-US" smtClean="0"/>
-              <a:t>1/27/13</a:t>
+              <a:t>12/20/2020</a:t>
             </a:fld>
             <a:endParaRPr lang="en-US"/>
           </a:p>
@@ -1814,7 +2410,7 @@
           <a:bodyPr/>
           <a:lstStyle/>
           <a:p>
-            <a:fld id="{C1FF6DA9-008F-8B48-92A6-B652298478BF}" type="slidenum">
+            <a:fld id="{A58BF1B2-8942-48EC-B5EF-B915FB58F230}" type="slidenum">
               <a:rPr lang="en-US" smtClean="0"/>
               <a:t>‹#›</a:t>
             </a:fld>
@@ -1825,7 +2421,7 @@
     </p:spTree>
     <p:extLst>
       <p:ext uri="{BB962C8B-B14F-4D97-AF65-F5344CB8AC3E}">
-        <p14:creationId xmlns:p14="http://schemas.microsoft.com/office/powerpoint/2010/main" val="990158736"/>
+        <p14:creationId xmlns:p14="http://schemas.microsoft.com/office/powerpoint/2010/main" val="923677476"/>
       </p:ext>
     </p:extLst>
   </p:cSld>
@@ -1868,31 +2464,31 @@
           <a:lstStyle/>
           <a:p>
             <a:r>
+              <a:rPr lang="en-US"/>
+              <a:t>Click to edit Master title style</a:t>
+            </a:r>
+            <a:endParaRPr lang="en-US" dirty="0"/>
+          </a:p>
+        </p:txBody>
+      </p:sp>
+      <p:sp>
+        <p:nvSpPr>
+          <p:cNvPr id="3" name="Date Placeholder 2"/>
+          <p:cNvSpPr>
+            <a:spLocks noGrp="1"/>
+          </p:cNvSpPr>
+          <p:nvPr>
+            <p:ph type="dt" sz="half" idx="10"/>
+          </p:nvPr>
+        </p:nvSpPr>
+        <p:spPr/>
+        <p:txBody>
+          <a:bodyPr/>
+          <a:lstStyle/>
+          <a:p>
+            <a:fld id="{971C0534-AC82-40C9-9D5F-C772AE9BC3F8}" type="datetimeFigureOut">
               <a:rPr lang="en-US" smtClean="0"/>
-              <a:t>Click to edit Master title style</a:t>
-            </a:r>
-            <a:endParaRPr lang="en-US"/>
-          </a:p>
-        </p:txBody>
-      </p:sp>
-      <p:sp>
-        <p:nvSpPr>
-          <p:cNvPr id="3" name="Date Placeholder 2"/>
-          <p:cNvSpPr>
-            <a:spLocks noGrp="1"/>
-          </p:cNvSpPr>
-          <p:nvPr>
-            <p:ph type="dt" sz="half" idx="10"/>
-          </p:nvPr>
-        </p:nvSpPr>
-        <p:spPr/>
-        <p:txBody>
-          <a:bodyPr/>
-          <a:lstStyle/>
-          <a:p>
-            <a:fld id="{5BCAD085-E8A6-8845-BD4E-CB4CCA059FC4}" type="datetimeFigureOut">
-              <a:rPr lang="en-US" smtClean="0"/>
-              <a:t>1/27/13</a:t>
+              <a:t>12/20/2020</a:t>
             </a:fld>
             <a:endParaRPr lang="en-US"/>
           </a:p>
@@ -1932,7 +2528,7 @@
           <a:bodyPr/>
           <a:lstStyle/>
           <a:p>
-            <a:fld id="{C1FF6DA9-008F-8B48-92A6-B652298478BF}" type="slidenum">
+            <a:fld id="{A58BF1B2-8942-48EC-B5EF-B915FB58F230}" type="slidenum">
               <a:rPr lang="en-US" smtClean="0"/>
               <a:t>‹#›</a:t>
             </a:fld>
@@ -1943,7 +2539,7 @@
     </p:spTree>
     <p:extLst>
       <p:ext uri="{BB962C8B-B14F-4D97-AF65-F5344CB8AC3E}">
-        <p14:creationId xmlns:p14="http://schemas.microsoft.com/office/powerpoint/2010/main" val="727027711"/>
+        <p14:creationId xmlns:p14="http://schemas.microsoft.com/office/powerpoint/2010/main" val="2208441489"/>
       </p:ext>
     </p:extLst>
   </p:cSld>
@@ -1985,9 +2581,9 @@
           <a:bodyPr/>
           <a:lstStyle/>
           <a:p>
-            <a:fld id="{5BCAD085-E8A6-8845-BD4E-CB4CCA059FC4}" type="datetimeFigureOut">
+            <a:fld id="{971C0534-AC82-40C9-9D5F-C772AE9BC3F8}" type="datetimeFigureOut">
               <a:rPr lang="en-US" smtClean="0"/>
-              <a:t>1/27/13</a:t>
+              <a:t>12/20/2020</a:t>
             </a:fld>
             <a:endParaRPr lang="en-US"/>
           </a:p>
@@ -2027,7 +2623,7 @@
           <a:bodyPr/>
           <a:lstStyle/>
           <a:p>
-            <a:fld id="{C1FF6DA9-008F-8B48-92A6-B652298478BF}" type="slidenum">
+            <a:fld id="{A58BF1B2-8942-48EC-B5EF-B915FB58F230}" type="slidenum">
               <a:rPr lang="en-US" smtClean="0"/>
               <a:t>‹#›</a:t>
             </a:fld>
@@ -2038,7 +2634,7 @@
     </p:spTree>
     <p:extLst>
       <p:ext uri="{BB962C8B-B14F-4D97-AF65-F5344CB8AC3E}">
-        <p14:creationId xmlns:p14="http://schemas.microsoft.com/office/powerpoint/2010/main" val="1212999818"/>
+        <p14:creationId xmlns:p14="http://schemas.microsoft.com/office/powerpoint/2010/main" val="1865105782"/>
       </p:ext>
     </p:extLst>
   </p:cSld>
@@ -2077,23 +2673,23 @@
         </p:nvSpPr>
         <p:spPr>
           <a:xfrm>
-            <a:off x="457200" y="273050"/>
-            <a:ext cx="3008313" cy="1162050"/>
+            <a:off x="839788" y="457200"/>
+            <a:ext cx="3932237" cy="1600200"/>
           </a:xfrm>
         </p:spPr>
         <p:txBody>
           <a:bodyPr anchor="b"/>
           <a:lstStyle>
-            <a:lvl1pPr algn="l">
-              <a:defRPr sz="2000" b="1"/>
+            <a:lvl1pPr>
+              <a:defRPr sz="3200"/>
             </a:lvl1pPr>
           </a:lstStyle>
           <a:p>
             <a:r>
-              <a:rPr lang="en-US" smtClean="0"/>
+              <a:rPr lang="en-US"/>
               <a:t>Click to edit Master title style</a:t>
             </a:r>
-            <a:endParaRPr lang="en-US"/>
+            <a:endParaRPr lang="en-US" dirty="0"/>
           </a:p>
         </p:txBody>
       </p:sp>
@@ -2109,8 +2705,8 @@
         </p:nvSpPr>
         <p:spPr>
           <a:xfrm>
-            <a:off x="3575050" y="273050"/>
-            <a:ext cx="5111750" cy="5853113"/>
+            <a:off x="5183188" y="987425"/>
+            <a:ext cx="6172200" cy="4873625"/>
           </a:xfrm>
         </p:spPr>
         <p:txBody>
@@ -2147,38 +2743,38 @@
           <a:p>
             <a:pPr lvl="0"/>
             <a:r>
-              <a:rPr lang="en-US" smtClean="0"/>
-              <a:t>Click to edit Master text styles</a:t>
+              <a:rPr lang="en-US"/>
+              <a:t>Edit Master text styles</a:t>
             </a:r>
           </a:p>
           <a:p>
             <a:pPr lvl="1"/>
             <a:r>
-              <a:rPr lang="en-US" smtClean="0"/>
+              <a:rPr lang="en-US"/>
               <a:t>Second level</a:t>
             </a:r>
           </a:p>
           <a:p>
             <a:pPr lvl="2"/>
             <a:r>
-              <a:rPr lang="en-US" smtClean="0"/>
+              <a:rPr lang="en-US"/>
               <a:t>Third level</a:t>
             </a:r>
           </a:p>
           <a:p>
             <a:pPr lvl="3"/>
             <a:r>
-              <a:rPr lang="en-US" smtClean="0"/>
+              <a:rPr lang="en-US"/>
               <a:t>Fourth level</a:t>
             </a:r>
           </a:p>
           <a:p>
             <a:pPr lvl="4"/>
             <a:r>
-              <a:rPr lang="en-US" smtClean="0"/>
+              <a:rPr lang="en-US"/>
               <a:t>Fifth level</a:t>
             </a:r>
-            <a:endParaRPr lang="en-US"/>
+            <a:endParaRPr lang="en-US" dirty="0"/>
           </a:p>
         </p:txBody>
       </p:sp>
@@ -2194,8 +2790,8 @@
         </p:nvSpPr>
         <p:spPr>
           <a:xfrm>
-            <a:off x="457200" y="1435100"/>
-            <a:ext cx="3008313" cy="4691063"/>
+            <a:off x="839788" y="2057400"/>
+            <a:ext cx="3932237" cy="3811588"/>
           </a:xfrm>
         </p:spPr>
         <p:txBody>
@@ -2203,68 +2799,68 @@
           <a:lstStyle>
             <a:lvl1pPr marL="0" indent="0">
               <a:buNone/>
-              <a:defRPr sz="1400"/>
+              <a:defRPr sz="1600"/>
             </a:lvl1pPr>
             <a:lvl2pPr marL="457200" indent="0">
               <a:buNone/>
-              <a:defRPr sz="1200"/>
+              <a:defRPr sz="1400"/>
             </a:lvl2pPr>
             <a:lvl3pPr marL="914400" indent="0">
               <a:buNone/>
-              <a:defRPr sz="1000"/>
+              <a:defRPr sz="1200"/>
             </a:lvl3pPr>
             <a:lvl4pPr marL="1371600" indent="0">
               <a:buNone/>
-              <a:defRPr sz="900"/>
+              <a:defRPr sz="1000"/>
             </a:lvl4pPr>
             <a:lvl5pPr marL="1828800" indent="0">
               <a:buNone/>
-              <a:defRPr sz="900"/>
+              <a:defRPr sz="1000"/>
             </a:lvl5pPr>
             <a:lvl6pPr marL="2286000" indent="0">
               <a:buNone/>
-              <a:defRPr sz="900"/>
+              <a:defRPr sz="1000"/>
             </a:lvl6pPr>
             <a:lvl7pPr marL="2743200" indent="0">
               <a:buNone/>
-              <a:defRPr sz="900"/>
+              <a:defRPr sz="1000"/>
             </a:lvl7pPr>
             <a:lvl8pPr marL="3200400" indent="0">
               <a:buNone/>
-              <a:defRPr sz="900"/>
+              <a:defRPr sz="1000"/>
             </a:lvl8pPr>
             <a:lvl9pPr marL="3657600" indent="0">
               <a:buNone/>
-              <a:defRPr sz="900"/>
+              <a:defRPr sz="1000"/>
             </a:lvl9pPr>
           </a:lstStyle>
           <a:p>
             <a:pPr lvl="0"/>
             <a:r>
+              <a:rPr lang="en-US"/>
+              <a:t>Edit Master text styles</a:t>
+            </a:r>
+          </a:p>
+        </p:txBody>
+      </p:sp>
+      <p:sp>
+        <p:nvSpPr>
+          <p:cNvPr id="5" name="Date Placeholder 4"/>
+          <p:cNvSpPr>
+            <a:spLocks noGrp="1"/>
+          </p:cNvSpPr>
+          <p:nvPr>
+            <p:ph type="dt" sz="half" idx="10"/>
+          </p:nvPr>
+        </p:nvSpPr>
+        <p:spPr/>
+        <p:txBody>
+          <a:bodyPr/>
+          <a:lstStyle/>
+          <a:p>
+            <a:fld id="{971C0534-AC82-40C9-9D5F-C772AE9BC3F8}" type="datetimeFigureOut">
               <a:rPr lang="en-US" smtClean="0"/>
-              <a:t>Click to edit Master text styles</a:t>
-            </a:r>
-          </a:p>
-        </p:txBody>
-      </p:sp>
-      <p:sp>
-        <p:nvSpPr>
-          <p:cNvPr id="5" name="Date Placeholder 4"/>
-          <p:cNvSpPr>
-            <a:spLocks noGrp="1"/>
-          </p:cNvSpPr>
-          <p:nvPr>
-            <p:ph type="dt" sz="half" idx="10"/>
-          </p:nvPr>
-        </p:nvSpPr>
-        <p:spPr/>
-        <p:txBody>
-          <a:bodyPr/>
-          <a:lstStyle/>
-          <a:p>
-            <a:fld id="{5BCAD085-E8A6-8845-BD4E-CB4CCA059FC4}" type="datetimeFigureOut">
-              <a:rPr lang="en-US" smtClean="0"/>
-              <a:t>1/27/13</a:t>
+              <a:t>12/20/2020</a:t>
             </a:fld>
             <a:endParaRPr lang="en-US"/>
           </a:p>
@@ -2304,7 +2900,7 @@
           <a:bodyPr/>
           <a:lstStyle/>
           <a:p>
-            <a:fld id="{C1FF6DA9-008F-8B48-92A6-B652298478BF}" type="slidenum">
+            <a:fld id="{A58BF1B2-8942-48EC-B5EF-B915FB58F230}" type="slidenum">
               <a:rPr lang="en-US" smtClean="0"/>
               <a:t>‹#›</a:t>
             </a:fld>
@@ -2315,7 +2911,7 @@
     </p:spTree>
     <p:extLst>
       <p:ext uri="{BB962C8B-B14F-4D97-AF65-F5344CB8AC3E}">
-        <p14:creationId xmlns:p14="http://schemas.microsoft.com/office/powerpoint/2010/main" val="1840726560"/>
+        <p14:creationId xmlns:p14="http://schemas.microsoft.com/office/powerpoint/2010/main" val="4056715949"/>
       </p:ext>
     </p:extLst>
   </p:cSld>
@@ -2354,23 +2950,23 @@
         </p:nvSpPr>
         <p:spPr>
           <a:xfrm>
-            <a:off x="1792288" y="4800600"/>
-            <a:ext cx="5486400" cy="566738"/>
+            <a:off x="839788" y="457200"/>
+            <a:ext cx="3932237" cy="1600200"/>
           </a:xfrm>
         </p:spPr>
         <p:txBody>
           <a:bodyPr anchor="b"/>
           <a:lstStyle>
-            <a:lvl1pPr algn="l">
-              <a:defRPr sz="2000" b="1"/>
+            <a:lvl1pPr>
+              <a:defRPr sz="3200"/>
             </a:lvl1pPr>
           </a:lstStyle>
           <a:p>
             <a:r>
-              <a:rPr lang="en-US" smtClean="0"/>
+              <a:rPr lang="en-US"/>
               <a:t>Click to edit Master title style</a:t>
             </a:r>
-            <a:endParaRPr lang="en-US"/>
+            <a:endParaRPr lang="en-US" dirty="0"/>
           </a:p>
         </p:txBody>
       </p:sp>
@@ -2378,7 +2974,7 @@
         <p:nvSpPr>
           <p:cNvPr id="3" name="Picture Placeholder 2"/>
           <p:cNvSpPr>
-            <a:spLocks noGrp="1"/>
+            <a:spLocks noGrp="1" noChangeAspect="1"/>
           </p:cNvSpPr>
           <p:nvPr>
             <p:ph type="pic" idx="1"/>
@@ -2386,8 +2982,73 @@
         </p:nvSpPr>
         <p:spPr>
           <a:xfrm>
-            <a:off x="1792288" y="612775"/>
-            <a:ext cx="5486400" cy="4114800"/>
+            <a:off x="5183188" y="987425"/>
+            <a:ext cx="6172200" cy="4873625"/>
+          </a:xfrm>
+        </p:spPr>
+        <p:txBody>
+          <a:bodyPr anchor="t"/>
+          <a:lstStyle>
+            <a:lvl1pPr marL="0" indent="0">
+              <a:buNone/>
+              <a:defRPr sz="3200"/>
+            </a:lvl1pPr>
+            <a:lvl2pPr marL="457200" indent="0">
+              <a:buNone/>
+              <a:defRPr sz="2800"/>
+            </a:lvl2pPr>
+            <a:lvl3pPr marL="914400" indent="0">
+              <a:buNone/>
+              <a:defRPr sz="2400"/>
+            </a:lvl3pPr>
+            <a:lvl4pPr marL="1371600" indent="0">
+              <a:buNone/>
+              <a:defRPr sz="2000"/>
+            </a:lvl4pPr>
+            <a:lvl5pPr marL="1828800" indent="0">
+              <a:buNone/>
+              <a:defRPr sz="2000"/>
+            </a:lvl5pPr>
+            <a:lvl6pPr marL="2286000" indent="0">
+              <a:buNone/>
+              <a:defRPr sz="2000"/>
+            </a:lvl6pPr>
+            <a:lvl7pPr marL="2743200" indent="0">
+              <a:buNone/>
+              <a:defRPr sz="2000"/>
+            </a:lvl7pPr>
+            <a:lvl8pPr marL="3200400" indent="0">
+              <a:buNone/>
+              <a:defRPr sz="2000"/>
+            </a:lvl8pPr>
+            <a:lvl9pPr marL="3657600" indent="0">
+              <a:buNone/>
+              <a:defRPr sz="2000"/>
+            </a:lvl9pPr>
+          </a:lstStyle>
+          <a:p>
+            <a:r>
+              <a:rPr lang="en-US"/>
+              <a:t>Click icon to add picture</a:t>
+            </a:r>
+            <a:endParaRPr lang="en-US" dirty="0"/>
+          </a:p>
+        </p:txBody>
+      </p:sp>
+      <p:sp>
+        <p:nvSpPr>
+          <p:cNvPr id="4" name="Text Placeholder 3"/>
+          <p:cNvSpPr>
+            <a:spLocks noGrp="1"/>
+          </p:cNvSpPr>
+          <p:nvPr>
+            <p:ph type="body" sz="half" idx="2"/>
+          </p:nvPr>
+        </p:nvSpPr>
+        <p:spPr>
+          <a:xfrm>
+            <a:off x="839788" y="2057400"/>
+            <a:ext cx="3932237" cy="3811588"/>
           </a:xfrm>
         </p:spPr>
         <p:txBody>
@@ -2395,129 +3056,68 @@
           <a:lstStyle>
             <a:lvl1pPr marL="0" indent="0">
               <a:buNone/>
-              <a:defRPr sz="3200"/>
+              <a:defRPr sz="1600"/>
             </a:lvl1pPr>
             <a:lvl2pPr marL="457200" indent="0">
               <a:buNone/>
-              <a:defRPr sz="2800"/>
+              <a:defRPr sz="1400"/>
             </a:lvl2pPr>
             <a:lvl3pPr marL="914400" indent="0">
               <a:buNone/>
-              <a:defRPr sz="2400"/>
+              <a:defRPr sz="1200"/>
             </a:lvl3pPr>
             <a:lvl4pPr marL="1371600" indent="0">
               <a:buNone/>
-              <a:defRPr sz="2000"/>
+              <a:defRPr sz="1000"/>
             </a:lvl4pPr>
             <a:lvl5pPr marL="1828800" indent="0">
               <a:buNone/>
-              <a:defRPr sz="2000"/>
+              <a:defRPr sz="1000"/>
             </a:lvl5pPr>
             <a:lvl6pPr marL="2286000" indent="0">
               <a:buNone/>
-              <a:defRPr sz="2000"/>
+              <a:defRPr sz="1000"/>
             </a:lvl6pPr>
             <a:lvl7pPr marL="2743200" indent="0">
               <a:buNone/>
-              <a:defRPr sz="2000"/>
+              <a:defRPr sz="1000"/>
             </a:lvl7pPr>
             <a:lvl8pPr marL="3200400" indent="0">
               <a:buNone/>
-              <a:defRPr sz="2000"/>
+              <a:defRPr sz="1000"/>
             </a:lvl8pPr>
             <a:lvl9pPr marL="3657600" indent="0">
               <a:buNone/>
-              <a:defRPr sz="2000"/>
+              <a:defRPr sz="1000"/>
             </a:lvl9pPr>
           </a:lstStyle>
           <a:p>
-            <a:endParaRPr lang="en-US"/>
-          </a:p>
-        </p:txBody>
-      </p:sp>
-      <p:sp>
-        <p:nvSpPr>
-          <p:cNvPr id="4" name="Text Placeholder 3"/>
-          <p:cNvSpPr>
-            <a:spLocks noGrp="1"/>
-          </p:cNvSpPr>
-          <p:nvPr>
-            <p:ph type="body" sz="half" idx="2"/>
-          </p:nvPr>
-        </p:nvSpPr>
-        <p:spPr>
-          <a:xfrm>
-            <a:off x="1792288" y="5367338"/>
-            <a:ext cx="5486400" cy="804862"/>
-          </a:xfrm>
-        </p:spPr>
+            <a:pPr lvl="0"/>
+            <a:r>
+              <a:rPr lang="en-US"/>
+              <a:t>Edit Master text styles</a:t>
+            </a:r>
+          </a:p>
+        </p:txBody>
+      </p:sp>
+      <p:sp>
+        <p:nvSpPr>
+          <p:cNvPr id="5" name="Date Placeholder 4"/>
+          <p:cNvSpPr>
+            <a:spLocks noGrp="1"/>
+          </p:cNvSpPr>
+          <p:nvPr>
+            <p:ph type="dt" sz="half" idx="10"/>
+          </p:nvPr>
+        </p:nvSpPr>
+        <p:spPr/>
         <p:txBody>
           <a:bodyPr/>
-          <a:lstStyle>
-            <a:lvl1pPr marL="0" indent="0">
-              <a:buNone/>
-              <a:defRPr sz="1400"/>
-            </a:lvl1pPr>
-            <a:lvl2pPr marL="457200" indent="0">
-              <a:buNone/>
-              <a:defRPr sz="1200"/>
-            </a:lvl2pPr>
-            <a:lvl3pPr marL="914400" indent="0">
-              <a:buNone/>
-              <a:defRPr sz="1000"/>
-            </a:lvl3pPr>
-            <a:lvl4pPr marL="1371600" indent="0">
-              <a:buNone/>
-              <a:defRPr sz="900"/>
-            </a:lvl4pPr>
-            <a:lvl5pPr marL="1828800" indent="0">
-              <a:buNone/>
-              <a:defRPr sz="900"/>
-            </a:lvl5pPr>
-            <a:lvl6pPr marL="2286000" indent="0">
-              <a:buNone/>
-              <a:defRPr sz="900"/>
-            </a:lvl6pPr>
-            <a:lvl7pPr marL="2743200" indent="0">
-              <a:buNone/>
-              <a:defRPr sz="900"/>
-            </a:lvl7pPr>
-            <a:lvl8pPr marL="3200400" indent="0">
-              <a:buNone/>
-              <a:defRPr sz="900"/>
-            </a:lvl8pPr>
-            <a:lvl9pPr marL="3657600" indent="0">
-              <a:buNone/>
-              <a:defRPr sz="900"/>
-            </a:lvl9pPr>
-          </a:lstStyle>
-          <a:p>
-            <a:pPr lvl="0"/>
-            <a:r>
+          <a:lstStyle/>
+          <a:p>
+            <a:fld id="{971C0534-AC82-40C9-9D5F-C772AE9BC3F8}" type="datetimeFigureOut">
               <a:rPr lang="en-US" smtClean="0"/>
-              <a:t>Click to edit Master text styles</a:t>
-            </a:r>
-          </a:p>
-        </p:txBody>
-      </p:sp>
-      <p:sp>
-        <p:nvSpPr>
-          <p:cNvPr id="5" name="Date Placeholder 4"/>
-          <p:cNvSpPr>
-            <a:spLocks noGrp="1"/>
-          </p:cNvSpPr>
-          <p:nvPr>
-            <p:ph type="dt" sz="half" idx="10"/>
-          </p:nvPr>
-        </p:nvSpPr>
-        <p:spPr/>
-        <p:txBody>
-          <a:bodyPr/>
-          <a:lstStyle/>
-          <a:p>
-            <a:fld id="{5BCAD085-E8A6-8845-BD4E-CB4CCA059FC4}" type="datetimeFigureOut">
-              <a:rPr lang="en-US" smtClean="0"/>
-              <a:t>1/27/13</a:t>
+              <a:t>12/20/2020</a:t>
             </a:fld>
             <a:endParaRPr lang="en-US"/>
           </a:p>
@@ -2557,7 +3157,7 @@
           <a:bodyPr/>
           <a:lstStyle/>
           <a:p>
-            <a:fld id="{C1FF6DA9-008F-8B48-92A6-B652298478BF}" type="slidenum">
+            <a:fld id="{A58BF1B2-8942-48EC-B5EF-B915FB58F230}" type="slidenum">
               <a:rPr lang="en-US" smtClean="0"/>
               <a:t>‹#›</a:t>
             </a:fld>
@@ -2568,7 +3168,7 @@
     </p:spTree>
     <p:extLst>
       <p:ext uri="{BB962C8B-B14F-4D97-AF65-F5344CB8AC3E}">
-        <p14:creationId xmlns:p14="http://schemas.microsoft.com/office/powerpoint/2010/main" val="3889236939"/>
+        <p14:creationId xmlns:p14="http://schemas.microsoft.com/office/powerpoint/2010/main" val="1364586832"/>
       </p:ext>
     </p:extLst>
   </p:cSld>
@@ -2612,8 +3212,8 @@
         </p:nvSpPr>
         <p:spPr>
           <a:xfrm>
-            <a:off x="457200" y="274638"/>
-            <a:ext cx="8229600" cy="1143000"/>
+            <a:off x="838200" y="365125"/>
+            <a:ext cx="10515600" cy="1325563"/>
           </a:xfrm>
           <a:prstGeom prst="rect">
             <a:avLst/>
@@ -2626,10 +3226,10 @@
           <a:lstStyle/>
           <a:p>
             <a:r>
-              <a:rPr lang="en-US" smtClean="0"/>
+              <a:rPr lang="en-US"/>
               <a:t>Click to edit Master title style</a:t>
             </a:r>
-            <a:endParaRPr lang="en-US"/>
+            <a:endParaRPr lang="en-US" dirty="0"/>
           </a:p>
         </p:txBody>
       </p:sp>
@@ -2645,8 +3245,8 @@
         </p:nvSpPr>
         <p:spPr>
           <a:xfrm>
-            <a:off x="457200" y="1600200"/>
-            <a:ext cx="8229600" cy="4525963"/>
+            <a:off x="838200" y="1825625"/>
+            <a:ext cx="10515600" cy="4351338"/>
           </a:xfrm>
           <a:prstGeom prst="rect">
             <a:avLst/>
@@ -2660,38 +3260,38 @@
           <a:p>
             <a:pPr lvl="0"/>
             <a:r>
-              <a:rPr lang="en-US" smtClean="0"/>
-              <a:t>Click to edit Master text styles</a:t>
+              <a:rPr lang="en-US"/>
+              <a:t>Edit Master text styles</a:t>
             </a:r>
           </a:p>
           <a:p>
             <a:pPr lvl="1"/>
             <a:r>
-              <a:rPr lang="en-US" smtClean="0"/>
+              <a:rPr lang="en-US"/>
               <a:t>Second level</a:t>
             </a:r>
           </a:p>
           <a:p>
             <a:pPr lvl="2"/>
             <a:r>
-              <a:rPr lang="en-US" smtClean="0"/>
+              <a:rPr lang="en-US"/>
               <a:t>Third level</a:t>
             </a:r>
           </a:p>
           <a:p>
             <a:pPr lvl="3"/>
             <a:r>
-              <a:rPr lang="en-US" smtClean="0"/>
+              <a:rPr lang="en-US"/>
               <a:t>Fourth level</a:t>
             </a:r>
           </a:p>
           <a:p>
             <a:pPr lvl="4"/>
             <a:r>
-              <a:rPr lang="en-US" smtClean="0"/>
+              <a:rPr lang="en-US"/>
               <a:t>Fifth level</a:t>
             </a:r>
-            <a:endParaRPr lang="en-US"/>
+            <a:endParaRPr lang="en-US" dirty="0"/>
           </a:p>
         </p:txBody>
       </p:sp>
@@ -2707,8 +3307,8 @@
         </p:nvSpPr>
         <p:spPr>
           <a:xfrm>
-            <a:off x="457200" y="6356350"/>
-            <a:ext cx="2133600" cy="365125"/>
+            <a:off x="838200" y="6356350"/>
+            <a:ext cx="2743200" cy="365125"/>
           </a:xfrm>
           <a:prstGeom prst="rect">
             <a:avLst/>
@@ -2728,9 +3328,9 @@
             </a:lvl1pPr>
           </a:lstStyle>
           <a:p>
-            <a:fld id="{5BCAD085-E8A6-8845-BD4E-CB4CCA059FC4}" type="datetimeFigureOut">
+            <a:fld id="{971C0534-AC82-40C9-9D5F-C772AE9BC3F8}" type="datetimeFigureOut">
               <a:rPr lang="en-US" smtClean="0"/>
-              <a:t>1/27/13</a:t>
+              <a:t>12/20/2020</a:t>
             </a:fld>
             <a:endParaRPr lang="en-US"/>
           </a:p>
@@ -2748,8 +3348,8 @@
         </p:nvSpPr>
         <p:spPr>
           <a:xfrm>
-            <a:off x="3124200" y="6356350"/>
-            <a:ext cx="2895600" cy="365125"/>
+            <a:off x="4038600" y="6356350"/>
+            <a:ext cx="4114800" cy="365125"/>
           </a:xfrm>
           <a:prstGeom prst="rect">
             <a:avLst/>
@@ -2785,8 +3385,8 @@
         </p:nvSpPr>
         <p:spPr>
           <a:xfrm>
-            <a:off x="6553200" y="6356350"/>
-            <a:ext cx="2133600" cy="365125"/>
+            <a:off x="8610600" y="6356350"/>
+            <a:ext cx="2743200" cy="365125"/>
           </a:xfrm>
           <a:prstGeom prst="rect">
             <a:avLst/>
@@ -2806,7 +3406,7 @@
             </a:lvl1pPr>
           </a:lstStyle>
           <a:p>
-            <a:fld id="{C1FF6DA9-008F-8B48-92A6-B652298478BF}" type="slidenum">
+            <a:fld id="{A58BF1B2-8942-48EC-B5EF-B915FB58F230}" type="slidenum">
               <a:rPr lang="en-US" smtClean="0"/>
               <a:t>‹#›</a:t>
             </a:fld>
@@ -2814,30 +3414,103 @@
           </a:p>
         </p:txBody>
       </p:sp>
+      <p:sp>
+        <p:nvSpPr>
+          <p:cNvPr id="7" name="hc" descr=" "/>
+          <p:cNvSpPr txBox="1"/>
+          <p:nvPr userDrawn="1"/>
+        </p:nvSpPr>
+        <p:spPr>
+          <a:xfrm>
+            <a:off x="0" y="0"/>
+            <a:ext cx="12192000" cy="223138"/>
+          </a:xfrm>
+          <a:prstGeom prst="rect">
+            <a:avLst/>
+          </a:prstGeom>
+          <a:noFill/>
+        </p:spPr>
+        <p:txBody>
+          <a:bodyPr vert="horz" rtlCol="0">
+            <a:spAutoFit/>
+          </a:bodyPr>
+          <a:lstStyle/>
+          <a:p>
+            <a:pPr algn="ctr"/>
+            <a:r>
+              <a:rPr lang="en-US" sz="850" b="0" i="0" u="none" baseline="0">
+                <a:solidFill>
+                  <a:srgbClr val="000000"/>
+                </a:solidFill>
+                <a:latin typeface="Microsoft Sans Serif" panose="020B0604020202020204" pitchFamily="34" charset="0"/>
+              </a:rPr>
+              <a:t> </a:t>
+            </a:r>
+          </a:p>
+        </p:txBody>
+      </p:sp>
+      <p:sp>
+        <p:nvSpPr>
+          <p:cNvPr id="8" name="fc" descr=" "/>
+          <p:cNvSpPr txBox="1"/>
+          <p:nvPr userDrawn="1"/>
+        </p:nvSpPr>
+        <p:spPr>
+          <a:xfrm>
+            <a:off x="0" y="6537960"/>
+            <a:ext cx="12192000" cy="223138"/>
+          </a:xfrm>
+          <a:prstGeom prst="rect">
+            <a:avLst/>
+          </a:prstGeom>
+          <a:noFill/>
+        </p:spPr>
+        <p:txBody>
+          <a:bodyPr vert="horz" rtlCol="0">
+            <a:spAutoFit/>
+          </a:bodyPr>
+          <a:lstStyle/>
+          <a:p>
+            <a:pPr algn="ctr"/>
+            <a:r>
+              <a:rPr lang="en-US" sz="850" b="0" i="0" u="none" baseline="0">
+                <a:solidFill>
+                  <a:srgbClr val="000000"/>
+                </a:solidFill>
+                <a:latin typeface="Microsoft Sans Serif" panose="020B0604020202020204" pitchFamily="34" charset="0"/>
+              </a:rPr>
+              <a:t> </a:t>
+            </a:r>
+          </a:p>
+        </p:txBody>
+      </p:sp>
     </p:spTree>
     <p:extLst>
       <p:ext uri="{BB962C8B-B14F-4D97-AF65-F5344CB8AC3E}">
-        <p14:creationId xmlns:p14="http://schemas.microsoft.com/office/powerpoint/2010/main" val="2209977519"/>
+        <p14:creationId xmlns:p14="http://schemas.microsoft.com/office/powerpoint/2010/main" val="839727141"/>
       </p:ext>
     </p:extLst>
   </p:cSld>
   <p:clrMap bg1="lt1" tx1="dk1" bg2="lt2" tx2="dk2" accent1="accent1" accent2="accent2" accent3="accent3" accent4="accent4" accent5="accent5" accent6="accent6" hlink="hlink" folHlink="folHlink"/>
   <p:sldLayoutIdLst>
-    <p:sldLayoutId id="2147483649" r:id="rId1"/>
-    <p:sldLayoutId id="2147483650" r:id="rId2"/>
-    <p:sldLayoutId id="2147483651" r:id="rId3"/>
-    <p:sldLayoutId id="2147483652" r:id="rId4"/>
-    <p:sldLayoutId id="2147483653" r:id="rId5"/>
-    <p:sldLayoutId id="2147483654" r:id="rId6"/>
-    <p:sldLayoutId id="2147483655" r:id="rId7"/>
-    <p:sldLayoutId id="2147483656" r:id="rId8"/>
-    <p:sldLayoutId id="2147483657" r:id="rId9"/>
-    <p:sldLayoutId id="2147483658" r:id="rId10"/>
-    <p:sldLayoutId id="2147483659" r:id="rId11"/>
+    <p:sldLayoutId id="2147483674" r:id="rId1"/>
+    <p:sldLayoutId id="2147483675" r:id="rId2"/>
+    <p:sldLayoutId id="2147483676" r:id="rId3"/>
+    <p:sldLayoutId id="2147483677" r:id="rId4"/>
+    <p:sldLayoutId id="2147483678" r:id="rId5"/>
+    <p:sldLayoutId id="2147483679" r:id="rId6"/>
+    <p:sldLayoutId id="2147483680" r:id="rId7"/>
+    <p:sldLayoutId id="2147483681" r:id="rId8"/>
+    <p:sldLayoutId id="2147483682" r:id="rId9"/>
+    <p:sldLayoutId id="2147483683" r:id="rId10"/>
+    <p:sldLayoutId id="2147483684" r:id="rId11"/>
   </p:sldLayoutIdLst>
   <p:txStyles>
     <p:titleStyle>
-      <a:lvl1pPr algn="ctr" defTabSz="457200" rtl="0" eaLnBrk="1" latinLnBrk="0" hangingPunct="1">
+      <a:lvl1pPr algn="l" defTabSz="914400" rtl="0" eaLnBrk="1" latinLnBrk="0" hangingPunct="1">
+        <a:lnSpc>
+          <a:spcPct val="90000"/>
+        </a:lnSpc>
         <a:spcBef>
           <a:spcPct val="0"/>
         </a:spcBef>
@@ -2853,13 +3526,16 @@
       </a:lvl1pPr>
     </p:titleStyle>
     <p:bodyStyle>
-      <a:lvl1pPr marL="342900" indent="-342900" algn="l" defTabSz="457200" rtl="0" eaLnBrk="1" latinLnBrk="0" hangingPunct="1">
+      <a:lvl1pPr marL="228600" indent="-228600" algn="l" defTabSz="914400" rtl="0" eaLnBrk="1" latinLnBrk="0" hangingPunct="1">
+        <a:lnSpc>
+          <a:spcPct val="90000"/>
+        </a:lnSpc>
         <a:spcBef>
-          <a:spcPct val="20000"/>
+          <a:spcPts val="1000"/>
         </a:spcBef>
-        <a:buFont typeface="Arial"/>
+        <a:buFont typeface="Arial" panose="020B0604020202020204" pitchFamily="34" charset="0"/>
         <a:buChar char="•"/>
-        <a:defRPr sz="3200" kern="1200">
+        <a:defRPr sz="2800" kern="1200">
           <a:solidFill>
             <a:schemeClr val="tx1"/>
           </a:solidFill>
@@ -2868,26 +3544,14 @@
           <a:cs typeface="+mn-cs"/>
         </a:defRPr>
       </a:lvl1pPr>
-      <a:lvl2pPr marL="742950" indent="-285750" algn="l" defTabSz="457200" rtl="0" eaLnBrk="1" latinLnBrk="0" hangingPunct="1">
+      <a:lvl2pPr marL="685800" indent="-228600" algn="l" defTabSz="914400" rtl="0" eaLnBrk="1" latinLnBrk="0" hangingPunct="1">
+        <a:lnSpc>
+          <a:spcPct val="90000"/>
+        </a:lnSpc>
         <a:spcBef>
-          <a:spcPct val="20000"/>
+          <a:spcPts val="500"/>
         </a:spcBef>
-        <a:buFont typeface="Arial"/>
-        <a:buChar char="–"/>
-        <a:defRPr sz="2800" kern="1200">
-          <a:solidFill>
-            <a:schemeClr val="tx1"/>
-          </a:solidFill>
-          <a:latin typeface="+mn-lt"/>
-          <a:ea typeface="+mn-ea"/>
-          <a:cs typeface="+mn-cs"/>
-        </a:defRPr>
-      </a:lvl2pPr>
-      <a:lvl3pPr marL="1143000" indent="-228600" algn="l" defTabSz="457200" rtl="0" eaLnBrk="1" latinLnBrk="0" hangingPunct="1">
-        <a:spcBef>
-          <a:spcPct val="20000"/>
-        </a:spcBef>
-        <a:buFont typeface="Arial"/>
+        <a:buFont typeface="Arial" panose="020B0604020202020204" pitchFamily="34" charset="0"/>
         <a:buChar char="•"/>
         <a:defRPr sz="2400" kern="1200">
           <a:solidFill>
@@ -2897,42 +3561,15 @@
           <a:ea typeface="+mn-ea"/>
           <a:cs typeface="+mn-cs"/>
         </a:defRPr>
-      </a:lvl3pPr>
-      <a:lvl4pPr marL="1600200" indent="-228600" algn="l" defTabSz="457200" rtl="0" eaLnBrk="1" latinLnBrk="0" hangingPunct="1">
+      </a:lvl2pPr>
+      <a:lvl3pPr marL="1143000" indent="-228600" algn="l" defTabSz="914400" rtl="0" eaLnBrk="1" latinLnBrk="0" hangingPunct="1">
+        <a:lnSpc>
+          <a:spcPct val="90000"/>
+        </a:lnSpc>
         <a:spcBef>
-          <a:spcPct val="20000"/>
+          <a:spcPts val="500"/>
         </a:spcBef>
-        <a:buFont typeface="Arial"/>
-        <a:buChar char="–"/>
-        <a:defRPr sz="2000" kern="1200">
-          <a:solidFill>
-            <a:schemeClr val="tx1"/>
-          </a:solidFill>
-          <a:latin typeface="+mn-lt"/>
-          <a:ea typeface="+mn-ea"/>
-          <a:cs typeface="+mn-cs"/>
-        </a:defRPr>
-      </a:lvl4pPr>
-      <a:lvl5pPr marL="2057400" indent="-228600" algn="l" defTabSz="457200" rtl="0" eaLnBrk="1" latinLnBrk="0" hangingPunct="1">
-        <a:spcBef>
-          <a:spcPct val="20000"/>
-        </a:spcBef>
-        <a:buFont typeface="Arial"/>
-        <a:buChar char="»"/>
-        <a:defRPr sz="2000" kern="1200">
-          <a:solidFill>
-            <a:schemeClr val="tx1"/>
-          </a:solidFill>
-          <a:latin typeface="+mn-lt"/>
-          <a:ea typeface="+mn-ea"/>
-          <a:cs typeface="+mn-cs"/>
-        </a:defRPr>
-      </a:lvl5pPr>
-      <a:lvl6pPr marL="2514600" indent="-228600" algn="l" defTabSz="457200" rtl="0" eaLnBrk="1" latinLnBrk="0" hangingPunct="1">
-        <a:spcBef>
-          <a:spcPct val="20000"/>
-        </a:spcBef>
-        <a:buFont typeface="Arial"/>
+        <a:buFont typeface="Arial" panose="020B0604020202020204" pitchFamily="34" charset="0"/>
         <a:buChar char="•"/>
         <a:defRPr sz="2000" kern="1200">
           <a:solidFill>
@@ -2942,14 +3579,71 @@
           <a:ea typeface="+mn-ea"/>
           <a:cs typeface="+mn-cs"/>
         </a:defRPr>
+      </a:lvl3pPr>
+      <a:lvl4pPr marL="1600200" indent="-228600" algn="l" defTabSz="914400" rtl="0" eaLnBrk="1" latinLnBrk="0" hangingPunct="1">
+        <a:lnSpc>
+          <a:spcPct val="90000"/>
+        </a:lnSpc>
+        <a:spcBef>
+          <a:spcPts val="500"/>
+        </a:spcBef>
+        <a:buFont typeface="Arial" panose="020B0604020202020204" pitchFamily="34" charset="0"/>
+        <a:buChar char="•"/>
+        <a:defRPr sz="1800" kern="1200">
+          <a:solidFill>
+            <a:schemeClr val="tx1"/>
+          </a:solidFill>
+          <a:latin typeface="+mn-lt"/>
+          <a:ea typeface="+mn-ea"/>
+          <a:cs typeface="+mn-cs"/>
+        </a:defRPr>
+      </a:lvl4pPr>
+      <a:lvl5pPr marL="2057400" indent="-228600" algn="l" defTabSz="914400" rtl="0" eaLnBrk="1" latinLnBrk="0" hangingPunct="1">
+        <a:lnSpc>
+          <a:spcPct val="90000"/>
+        </a:lnSpc>
+        <a:spcBef>
+          <a:spcPts val="500"/>
+        </a:spcBef>
+        <a:buFont typeface="Arial" panose="020B0604020202020204" pitchFamily="34" charset="0"/>
+        <a:buChar char="•"/>
+        <a:defRPr sz="1800" kern="1200">
+          <a:solidFill>
+            <a:schemeClr val="tx1"/>
+          </a:solidFill>
+          <a:latin typeface="+mn-lt"/>
+          <a:ea typeface="+mn-ea"/>
+          <a:cs typeface="+mn-cs"/>
+        </a:defRPr>
+      </a:lvl5pPr>
+      <a:lvl6pPr marL="2514600" indent="-228600" algn="l" defTabSz="914400" rtl="0" eaLnBrk="1" latinLnBrk="0" hangingPunct="1">
+        <a:lnSpc>
+          <a:spcPct val="90000"/>
+        </a:lnSpc>
+        <a:spcBef>
+          <a:spcPts val="500"/>
+        </a:spcBef>
+        <a:buFont typeface="Arial" panose="020B0604020202020204" pitchFamily="34" charset="0"/>
+        <a:buChar char="•"/>
+        <a:defRPr sz="1800" kern="1200">
+          <a:solidFill>
+            <a:schemeClr val="tx1"/>
+          </a:solidFill>
+          <a:latin typeface="+mn-lt"/>
+          <a:ea typeface="+mn-ea"/>
+          <a:cs typeface="+mn-cs"/>
+        </a:defRPr>
       </a:lvl6pPr>
-      <a:lvl7pPr marL="2971800" indent="-228600" algn="l" defTabSz="457200" rtl="0" eaLnBrk="1" latinLnBrk="0" hangingPunct="1">
+      <a:lvl7pPr marL="2971800" indent="-228600" algn="l" defTabSz="914400" rtl="0" eaLnBrk="1" latinLnBrk="0" hangingPunct="1">
+        <a:lnSpc>
+          <a:spcPct val="90000"/>
+        </a:lnSpc>
         <a:spcBef>
-          <a:spcPct val="20000"/>
+          <a:spcPts val="500"/>
         </a:spcBef>
-        <a:buFont typeface="Arial"/>
+        <a:buFont typeface="Arial" panose="020B0604020202020204" pitchFamily="34" charset="0"/>
         <a:buChar char="•"/>
-        <a:defRPr sz="2000" kern="1200">
+        <a:defRPr sz="1800" kern="1200">
           <a:solidFill>
             <a:schemeClr val="tx1"/>
           </a:solidFill>
@@ -2958,13 +3652,16 @@
           <a:cs typeface="+mn-cs"/>
         </a:defRPr>
       </a:lvl7pPr>
-      <a:lvl8pPr marL="3429000" indent="-228600" algn="l" defTabSz="457200" rtl="0" eaLnBrk="1" latinLnBrk="0" hangingPunct="1">
+      <a:lvl8pPr marL="3429000" indent="-228600" algn="l" defTabSz="914400" rtl="0" eaLnBrk="1" latinLnBrk="0" hangingPunct="1">
+        <a:lnSpc>
+          <a:spcPct val="90000"/>
+        </a:lnSpc>
         <a:spcBef>
-          <a:spcPct val="20000"/>
+          <a:spcPts val="500"/>
         </a:spcBef>
-        <a:buFont typeface="Arial"/>
+        <a:buFont typeface="Arial" panose="020B0604020202020204" pitchFamily="34" charset="0"/>
         <a:buChar char="•"/>
-        <a:defRPr sz="2000" kern="1200">
+        <a:defRPr sz="1800" kern="1200">
           <a:solidFill>
             <a:schemeClr val="tx1"/>
           </a:solidFill>
@@ -2973,13 +3670,16 @@
           <a:cs typeface="+mn-cs"/>
         </a:defRPr>
       </a:lvl8pPr>
-      <a:lvl9pPr marL="3886200" indent="-228600" algn="l" defTabSz="457200" rtl="0" eaLnBrk="1" latinLnBrk="0" hangingPunct="1">
+      <a:lvl9pPr marL="3886200" indent="-228600" algn="l" defTabSz="914400" rtl="0" eaLnBrk="1" latinLnBrk="0" hangingPunct="1">
+        <a:lnSpc>
+          <a:spcPct val="90000"/>
+        </a:lnSpc>
         <a:spcBef>
-          <a:spcPct val="20000"/>
+          <a:spcPts val="500"/>
         </a:spcBef>
-        <a:buFont typeface="Arial"/>
+        <a:buFont typeface="Arial" panose="020B0604020202020204" pitchFamily="34" charset="0"/>
         <a:buChar char="•"/>
-        <a:defRPr sz="2000" kern="1200">
+        <a:defRPr sz="1800" kern="1200">
           <a:solidFill>
             <a:schemeClr val="tx1"/>
           </a:solidFill>
@@ -2993,7 +3693,7 @@
       <a:defPPr>
         <a:defRPr lang="en-US"/>
       </a:defPPr>
-      <a:lvl1pPr marL="0" algn="l" defTabSz="457200" rtl="0" eaLnBrk="1" latinLnBrk="0" hangingPunct="1">
+      <a:lvl1pPr marL="0" algn="l" defTabSz="914400" rtl="0" eaLnBrk="1" latinLnBrk="0" hangingPunct="1">
         <a:defRPr sz="1800" kern="1200">
           <a:solidFill>
             <a:schemeClr val="tx1"/>
@@ -3003,7 +3703,7 @@
           <a:cs typeface="+mn-cs"/>
         </a:defRPr>
       </a:lvl1pPr>
-      <a:lvl2pPr marL="457200" algn="l" defTabSz="457200" rtl="0" eaLnBrk="1" latinLnBrk="0" hangingPunct="1">
+      <a:lvl2pPr marL="457200" algn="l" defTabSz="914400" rtl="0" eaLnBrk="1" latinLnBrk="0" hangingPunct="1">
         <a:defRPr sz="1800" kern="1200">
           <a:solidFill>
             <a:schemeClr val="tx1"/>
@@ -3013,7 +3713,7 @@
           <a:cs typeface="+mn-cs"/>
         </a:defRPr>
       </a:lvl2pPr>
-      <a:lvl3pPr marL="914400" algn="l" defTabSz="457200" rtl="0" eaLnBrk="1" latinLnBrk="0" hangingPunct="1">
+      <a:lvl3pPr marL="914400" algn="l" defTabSz="914400" rtl="0" eaLnBrk="1" latinLnBrk="0" hangingPunct="1">
         <a:defRPr sz="1800" kern="1200">
           <a:solidFill>
             <a:schemeClr val="tx1"/>
@@ -3023,7 +3723,7 @@
           <a:cs typeface="+mn-cs"/>
         </a:defRPr>
       </a:lvl3pPr>
-      <a:lvl4pPr marL="1371600" algn="l" defTabSz="457200" rtl="0" eaLnBrk="1" latinLnBrk="0" hangingPunct="1">
+      <a:lvl4pPr marL="1371600" algn="l" defTabSz="914400" rtl="0" eaLnBrk="1" latinLnBrk="0" hangingPunct="1">
         <a:defRPr sz="1800" kern="1200">
           <a:solidFill>
             <a:schemeClr val="tx1"/>
@@ -3033,7 +3733,7 @@
           <a:cs typeface="+mn-cs"/>
         </a:defRPr>
       </a:lvl4pPr>
-      <a:lvl5pPr marL="1828800" algn="l" defTabSz="457200" rtl="0" eaLnBrk="1" latinLnBrk="0" hangingPunct="1">
+      <a:lvl5pPr marL="1828800" algn="l" defTabSz="914400" rtl="0" eaLnBrk="1" latinLnBrk="0" hangingPunct="1">
         <a:defRPr sz="1800" kern="1200">
           <a:solidFill>
             <a:schemeClr val="tx1"/>
@@ -3043,7 +3743,7 @@
           <a:cs typeface="+mn-cs"/>
         </a:defRPr>
       </a:lvl5pPr>
-      <a:lvl6pPr marL="2286000" algn="l" defTabSz="457200" rtl="0" eaLnBrk="1" latinLnBrk="0" hangingPunct="1">
+      <a:lvl6pPr marL="2286000" algn="l" defTabSz="914400" rtl="0" eaLnBrk="1" latinLnBrk="0" hangingPunct="1">
         <a:defRPr sz="1800" kern="1200">
           <a:solidFill>
             <a:schemeClr val="tx1"/>
@@ -3053,7 +3753,7 @@
           <a:cs typeface="+mn-cs"/>
         </a:defRPr>
       </a:lvl6pPr>
-      <a:lvl7pPr marL="2743200" algn="l" defTabSz="457200" rtl="0" eaLnBrk="1" latinLnBrk="0" hangingPunct="1">
+      <a:lvl7pPr marL="2743200" algn="l" defTabSz="914400" rtl="0" eaLnBrk="1" latinLnBrk="0" hangingPunct="1">
         <a:defRPr sz="1800" kern="1200">
           <a:solidFill>
             <a:schemeClr val="tx1"/>
@@ -3063,7 +3763,7 @@
           <a:cs typeface="+mn-cs"/>
         </a:defRPr>
       </a:lvl7pPr>
-      <a:lvl8pPr marL="3200400" algn="l" defTabSz="457200" rtl="0" eaLnBrk="1" latinLnBrk="0" hangingPunct="1">
+      <a:lvl8pPr marL="3200400" algn="l" defTabSz="914400" rtl="0" eaLnBrk="1" latinLnBrk="0" hangingPunct="1">
         <a:defRPr sz="1800" kern="1200">
           <a:solidFill>
             <a:schemeClr val="tx1"/>
@@ -3073,7 +3773,7 @@
           <a:cs typeface="+mn-cs"/>
         </a:defRPr>
       </a:lvl8pPr>
-      <a:lvl9pPr marL="3657600" algn="l" defTabSz="457200" rtl="0" eaLnBrk="1" latinLnBrk="0" hangingPunct="1">
+      <a:lvl9pPr marL="3657600" algn="l" defTabSz="914400" rtl="0" eaLnBrk="1" latinLnBrk="0" hangingPunct="1">
         <a:defRPr sz="1800" kern="1200">
           <a:solidFill>
             <a:schemeClr val="tx1"/>
@@ -3098,88 +3798,25 @@
         <p:nvPr/>
       </p:nvGrpSpPr>
       <p:grpSpPr/>
-      <p:pic>
-        <p:nvPicPr>
-          <p:cNvPr id="2" name="Picture 1" descr="image2.jpeg"/>
-          <p:cNvPicPr>
-            <a:picLocks noChangeAspect="1"/>
-          </p:cNvPicPr>
-          <p:nvPr/>
-        </p:nvPicPr>
-        <p:blipFill>
-          <a:blip r:embed="rId2"/>
-          <a:stretch>
-            <a:fillRect/>
-          </a:stretch>
-        </p:blipFill>
-        <p:spPr>
-          <a:xfrm>
-            <a:off x="188120" y="5525929"/>
-            <a:ext cx="1143000" cy="1224229"/>
-          </a:xfrm>
-          <a:prstGeom prst="rect">
-            <a:avLst/>
-          </a:prstGeom>
-        </p:spPr>
-      </p:pic>
-      <p:pic>
-        <p:nvPicPr>
-          <p:cNvPr id="3" name="Picture 2" descr="image3.jpg"/>
-          <p:cNvPicPr>
-            <a:picLocks noChangeAspect="1"/>
-          </p:cNvPicPr>
-          <p:nvPr/>
-        </p:nvPicPr>
-        <p:blipFill>
-          <a:blip r:embed="rId3"/>
-          <a:stretch>
-            <a:fillRect/>
-          </a:stretch>
-        </p:blipFill>
-        <p:spPr>
-          <a:xfrm>
-            <a:off x="10638881" y="139366"/>
-            <a:ext cx="1410420" cy="1371600"/>
-          </a:xfrm>
-          <a:prstGeom prst="rect">
-            <a:avLst/>
-          </a:prstGeom>
-        </p:spPr>
-      </p:pic>
-      <p:sp>
-        <p:nvSpPr>
-          <p:cNvPr id="4" name="Rectangle 3"/>
-          <p:cNvSpPr/>
-          <p:nvPr/>
-        </p:nvSpPr>
-        <p:spPr>
-          <a:xfrm>
-            <a:off x="1524000" y="1122363"/>
-            <a:ext cx="9144000" cy="2387600"/>
-          </a:xfrm>
-          <a:prstGeom prst="rect">
-            <a:avLst/>
-          </a:prstGeom>
-        </p:spPr>
-        <p:style>
-          <a:lnRef idx="1">
-            <a:schemeClr val="accent1"/>
-          </a:lnRef>
-          <a:fillRef idx="3">
-            <a:schemeClr val="accent1"/>
-          </a:fillRef>
-          <a:effectRef idx="2">
-            <a:schemeClr val="accent1"/>
-          </a:effectRef>
-          <a:fontRef idx="minor">
-            <a:schemeClr val="lt1"/>
-          </a:fontRef>
-        </p:style>
-        <p:txBody>
-          <a:bodyPr rtlCol="0" anchor="ctr"/>
-          <a:lstStyle/>
-          <a:p>
-            <a:r>
+      <p:sp>
+        <p:nvSpPr>
+          <p:cNvPr id="2" name="Title 1"/>
+          <p:cNvSpPr>
+            <a:spLocks noGrp="1"/>
+          </p:cNvSpPr>
+          <p:nvPr>
+            <p:ph type="ctrTitle"/>
+          </p:nvPr>
+        </p:nvSpPr>
+        <p:spPr/>
+        <p:txBody>
+          <a:bodyPr>
+            <a:normAutofit/>
+          </a:bodyPr>
+          <a:lstStyle/>
+          <a:p>
+            <a:r>
+              <a:rPr/>
               <a:t>Art Non-profit</a:t>
             </a:r>
           </a:p>
@@ -3187,39 +3824,34 @@
       </p:sp>
       <p:sp>
         <p:nvSpPr>
-          <p:cNvPr id="5" name="Rectangle 4"/>
-          <p:cNvSpPr/>
-          <p:nvPr/>
-        </p:nvSpPr>
-        <p:spPr>
-          <a:xfrm>
-            <a:off x="1524000" y="3602038"/>
-            <a:ext cx="9144000" cy="1655762"/>
-          </a:xfrm>
-          <a:prstGeom prst="rect">
-            <a:avLst/>
-          </a:prstGeom>
-        </p:spPr>
-        <p:style>
-          <a:lnRef idx="1">
-            <a:schemeClr val="accent1"/>
-          </a:lnRef>
-          <a:fillRef idx="3">
-            <a:schemeClr val="accent1"/>
-          </a:fillRef>
-          <a:effectRef idx="2">
-            <a:schemeClr val="accent1"/>
-          </a:effectRef>
-          <a:fontRef idx="minor">
-            <a:schemeClr val="lt1"/>
-          </a:fontRef>
-        </p:style>
-        <p:txBody>
-          <a:bodyPr rtlCol="0" anchor="ctr"/>
-          <a:lstStyle/>
-          <a:p>
-            <a:r>
-              <a:t>Informational and Planning MeetingDecember 20, 2020</a:t>
+          <p:cNvPr id="3" name="Subtitle 2"/>
+          <p:cNvSpPr>
+            <a:spLocks noGrp="1"/>
+          </p:cNvSpPr>
+          <p:nvPr>
+            <p:ph type="subTitle" idx="1"/>
+          </p:nvPr>
+        </p:nvSpPr>
+        <p:spPr/>
+        <p:txBody>
+          <a:bodyPr>
+            <a:normAutofit/>
+          </a:bodyPr>
+          <a:lstStyle/>
+          <a:p>
+            <a:pPr lvl="0">
+              <a:buNone/>
+            </a:pPr>
+            <a:r>
+              <a:t>Informational and Planning Meeting</a:t>
+            </a:r>
+          </a:p>
+          <a:p>
+            <a:pPr lvl="0">
+              <a:buNone/>
+            </a:pPr>
+            <a:r>
+              <a:t>December 20, 2020</a:t>
             </a:r>
           </a:p>
         </p:txBody>
@@ -3244,38 +3876,27 @@
       <p:grpSpPr/>
       <p:sp>
         <p:nvSpPr>
-          <p:cNvPr id="2" name="Rectangle 1"/>
-          <p:cNvSpPr/>
-          <p:nvPr/>
-        </p:nvSpPr>
-        <p:spPr>
-          <a:xfrm>
-            <a:off x="0" y="2955441"/>
-            <a:ext cx="12192000" cy="1325563"/>
-          </a:xfrm>
-          <a:prstGeom prst="rect">
-            <a:avLst/>
-          </a:prstGeom>
-        </p:spPr>
-        <p:style>
-          <a:lnRef idx="1">
-            <a:schemeClr val="accent1"/>
-          </a:lnRef>
-          <a:fillRef idx="3">
-            <a:schemeClr val="accent1"/>
-          </a:fillRef>
-          <a:effectRef idx="2">
-            <a:schemeClr val="accent1"/>
-          </a:effectRef>
-          <a:fontRef idx="minor">
-            <a:schemeClr val="lt1"/>
-          </a:fontRef>
-        </p:style>
-        <p:txBody>
-          <a:bodyPr rtlCol="0" anchor="ctr"/>
-          <a:lstStyle/>
-          <a:p>
-            <a:r>
+          <p:cNvPr id="2" name="Title 1"/>
+          <p:cNvSpPr>
+            <a:spLocks noGrp="1"/>
+          </p:cNvSpPr>
+          <p:nvPr>
+            <p:ph type="title"/>
+          </p:nvPr>
+        </p:nvSpPr>
+        <p:spPr>
+          <a:xfrm>
+            <a:off x="0" y="2955432"/>
+            <a:ext cx="12191970" cy="1325606"/>
+          </a:xfrm>
+        </p:spPr>
+        <p:txBody>
+          <a:bodyPr/>
+          <a:lstStyle/>
+          <a:p>
+            <a:pPr algn="ctr"/>
+            <a:r>
+              <a:rPr/>
               <a:t>Questions and Feedback</a:t>
             </a:r>
           </a:p>
@@ -3301,38 +3922,21 @@
       <p:grpSpPr/>
       <p:sp>
         <p:nvSpPr>
-          <p:cNvPr id="2" name="Rectangle 1"/>
-          <p:cNvSpPr/>
-          <p:nvPr/>
-        </p:nvSpPr>
-        <p:spPr>
-          <a:xfrm>
-            <a:off x="493095" y="1226"/>
-            <a:ext cx="10515600" cy="1325563"/>
-          </a:xfrm>
-          <a:prstGeom prst="rect">
-            <a:avLst/>
-          </a:prstGeom>
-        </p:spPr>
-        <p:style>
-          <a:lnRef idx="1">
-            <a:schemeClr val="accent1"/>
-          </a:lnRef>
-          <a:fillRef idx="3">
-            <a:schemeClr val="accent1"/>
-          </a:fillRef>
-          <a:effectRef idx="2">
-            <a:schemeClr val="accent1"/>
-          </a:effectRef>
-          <a:fontRef idx="minor">
-            <a:schemeClr val="lt1"/>
-          </a:fontRef>
-        </p:style>
-        <p:txBody>
-          <a:bodyPr rtlCol="0" anchor="ctr"/>
-          <a:lstStyle/>
-          <a:p>
-            <a:r>
+          <p:cNvPr id="2" name="Title 1"/>
+          <p:cNvSpPr>
+            <a:spLocks noGrp="1"/>
+          </p:cNvSpPr>
+          <p:nvPr>
+            <p:ph type="title"/>
+          </p:nvPr>
+        </p:nvSpPr>
+        <p:spPr/>
+        <p:txBody>
+          <a:bodyPr/>
+          <a:lstStyle/>
+          <a:p>
+            <a:r>
+              <a:rPr/>
               <a:t>Resources</a:t>
             </a:r>
           </a:p>
@@ -3340,39 +3944,19 @@
       </p:sp>
       <p:sp>
         <p:nvSpPr>
-          <p:cNvPr id="3" name="Rectangle 2"/>
-          <p:cNvSpPr/>
-          <p:nvPr/>
-        </p:nvSpPr>
-        <p:spPr>
-          <a:xfrm>
-            <a:off x="493095" y="1432877"/>
-            <a:ext cx="10515600" cy="4351338"/>
-          </a:xfrm>
-          <a:prstGeom prst="rect">
-            <a:avLst/>
-          </a:prstGeom>
-        </p:spPr>
-        <p:style>
-          <a:lnRef idx="1">
-            <a:schemeClr val="accent1"/>
-          </a:lnRef>
-          <a:fillRef idx="3">
-            <a:schemeClr val="accent1"/>
-          </a:fillRef>
-          <a:effectRef idx="2">
-            <a:schemeClr val="accent1"/>
-          </a:effectRef>
-          <a:fontRef idx="minor">
-            <a:schemeClr val="lt1"/>
-          </a:fontRef>
-        </p:style>
-        <p:txBody>
-          <a:bodyPr rtlCol="0" anchor="ctr"/>
-          <a:lstStyle/>
-          <a:p>
-            <a:pPr algn="ctr"/>
-          </a:p>
+          <p:cNvPr id="3" name="Content Placeholder 2"/>
+          <p:cNvSpPr>
+            <a:spLocks noGrp="1"/>
+          </p:cNvSpPr>
+          <p:nvPr>
+            <p:ph type="obj" idx="1"/>
+          </p:nvPr>
+        </p:nvSpPr>
+        <p:spPr/>
+        <p:txBody>
+          <a:bodyPr/>
+          <a:lstStyle/>
+          <a:p/>
         </p:txBody>
       </p:sp>
     </p:spTree>
@@ -3395,38 +3979,23 @@
       <p:grpSpPr/>
       <p:sp>
         <p:nvSpPr>
-          <p:cNvPr id="2" name="Rectangle 1"/>
-          <p:cNvSpPr/>
-          <p:nvPr/>
-        </p:nvSpPr>
-        <p:spPr>
-          <a:xfrm>
-            <a:off x="493095" y="1226"/>
-            <a:ext cx="10515600" cy="1325563"/>
-          </a:xfrm>
-          <a:prstGeom prst="rect">
-            <a:avLst/>
-          </a:prstGeom>
-        </p:spPr>
-        <p:style>
-          <a:lnRef idx="1">
-            <a:schemeClr val="accent1"/>
-          </a:lnRef>
-          <a:fillRef idx="3">
-            <a:schemeClr val="accent1"/>
-          </a:fillRef>
-          <a:effectRef idx="2">
-            <a:schemeClr val="accent1"/>
-          </a:effectRef>
-          <a:fontRef idx="minor">
-            <a:schemeClr val="lt1"/>
-          </a:fontRef>
-        </p:style>
-        <p:txBody>
-          <a:bodyPr rtlCol="0" anchor="ctr"/>
-          <a:lstStyle/>
-          <a:p>
-            <a:r>
+          <p:cNvPr id="2" name="Title 1"/>
+          <p:cNvSpPr>
+            <a:spLocks noGrp="1"/>
+          </p:cNvSpPr>
+          <p:nvPr>
+            <p:ph type="title"/>
+          </p:nvPr>
+        </p:nvSpPr>
+        <p:spPr/>
+        <p:txBody>
+          <a:bodyPr>
+            <a:normAutofit/>
+          </a:bodyPr>
+          <a:lstStyle/>
+          <a:p>
+            <a:r>
+              <a:rPr/>
               <a:t>Overview</a:t>
             </a:r>
           </a:p>
@@ -3434,39 +4003,41 @@
       </p:sp>
       <p:sp>
         <p:nvSpPr>
-          <p:cNvPr id="3" name="Rectangle 2"/>
-          <p:cNvSpPr/>
-          <p:nvPr/>
-        </p:nvSpPr>
-        <p:spPr>
-          <a:xfrm>
-            <a:off x="493095" y="1132764"/>
-            <a:ext cx="10515600" cy="4651451"/>
-          </a:xfrm>
-          <a:prstGeom prst="rect">
-            <a:avLst/>
-          </a:prstGeom>
-        </p:spPr>
-        <p:style>
-          <a:lnRef idx="1">
-            <a:schemeClr val="accent1"/>
-          </a:lnRef>
-          <a:fillRef idx="3">
-            <a:schemeClr val="accent1"/>
-          </a:fillRef>
-          <a:effectRef idx="2">
-            <a:schemeClr val="accent1"/>
-          </a:effectRef>
-          <a:fontRef idx="minor">
-            <a:schemeClr val="lt1"/>
-          </a:fontRef>
-        </p:style>
-        <p:txBody>
-          <a:bodyPr rtlCol="0" anchor="ctr"/>
-          <a:lstStyle/>
-          <a:p>
-            <a:r>
-              <a:t>Summary of Current Project and StatusOverview of Potential Non-profit Purpose and GoalsSurvey of Participants and Potential Next Steps</a:t>
+          <p:cNvPr id="3" name="Content Placeholder 2"/>
+          <p:cNvSpPr>
+            <a:spLocks noGrp="1"/>
+          </p:cNvSpPr>
+          <p:nvPr>
+            <p:ph type="obj" idx="1"/>
+          </p:nvPr>
+        </p:nvSpPr>
+        <p:spPr>
+          <a:xfrm>
+            <a:off x="493136" y="1132759"/>
+            <a:ext cx="10515600" cy="4651461"/>
+          </a:xfrm>
+        </p:spPr>
+        <p:txBody>
+          <a:bodyPr wrap="square">
+            <a:normAutofit/>
+          </a:bodyPr>
+          <a:lstStyle/>
+          <a:p>
+            <a:pPr lvl="0"/>
+            <a:r>
+              <a:t>Summary of Current Project and Status</a:t>
+            </a:r>
+          </a:p>
+          <a:p>
+            <a:pPr lvl="0"/>
+            <a:r>
+              <a:t>Overview of Potential Non-profit Purpose and Goals</a:t>
+            </a:r>
+          </a:p>
+          <a:p>
+            <a:pPr lvl="0"/>
+            <a:r>
+              <a:t>Survey of Participants and Potential Next Steps</a:t>
             </a:r>
           </a:p>
         </p:txBody>
@@ -3491,116 +4062,184 @@
       <p:grpSpPr/>
       <p:sp>
         <p:nvSpPr>
-          <p:cNvPr id="2" name="Rectangle 1"/>
-          <p:cNvSpPr/>
+          <p:cNvPr id="2" name="Title 1"/>
+          <p:cNvSpPr>
+            <a:spLocks noGrp="1"/>
+          </p:cNvSpPr>
+          <p:nvPr>
+            <p:ph type="title"/>
+          </p:nvPr>
+        </p:nvSpPr>
+        <p:spPr/>
+        <p:txBody>
+          <a:bodyPr>
+            <a:normAutofit/>
+          </a:bodyPr>
+          <a:lstStyle/>
+          <a:p>
+            <a:r>
+              <a:rPr sz="3600"/>
+              <a:t>Holy Child Project Overview</a:t>
+            </a:r>
+          </a:p>
+        </p:txBody>
+      </p:sp>
+      <p:sp>
+        <p:nvSpPr>
+          <p:cNvPr id="3" name="Content Placeholder 2"/>
+          <p:cNvSpPr>
+            <a:spLocks noGrp="1"/>
+          </p:cNvSpPr>
+          <p:nvPr>
+            <p:ph type="obj" idx="1"/>
+          </p:nvPr>
+        </p:nvSpPr>
+        <p:spPr>
+          <a:xfrm>
+            <a:off x="493136" y="1160556"/>
+            <a:ext cx="10515600" cy="4623664"/>
+          </a:xfrm>
+        </p:spPr>
+        <p:txBody>
+          <a:bodyPr wrap="square">
+            <a:normAutofit fontScale="62500" lnSpcReduction="20000"/>
+          </a:bodyPr>
+          <a:lstStyle/>
+          <a:p>
+            <a:pPr lvl="0"/>
+            <a:r>
+              <a:t>Mother Seton Hall art schema finished</a:t>
+            </a:r>
+          </a:p>
+          <a:p>
+            <a:pPr lvl="1"/>
+            <a:r>
+              <a:t>Five main hallway sections, plus intro, closing, and side hallways</a:t>
+            </a:r>
+          </a:p>
+          <a:p>
+            <a:pPr lvl="1"/>
+            <a:r>
+              <a:t>Focus is on reproductions of masterpiece paintings and will not include photos of statues and other architecture</a:t>
+            </a:r>
+          </a:p>
+          <a:p>
+            <a:pPr lvl="1"/>
+            <a:r>
+              <a:t>Each main section to cover an era of history</a:t>
+            </a:r>
+          </a:p>
+          <a:p>
+            <a:pPr lvl="2"/>
+            <a:r>
+              <a:t>Also looking to highlight art history</a:t>
+            </a:r>
+          </a:p>
+          <a:p>
+            <a:pPr lvl="0"/>
+            <a:r>
+              <a:t>Intro section complete</a:t>
+            </a:r>
+          </a:p>
+          <a:p>
+            <a:pPr lvl="1"/>
+            <a:r>
+              <a:t>10 paintings for just over $10k</a:t>
+            </a:r>
+          </a:p>
+          <a:p>
+            <a:pPr lvl="0"/>
+            <a:r>
+              <a:t>Modern Era Funding Promised ? Currently in RFQ Stage</a:t>
+            </a:r>
+          </a:p>
+          <a:p>
+            <a:pPr lvl="1"/>
+            <a:r>
+              <a:t>Two pieces awaiting final down select</a:t>
+            </a:r>
+          </a:p>
+          <a:p>
+            <a:pPr lvl="1"/>
+            <a:r>
+              <a:t>15 paintings for $10.5k-14k</a:t>
+            </a:r>
+          </a:p>
+          <a:p>
+            <a:pPr lvl="0"/>
+            <a:r>
+              <a:t>Fundraising and final selection remains for following sections</a:t>
+            </a:r>
+          </a:p>
+          <a:p>
+            <a:pPr lvl="1"/>
+            <a:r>
+              <a:t>Cradle of Civilization and OT</a:t>
+            </a:r>
+          </a:p>
+          <a:p>
+            <a:pPr lvl="1"/>
+            <a:r>
+              <a:t>Greece and Rome</a:t>
+            </a:r>
+          </a:p>
+          <a:p>
+            <a:pPr lvl="1"/>
+            <a:r>
+              <a:t>Paschal Mystery</a:t>
+            </a:r>
+          </a:p>
+          <a:p>
+            <a:pPr lvl="1"/>
+            <a:r>
+              <a:t>Early Church to Medieval Era</a:t>
+            </a:r>
+          </a:p>
+          <a:p>
+            <a:pPr lvl="0"/>
+            <a:r>
+              <a:t>Estimated Costs remaining: ~40 paintings for $35k plus lighting</a:t>
+            </a:r>
+          </a:p>
+          <a:p>
+            <a:pPr lvl="0"/>
+            <a:r>
+              <a:t>Planning not yet begun for Blessed Miguel Pro Hall</a:t>
+            </a:r>
+          </a:p>
+        </p:txBody>
+      </p:sp>
+      <p:sp>
+        <p:nvSpPr>
+          <p:cNvPr id="4" name="TextBox 3"/>
+          <p:cNvSpPr txBox="1"/>
           <p:nvPr/>
         </p:nvSpPr>
         <p:spPr>
           <a:xfrm>
-            <a:off x="493095" y="1226"/>
-            <a:ext cx="10515600" cy="1325563"/>
+            <a:off x="7996519" y="2586014"/>
+            <a:ext cx="4195450" cy="1938985"/>
           </a:xfrm>
           <a:prstGeom prst="rect">
             <a:avLst/>
           </a:prstGeom>
-        </p:spPr>
-        <p:style>
-          <a:lnRef idx="1">
-            <a:schemeClr val="accent1"/>
-          </a:lnRef>
-          <a:fillRef idx="3">
-            <a:schemeClr val="accent1"/>
-          </a:fillRef>
-          <a:effectRef idx="2">
-            <a:schemeClr val="accent1"/>
-          </a:effectRef>
-          <a:fontRef idx="minor">
-            <a:schemeClr val="lt1"/>
-          </a:fontRef>
-        </p:style>
-        <p:txBody>
-          <a:bodyPr rtlCol="0" anchor="ctr"/>
-          <a:lstStyle/>
-          <a:p>
-            <a:r>
-              <a:t>Holy Child Project Overview</a:t>
-            </a:r>
-          </a:p>
-        </p:txBody>
-      </p:sp>
-      <p:sp>
-        <p:nvSpPr>
-          <p:cNvPr id="3" name="Rectangle 2"/>
-          <p:cNvSpPr/>
-          <p:nvPr/>
-        </p:nvSpPr>
-        <p:spPr>
-          <a:xfrm>
-            <a:off x="493095" y="1160585"/>
-            <a:ext cx="10515600" cy="4623630"/>
-          </a:xfrm>
-          <a:prstGeom prst="rect">
-            <a:avLst/>
-          </a:prstGeom>
-        </p:spPr>
-        <p:style>
-          <a:lnRef idx="1">
-            <a:schemeClr val="accent1"/>
-          </a:lnRef>
-          <a:fillRef idx="3">
-            <a:schemeClr val="accent1"/>
-          </a:fillRef>
-          <a:effectRef idx="2">
-            <a:schemeClr val="accent1"/>
-          </a:effectRef>
-          <a:fontRef idx="minor">
-            <a:schemeClr val="lt1"/>
-          </a:fontRef>
-        </p:style>
-        <p:txBody>
-          <a:bodyPr rtlCol="0" anchor="ctr"/>
-          <a:lstStyle/>
-          <a:p>
-            <a:r>
-              <a:t>Mother Seton Hall art schema finishedFive main hallway sections, plus intro, closing, and side hallwaysFocus is on reproductions of masterpiece paintings and will not include photos of statues and other architectureEach main section to cover an era of history Also looking to highlight art history Intro section complete10 paintings for just over $10k Modern Era Funding Promised – Currently in RFQ StageTwo pieces awaiting final down select15 paintings for $10.5k-14kFundraising and final selection remains for following sectionsCradle of Civilization and OT Greece and Rome Paschal MysteryEarly Church to Medieval EraEstimated Costs remaining: ~40 paintings for $35k plus lightingPlanning not yet begun for Blessed Miguel Pro Hall</a:t>
-            </a:r>
-          </a:p>
-        </p:txBody>
-      </p:sp>
-      <p:sp>
-        <p:nvSpPr>
-          <p:cNvPr id="4" name="Rectangle 3"/>
-          <p:cNvSpPr/>
-          <p:nvPr/>
-        </p:nvSpPr>
-        <p:spPr>
-          <a:xfrm>
-            <a:off x="7996518" y="2586006"/>
-            <a:ext cx="4195482" cy="1938992"/>
-          </a:xfrm>
-          <a:prstGeom prst="rect">
-            <a:avLst/>
-          </a:prstGeom>
-        </p:spPr>
-        <p:style>
-          <a:lnRef idx="1">
-            <a:schemeClr val="accent1"/>
-          </a:lnRef>
-          <a:fillRef idx="3">
-            <a:schemeClr val="accent1"/>
-          </a:fillRef>
-          <a:effectRef idx="2">
-            <a:schemeClr val="accent1"/>
-          </a:effectRef>
-          <a:fontRef idx="minor">
-            <a:schemeClr val="lt1"/>
-          </a:fontRef>
-        </p:style>
-        <p:txBody>
-          <a:bodyPr rtlCol="0" anchor="ctr"/>
-          <a:lstStyle/>
-          <a:p>
-            <a:r>
+          <a:noFill/>
+        </p:spPr>
+        <p:txBody>
+          <a:bodyPr wrap="square" vert="horz" lIns="91440" tIns="45720" rIns="91440" bIns="45720" rtlCol="0">
+            <a:spAutoFit/>
+          </a:bodyPr>
+          <a:lstStyle/>
+          <a:p>
+            <a:pPr algn="ctr">
+              <a:buNone/>
+            </a:pPr>
+            <a:r>
+              <a:rPr sz="4000" b="1">
+                <a:solidFill>
+                  <a:schemeClr val="accent5"/>
+                </a:solidFill>
+              </a:rPr>
               <a:t>Mother Seton Hall Nearly 1/3 Complete!!!</a:t>
             </a:r>
           </a:p>
@@ -3626,38 +4265,26 @@
       <p:grpSpPr/>
       <p:sp>
         <p:nvSpPr>
-          <p:cNvPr id="2" name="Rectangle 1"/>
-          <p:cNvSpPr/>
-          <p:nvPr/>
-        </p:nvSpPr>
-        <p:spPr>
-          <a:xfrm>
-            <a:off x="493095" y="1226"/>
-            <a:ext cx="10515600" cy="1072559"/>
-          </a:xfrm>
-          <a:prstGeom prst="rect">
-            <a:avLst/>
-          </a:prstGeom>
-        </p:spPr>
-        <p:style>
-          <a:lnRef idx="1">
-            <a:schemeClr val="accent1"/>
-          </a:lnRef>
-          <a:fillRef idx="3">
-            <a:schemeClr val="accent1"/>
-          </a:fillRef>
-          <a:effectRef idx="2">
-            <a:schemeClr val="accent1"/>
-          </a:effectRef>
-          <a:fontRef idx="minor">
-            <a:schemeClr val="lt1"/>
-          </a:fontRef>
-        </p:style>
-        <p:txBody>
-          <a:bodyPr rtlCol="0" anchor="ctr"/>
-          <a:lstStyle/>
-          <a:p>
-            <a:r>
+          <p:cNvPr id="2" name="Title 1"/>
+          <p:cNvSpPr>
+            <a:spLocks noGrp="1"/>
+          </p:cNvSpPr>
+          <p:nvPr>
+            <p:ph type="title"/>
+          </p:nvPr>
+        </p:nvSpPr>
+        <p:spPr>
+          <a:xfrm>
+            <a:off x="493136" y="1189"/>
+            <a:ext cx="10515600" cy="1072591"/>
+          </a:xfrm>
+        </p:spPr>
+        <p:txBody>
+          <a:bodyPr/>
+          <a:lstStyle/>
+          <a:p>
+            <a:r>
+              <a:rPr/>
               <a:t>Mother Seton Hall Art Schema</a:t>
             </a:r>
           </a:p>
@@ -3665,39 +4292,56 @@
       </p:sp>
       <p:sp>
         <p:nvSpPr>
-          <p:cNvPr id="3" name="Rectangle 2"/>
-          <p:cNvSpPr/>
-          <p:nvPr/>
-        </p:nvSpPr>
-        <p:spPr>
-          <a:xfrm>
-            <a:off x="1436528" y="4766554"/>
-            <a:ext cx="2863098" cy="1384625"/>
-          </a:xfrm>
-          <a:prstGeom prst="rect">
-            <a:avLst/>
-          </a:prstGeom>
-        </p:spPr>
-        <p:style>
-          <a:lnRef idx="1">
-            <a:schemeClr val="accent1"/>
-          </a:lnRef>
-          <a:fillRef idx="3">
-            <a:schemeClr val="accent1"/>
-          </a:fillRef>
-          <a:effectRef idx="2">
-            <a:schemeClr val="accent1"/>
-          </a:effectRef>
-          <a:fontRef idx="minor">
-            <a:schemeClr val="lt1"/>
-          </a:fontRef>
-        </p:style>
-        <p:txBody>
-          <a:bodyPr rtlCol="0" anchor="ctr"/>
-          <a:lstStyle/>
-          <a:p>
-            <a:r>
-              <a:t>CompletedIn-progressPlanning Stages</a:t>
+          <p:cNvPr id="3" name="Content Placeholder 2"/>
+          <p:cNvSpPr>
+            <a:spLocks noGrp="1"/>
+          </p:cNvSpPr>
+          <p:nvPr>
+            <p:ph type="obj" idx="1"/>
+          </p:nvPr>
+        </p:nvSpPr>
+        <p:spPr>
+          <a:xfrm>
+            <a:off x="1436522" y="4766584"/>
+            <a:ext cx="2863078" cy="1384584"/>
+          </a:xfrm>
+        </p:spPr>
+        <p:txBody>
+          <a:bodyPr wrap="square">
+            <a:normAutofit fontScale="92500" lnSpcReduction="10000"/>
+          </a:bodyPr>
+          <a:lstStyle/>
+          <a:p>
+            <a:pPr lvl="0"/>
+            <a:r>
+              <a:rPr>
+                <a:solidFill>
+                  <a:srgbClr val="00B050"/>
+                </a:solidFill>
+              </a:rPr>
+              <a:t>Completed</a:t>
+            </a:r>
+          </a:p>
+          <a:p>
+            <a:pPr lvl="0"/>
+            <a:r>
+              <a:rPr>
+                <a:solidFill>
+                  <a:srgbClr val="7030A0"/>
+                </a:solidFill>
+              </a:rPr>
+              <a:t>In-progress</a:t>
+            </a:r>
+          </a:p>
+          <a:p>
+            <a:pPr lvl="0"/>
+            <a:r>
+              <a:rPr>
+                <a:solidFill>
+                  <a:schemeClr val="accent2"/>
+                </a:solidFill>
+              </a:rPr>
+              <a:t>Planning Stages</a:t>
             </a:r>
           </a:p>
         </p:txBody>
@@ -3712,14 +4356,15 @@
         </p:nvPicPr>
         <p:blipFill>
           <a:blip r:embed="rId2"/>
+          <a:srcRect r="1414"/>
           <a:stretch>
             <a:fillRect/>
           </a:stretch>
         </p:blipFill>
         <p:spPr>
           <a:xfrm>
-            <a:off x="707407" y="1155858"/>
-            <a:ext cx="9944387" cy="3686175"/>
+            <a:off x="707379" y="1155893"/>
+            <a:ext cx="9944374" cy="3686129"/>
           </a:xfrm>
           <a:prstGeom prst="rect">
             <a:avLst/>
@@ -3734,12 +4379,13 @@
         </p:nvCxnSpPr>
         <p:spPr>
           <a:xfrm>
-            <a:off x="856034" y="3196147"/>
-            <a:ext cx="1741251" cy="0"/>
+            <a:off x="856061" y="3196102"/>
+            <a:ext cx="1741200" cy="0"/>
           </a:xfrm>
           <a:prstGeom prst="line">
             <a:avLst/>
           </a:prstGeom>
+          <a:ln/>
         </p:spPr>
         <p:style>
           <a:lnRef idx="2">
@@ -3764,12 +4410,13 @@
         </p:nvCxnSpPr>
         <p:spPr>
           <a:xfrm>
-            <a:off x="2908571" y="3225331"/>
-            <a:ext cx="2423959" cy="0"/>
+            <a:off x="2908614" y="3225363"/>
+            <a:ext cx="2423892" cy="0"/>
           </a:xfrm>
           <a:prstGeom prst="line">
             <a:avLst/>
           </a:prstGeom>
+          <a:ln/>
         </p:spPr>
         <p:style>
           <a:lnRef idx="2">
@@ -3794,12 +4441,13 @@
         </p:nvCxnSpPr>
         <p:spPr>
           <a:xfrm>
-            <a:off x="856034" y="2755158"/>
-            <a:ext cx="1741251" cy="0"/>
+            <a:off x="856061" y="2755178"/>
+            <a:ext cx="1741200" cy="0"/>
           </a:xfrm>
           <a:prstGeom prst="line">
             <a:avLst/>
           </a:prstGeom>
+          <a:ln/>
         </p:spPr>
         <p:style>
           <a:lnRef idx="2">
@@ -3824,12 +4472,13 @@
         </p:nvCxnSpPr>
         <p:spPr>
           <a:xfrm>
-            <a:off x="856033" y="4026238"/>
-            <a:ext cx="787941" cy="0"/>
+            <a:off x="856061" y="4026194"/>
+            <a:ext cx="787938" cy="0"/>
           </a:xfrm>
           <a:prstGeom prst="line">
             <a:avLst/>
           </a:prstGeom>
+          <a:ln/>
         </p:spPr>
         <p:style>
           <a:lnRef idx="2">
@@ -3853,13 +4502,14 @@
           <p:nvPr/>
         </p:nvCxnSpPr>
         <p:spPr>
-          <a:xfrm flipV="1">
-            <a:off x="875488" y="3196147"/>
-            <a:ext cx="1" cy="806380"/>
+          <a:xfrm>
+            <a:off x="875446" y="3196102"/>
+            <a:ext cx="0" cy="806409"/>
           </a:xfrm>
           <a:prstGeom prst="line">
             <a:avLst/>
           </a:prstGeom>
+          <a:ln/>
         </p:spPr>
         <p:style>
           <a:lnRef idx="2">
@@ -3884,12 +4534,13 @@
         </p:nvCxnSpPr>
         <p:spPr>
           <a:xfrm>
-            <a:off x="5332530" y="3338820"/>
-            <a:ext cx="418364" cy="0"/>
+            <a:off x="5332506" y="3338840"/>
+            <a:ext cx="418429" cy="0"/>
           </a:xfrm>
           <a:prstGeom prst="line">
             <a:avLst/>
           </a:prstGeom>
+          <a:ln/>
         </p:spPr>
         <p:style>
           <a:lnRef idx="2">
@@ -3914,12 +4565,13 @@
         </p:nvCxnSpPr>
         <p:spPr>
           <a:xfrm>
-            <a:off x="2908571" y="2776845"/>
-            <a:ext cx="2423959" cy="0"/>
+            <a:off x="2908614" y="2776849"/>
+            <a:ext cx="2423892" cy="0"/>
           </a:xfrm>
           <a:prstGeom prst="line">
             <a:avLst/>
           </a:prstGeom>
+          <a:ln/>
         </p:spPr>
         <p:style>
           <a:lnRef idx="2">
@@ -3944,12 +4596,13 @@
         </p:nvCxnSpPr>
         <p:spPr>
           <a:xfrm>
-            <a:off x="5658256" y="2776845"/>
+            <a:off x="5658215" y="2776849"/>
             <a:ext cx="2201693" cy="0"/>
           </a:xfrm>
           <a:prstGeom prst="line">
             <a:avLst/>
           </a:prstGeom>
+          <a:ln/>
         </p:spPr>
         <p:style>
           <a:lnRef idx="2">
@@ -3974,12 +4627,13 @@
         </p:nvCxnSpPr>
         <p:spPr>
           <a:xfrm>
-            <a:off x="6066816" y="3197366"/>
-            <a:ext cx="1773677" cy="0"/>
+            <a:off x="6066861" y="3197382"/>
+            <a:ext cx="1773661" cy="0"/>
           </a:xfrm>
           <a:prstGeom prst="line">
             <a:avLst/>
           </a:prstGeom>
+          <a:ln/>
         </p:spPr>
         <p:style>
           <a:lnRef idx="2">
@@ -4004,12 +4658,13 @@
         </p:nvCxnSpPr>
         <p:spPr>
           <a:xfrm>
-            <a:off x="8164749" y="3205875"/>
-            <a:ext cx="2175753" cy="0"/>
+            <a:off x="8164769" y="3205886"/>
+            <a:ext cx="2175723" cy="0"/>
           </a:xfrm>
           <a:prstGeom prst="line">
             <a:avLst/>
           </a:prstGeom>
+          <a:ln/>
         </p:spPr>
         <p:style>
           <a:lnRef idx="2">
@@ -4034,12 +4689,13 @@
         </p:nvCxnSpPr>
         <p:spPr>
           <a:xfrm>
-            <a:off x="8164749" y="2776845"/>
-            <a:ext cx="1212715" cy="0"/>
+            <a:off x="8164769" y="2776849"/>
+            <a:ext cx="1212677" cy="0"/>
           </a:xfrm>
           <a:prstGeom prst="line">
             <a:avLst/>
           </a:prstGeom>
+          <a:ln/>
         </p:spPr>
         <p:style>
           <a:lnRef idx="2">
@@ -4063,13 +4719,14 @@
           <p:nvPr/>
         </p:nvCxnSpPr>
         <p:spPr>
-          <a:xfrm flipV="1">
-            <a:off x="6086271" y="3196147"/>
-            <a:ext cx="0" cy="532997"/>
+          <a:xfrm>
+            <a:off x="6086246" y="3196102"/>
+            <a:ext cx="0" cy="533004"/>
           </a:xfrm>
           <a:prstGeom prst="line">
             <a:avLst/>
           </a:prstGeom>
+          <a:ln/>
         </p:spPr>
         <p:style>
           <a:lnRef idx="2">
@@ -4093,13 +4750,14 @@
           <p:nvPr/>
         </p:nvCxnSpPr>
         <p:spPr>
-          <a:xfrm flipV="1">
-            <a:off x="5661497" y="2222162"/>
-            <a:ext cx="0" cy="375123"/>
+          <a:xfrm>
+            <a:off x="5661507" y="2222174"/>
+            <a:ext cx="0" cy="375087"/>
           </a:xfrm>
           <a:prstGeom prst="line">
             <a:avLst/>
           </a:prstGeom>
+          <a:ln/>
         </p:spPr>
         <p:style>
           <a:lnRef idx="2">
@@ -4123,13 +4781,14 @@
           <p:nvPr/>
         </p:nvCxnSpPr>
         <p:spPr>
-          <a:xfrm flipV="1">
-            <a:off x="5371442" y="2243848"/>
-            <a:ext cx="0" cy="532997"/>
+          <a:xfrm>
+            <a:off x="5371459" y="2243846"/>
+            <a:ext cx="0" cy="533003"/>
           </a:xfrm>
           <a:prstGeom prst="line">
             <a:avLst/>
           </a:prstGeom>
+          <a:ln/>
         </p:spPr>
         <p:style>
           <a:lnRef idx="2">
@@ -4153,13 +4812,14 @@
           <p:nvPr/>
         </p:nvCxnSpPr>
         <p:spPr>
-          <a:xfrm flipV="1">
-            <a:off x="5750894" y="3338820"/>
-            <a:ext cx="0" cy="193123"/>
+          <a:xfrm>
+            <a:off x="5750935" y="3338840"/>
+            <a:ext cx="0" cy="193121"/>
           </a:xfrm>
           <a:prstGeom prst="line">
             <a:avLst/>
           </a:prstGeom>
+          <a:ln/>
         </p:spPr>
         <p:style>
           <a:lnRef idx="2">
@@ -4196,78 +4856,81 @@
       <p:grpSpPr/>
       <p:sp>
         <p:nvSpPr>
-          <p:cNvPr id="2" name="Rectangle 1"/>
-          <p:cNvSpPr/>
-          <p:nvPr/>
-        </p:nvSpPr>
-        <p:spPr>
-          <a:xfrm>
-            <a:off x="493095" y="1227"/>
-            <a:ext cx="10515600" cy="1141774"/>
-          </a:xfrm>
-          <a:prstGeom prst="rect">
-            <a:avLst/>
-          </a:prstGeom>
-        </p:spPr>
-        <p:style>
-          <a:lnRef idx="1">
-            <a:schemeClr val="accent1"/>
-          </a:lnRef>
-          <a:fillRef idx="3">
-            <a:schemeClr val="accent1"/>
-          </a:fillRef>
-          <a:effectRef idx="2">
-            <a:schemeClr val="accent1"/>
-          </a:effectRef>
-          <a:fontRef idx="minor">
-            <a:schemeClr val="lt1"/>
-          </a:fontRef>
-        </p:style>
-        <p:txBody>
-          <a:bodyPr rtlCol="0" anchor="ctr"/>
-          <a:lstStyle/>
-          <a:p>
-            <a:r>
-              <a:t>Non-profit PurposesAsset Protection</a:t>
-            </a:r>
-          </a:p>
-        </p:txBody>
-      </p:sp>
-      <p:sp>
-        <p:nvSpPr>
-          <p:cNvPr id="3" name="Rectangle 2"/>
-          <p:cNvSpPr/>
-          <p:nvPr/>
-        </p:nvSpPr>
-        <p:spPr>
-          <a:xfrm>
-            <a:off x="493094" y="1485899"/>
-            <a:ext cx="11332560" cy="4298315"/>
-          </a:xfrm>
-          <a:prstGeom prst="rect">
-            <a:avLst/>
-          </a:prstGeom>
-        </p:spPr>
-        <p:style>
-          <a:lnRef idx="1">
-            <a:schemeClr val="accent1"/>
-          </a:lnRef>
-          <a:fillRef idx="3">
-            <a:schemeClr val="accent1"/>
-          </a:fillRef>
-          <a:effectRef idx="2">
-            <a:schemeClr val="accent1"/>
-          </a:effectRef>
-          <a:fontRef idx="minor">
-            <a:schemeClr val="lt1"/>
-          </a:fontRef>
-        </p:style>
-        <p:txBody>
-          <a:bodyPr rtlCol="0" anchor="ctr"/>
-          <a:lstStyle/>
-          <a:p>
-            <a:r>
-              <a:t>Asset protection is critical to fundraising in parishes/dioceses where future friendliness toward classical education and great art is in questionBarbarian bishops and modernist priests have destroyed much church art and sold off numerous assets to pay abuse settlementsMost people have stories of friends/family saving church art from literal dumpstersNon-profit can hold assets in trust and give them away to other schools if unfriendly powers take control and want to dispose of the art</a:t>
+          <p:cNvPr id="2" name="Title 1"/>
+          <p:cNvSpPr>
+            <a:spLocks noGrp="1"/>
+          </p:cNvSpPr>
+          <p:nvPr>
+            <p:ph type="title"/>
+          </p:nvPr>
+        </p:nvSpPr>
+        <p:spPr>
+          <a:xfrm>
+            <a:off x="493136" y="1189"/>
+            <a:ext cx="10515600" cy="1141811"/>
+          </a:xfrm>
+        </p:spPr>
+        <p:txBody>
+          <a:bodyPr>
+            <a:normAutofit/>
+          </a:bodyPr>
+          <a:lstStyle/>
+          <a:p>
+            <a:r>
+              <a:rPr sz="3600"/>
+              <a:t>Non-profit Purposes</a:t>
+            </a:r>
+            <a:br/>
+            <a:r>
+              <a:rPr sz="3600"/>
+              <a:t>Asset Protection</a:t>
+            </a:r>
+          </a:p>
+        </p:txBody>
+      </p:sp>
+      <p:sp>
+        <p:nvSpPr>
+          <p:cNvPr id="3" name="Content Placeholder 2"/>
+          <p:cNvSpPr>
+            <a:spLocks noGrp="1"/>
+          </p:cNvSpPr>
+          <p:nvPr>
+            <p:ph type="obj" idx="1"/>
+          </p:nvPr>
+        </p:nvSpPr>
+        <p:spPr>
+          <a:xfrm>
+            <a:off x="493136" y="1485900"/>
+            <a:ext cx="11332525" cy="4298320"/>
+          </a:xfrm>
+        </p:spPr>
+        <p:txBody>
+          <a:bodyPr wrap="square">
+            <a:normAutofit/>
+          </a:bodyPr>
+          <a:lstStyle/>
+          <a:p>
+            <a:pPr lvl="0"/>
+            <a:r>
+              <a:t>Asset protection is critical to fundraising in parishes/dioceses where future friendliness toward classical education and great art is in question</a:t>
+            </a:r>
+          </a:p>
+          <a:p>
+            <a:pPr lvl="1"/>
+            <a:r>
+              <a:t>Barbarian bishops and modernist priests have destroyed much church art and sold off numerous assets to pay abuse settlements</a:t>
+            </a:r>
+          </a:p>
+          <a:p>
+            <a:pPr lvl="1"/>
+            <a:r>
+              <a:t>Most people have stories of friends/family saving church art from literal dumpsters</a:t>
+            </a:r>
+          </a:p>
+          <a:p>
+            <a:pPr lvl="1"/>
+            <a:r>
+              <a:t>Non-profit can hold assets in trust and give them away to other schools if unfriendly powers take control and want to dispose of the art</a:t>
             </a:r>
           </a:p>
         </p:txBody>
@@ -4292,78 +4955,117 @@
       <p:grpSpPr/>
       <p:sp>
         <p:nvSpPr>
-          <p:cNvPr id="2" name="Rectangle 1"/>
-          <p:cNvSpPr/>
-          <p:nvPr/>
-        </p:nvSpPr>
-        <p:spPr>
-          <a:xfrm>
-            <a:off x="493095" y="1227"/>
-            <a:ext cx="10515600" cy="1141774"/>
-          </a:xfrm>
-          <a:prstGeom prst="rect">
-            <a:avLst/>
-          </a:prstGeom>
-        </p:spPr>
-        <p:style>
-          <a:lnRef idx="1">
-            <a:schemeClr val="accent1"/>
-          </a:lnRef>
-          <a:fillRef idx="3">
-            <a:schemeClr val="accent1"/>
-          </a:fillRef>
-          <a:effectRef idx="2">
-            <a:schemeClr val="accent1"/>
-          </a:effectRef>
-          <a:fontRef idx="minor">
-            <a:schemeClr val="lt1"/>
-          </a:fontRef>
-        </p:style>
-        <p:txBody>
-          <a:bodyPr rtlCol="0" anchor="ctr"/>
-          <a:lstStyle/>
-          <a:p>
-            <a:r>
-              <a:t>Non-profit PurposesProject and Concept Promotion</a:t>
-            </a:r>
-          </a:p>
-        </p:txBody>
-      </p:sp>
-      <p:sp>
-        <p:nvSpPr>
-          <p:cNvPr id="3" name="Rectangle 2"/>
-          <p:cNvSpPr/>
-          <p:nvPr/>
-        </p:nvSpPr>
-        <p:spPr>
-          <a:xfrm>
-            <a:off x="493094" y="1485899"/>
-            <a:ext cx="11332560" cy="4298315"/>
-          </a:xfrm>
-          <a:prstGeom prst="rect">
-            <a:avLst/>
-          </a:prstGeom>
-        </p:spPr>
-        <p:style>
-          <a:lnRef idx="1">
-            <a:schemeClr val="accent1"/>
-          </a:lnRef>
-          <a:fillRef idx="3">
-            <a:schemeClr val="accent1"/>
-          </a:fillRef>
-          <a:effectRef idx="2">
-            <a:schemeClr val="accent1"/>
-          </a:effectRef>
-          <a:fontRef idx="minor">
-            <a:schemeClr val="lt1"/>
-          </a:fontRef>
-        </p:style>
-        <p:txBody>
-          <a:bodyPr rtlCol="0" anchor="ctr"/>
-          <a:lstStyle/>
-          <a:p>
-            <a:r>
-              <a:t>Holy Child is pioneering something newNever before have modern printing methods been combined with the ever-growing library of high resolution photos of museum paintings to bring the best masterpiece paintings in the western canon to schoolsThe classical school movement is rapidly expanding and pioneering new ways to bring the a traditional education to the modern worldMany schools would likely be interested if they could see this projectWays to promote conceptSpeak at educational conferencesNews coveragePublishing in academic journals and educational magazinesPartnerships with local art museumsPartnerships with other schools</a:t>
+          <p:cNvPr id="2" name="Title 1"/>
+          <p:cNvSpPr>
+            <a:spLocks noGrp="1"/>
+          </p:cNvSpPr>
+          <p:nvPr>
+            <p:ph type="title"/>
+          </p:nvPr>
+        </p:nvSpPr>
+        <p:spPr>
+          <a:xfrm>
+            <a:off x="493136" y="1189"/>
+            <a:ext cx="10515600" cy="1141811"/>
+          </a:xfrm>
+        </p:spPr>
+        <p:txBody>
+          <a:bodyPr>
+            <a:normAutofit/>
+          </a:bodyPr>
+          <a:lstStyle/>
+          <a:p>
+            <a:r>
+              <a:rPr sz="3600"/>
+              <a:t>Non-profit Purposes</a:t>
+            </a:r>
+            <a:br/>
+            <a:r>
+              <a:rPr sz="3600"/>
+              <a:t>Project and Concept Promotion</a:t>
+            </a:r>
+          </a:p>
+        </p:txBody>
+      </p:sp>
+      <p:sp>
+        <p:nvSpPr>
+          <p:cNvPr id="3" name="Content Placeholder 2"/>
+          <p:cNvSpPr>
+            <a:spLocks noGrp="1"/>
+          </p:cNvSpPr>
+          <p:nvPr>
+            <p:ph type="obj" idx="1"/>
+          </p:nvPr>
+        </p:nvSpPr>
+        <p:spPr>
+          <a:xfrm>
+            <a:off x="493136" y="1485900"/>
+            <a:ext cx="11332525" cy="4298320"/>
+          </a:xfrm>
+        </p:spPr>
+        <p:txBody>
+          <a:bodyPr wrap="square">
+            <a:normAutofit fontScale="92500" lnSpcReduction="20000"/>
+          </a:bodyPr>
+          <a:lstStyle/>
+          <a:p>
+            <a:pPr lvl="0"/>
+            <a:r>
+              <a:t>Holy Child is pioneering something new</a:t>
+            </a:r>
+          </a:p>
+          <a:p>
+            <a:pPr lvl="1"/>
+            <a:r>
+              <a:t>Never before have modern printing methods been combined with the ever-growing library of high resolution photos of museum paintings to bring the best masterpiece paintings in the western canon to schools</a:t>
+            </a:r>
+          </a:p>
+          <a:p>
+            <a:pPr lvl="0"/>
+            <a:r>
+              <a:t>The classical school movement is rapidly expanding and pioneering new ways to bring the a traditional education to the modern world</a:t>
+            </a:r>
+          </a:p>
+          <a:p>
+            <a:pPr lvl="1"/>
+            <a:r>
+              <a:t>Many schools would likely be interested if they could see this project</a:t>
+            </a:r>
+          </a:p>
+          <a:p>
+            <a:pPr lvl="0"/>
+            <a:r>
+              <a:t>Ways to promote concept</a:t>
+            </a:r>
+          </a:p>
+          <a:p>
+            <a:pPr lvl="1"/>
+            <a:r>
+              <a:t>Speak at educational conferences</a:t>
+            </a:r>
+          </a:p>
+          <a:p>
+            <a:pPr lvl="1"/>
+            <a:r>
+              <a:t>News coverage</a:t>
+            </a:r>
+          </a:p>
+          <a:p>
+            <a:pPr lvl="1"/>
+            <a:r>
+              <a:t>Publishing in academic journals and educational magazines</a:t>
+            </a:r>
+          </a:p>
+          <a:p>
+            <a:pPr lvl="1"/>
+            <a:r>
+              <a:t>Partnerships with local art museums</a:t>
+            </a:r>
+          </a:p>
+          <a:p>
+            <a:pPr lvl="1"/>
+            <a:r>
+              <a:t>Partnerships with other schools</a:t>
             </a:r>
           </a:p>
         </p:txBody>
@@ -4388,78 +5090,117 @@
       <p:grpSpPr/>
       <p:sp>
         <p:nvSpPr>
-          <p:cNvPr id="2" name="Rectangle 1"/>
-          <p:cNvSpPr/>
-          <p:nvPr/>
-        </p:nvSpPr>
-        <p:spPr>
-          <a:xfrm>
-            <a:off x="493095" y="1227"/>
-            <a:ext cx="10515600" cy="1141774"/>
-          </a:xfrm>
-          <a:prstGeom prst="rect">
-            <a:avLst/>
-          </a:prstGeom>
-        </p:spPr>
-        <p:style>
-          <a:lnRef idx="1">
-            <a:schemeClr val="accent1"/>
-          </a:lnRef>
-          <a:fillRef idx="3">
-            <a:schemeClr val="accent1"/>
-          </a:fillRef>
-          <a:effectRef idx="2">
-            <a:schemeClr val="accent1"/>
-          </a:effectRef>
-          <a:fontRef idx="minor">
-            <a:schemeClr val="lt1"/>
-          </a:fontRef>
-        </p:style>
-        <p:txBody>
-          <a:bodyPr rtlCol="0" anchor="ctr"/>
-          <a:lstStyle/>
-          <a:p>
-            <a:r>
-              <a:t>Non-profit PurposesConnecting School Communities and Museums</a:t>
-            </a:r>
-          </a:p>
-        </p:txBody>
-      </p:sp>
-      <p:sp>
-        <p:nvSpPr>
-          <p:cNvPr id="3" name="Rectangle 2"/>
-          <p:cNvSpPr/>
-          <p:nvPr/>
-        </p:nvSpPr>
-        <p:spPr>
-          <a:xfrm>
-            <a:off x="493094" y="1143001"/>
-            <a:ext cx="11332560" cy="4641213"/>
-          </a:xfrm>
-          <a:prstGeom prst="rect">
-            <a:avLst/>
-          </a:prstGeom>
-        </p:spPr>
-        <p:style>
-          <a:lnRef idx="1">
-            <a:schemeClr val="accent1"/>
-          </a:lnRef>
-          <a:fillRef idx="3">
-            <a:schemeClr val="accent1"/>
-          </a:fillRef>
-          <a:effectRef idx="2">
-            <a:schemeClr val="accent1"/>
-          </a:effectRef>
-          <a:fontRef idx="minor">
-            <a:schemeClr val="lt1"/>
-          </a:fontRef>
-        </p:style>
-        <p:txBody>
-          <a:bodyPr rtlCol="0" anchor="ctr"/>
-          <a:lstStyle/>
-          <a:p>
-            <a:r>
-              <a:t>Reproductions shouldn’t be the only art children seeMost masterpiece paintings live in museumsTraveling exhibits bring masterpieces to even smaller cities like AlbuquerqueReserving a section of wall to display the best of local art museums would encourage families to visitRequires working with museum staff to acquire rights and select pieces for displayProvides visibility of museum exhibits to school familiesProvides visibility of school in the wider communityWin-win for families, museum, and schoolStrong partnerships generate opportunity for positive media interest and coverageMuseum staff will likely lead this effort</a:t>
+          <p:cNvPr id="2" name="Title 1"/>
+          <p:cNvSpPr>
+            <a:spLocks noGrp="1"/>
+          </p:cNvSpPr>
+          <p:nvPr>
+            <p:ph type="title"/>
+          </p:nvPr>
+        </p:nvSpPr>
+        <p:spPr>
+          <a:xfrm>
+            <a:off x="493136" y="1189"/>
+            <a:ext cx="10515600" cy="1141811"/>
+          </a:xfrm>
+        </p:spPr>
+        <p:txBody>
+          <a:bodyPr>
+            <a:normAutofit/>
+          </a:bodyPr>
+          <a:lstStyle/>
+          <a:p>
+            <a:r>
+              <a:rPr sz="3600"/>
+              <a:t>Non-profit Purposes</a:t>
+            </a:r>
+            <a:br/>
+            <a:r>
+              <a:rPr sz="3600"/>
+              <a:t>Connecting School Communities and Museums</a:t>
+            </a:r>
+          </a:p>
+        </p:txBody>
+      </p:sp>
+      <p:sp>
+        <p:nvSpPr>
+          <p:cNvPr id="3" name="Content Placeholder 2"/>
+          <p:cNvSpPr>
+            <a:spLocks noGrp="1"/>
+          </p:cNvSpPr>
+          <p:nvPr>
+            <p:ph type="obj" idx="1"/>
+          </p:nvPr>
+        </p:nvSpPr>
+        <p:spPr>
+          <a:xfrm>
+            <a:off x="493136" y="1143000"/>
+            <a:ext cx="11332525" cy="4641220"/>
+          </a:xfrm>
+        </p:spPr>
+        <p:txBody>
+          <a:bodyPr wrap="square">
+            <a:normAutofit fontScale="92500" lnSpcReduction="10000"/>
+          </a:bodyPr>
+          <a:lstStyle/>
+          <a:p>
+            <a:pPr lvl="0"/>
+            <a:r>
+              <a:t>Reproductions shouldn't be the only art children see</a:t>
+            </a:r>
+          </a:p>
+          <a:p>
+            <a:pPr lvl="1"/>
+            <a:r>
+              <a:t>Most masterpiece paintings live in museums</a:t>
+            </a:r>
+          </a:p>
+          <a:p>
+            <a:pPr lvl="1"/>
+            <a:r>
+              <a:t>Traveling exhibits bring masterpieces to even smaller cities like Albuquerque</a:t>
+            </a:r>
+          </a:p>
+          <a:p>
+            <a:pPr lvl="0"/>
+            <a:r>
+              <a:t>Reserving a section of wall to display the best of local art museums would encourage families to visit</a:t>
+            </a:r>
+          </a:p>
+          <a:p>
+            <a:pPr lvl="1"/>
+            <a:r>
+              <a:t>Requires working with museum staff to acquire rights and select pieces for display</a:t>
+            </a:r>
+          </a:p>
+          <a:p>
+            <a:pPr lvl="1"/>
+            <a:r>
+              <a:t>Provides visibility of museum exhibits to school families</a:t>
+            </a:r>
+          </a:p>
+          <a:p>
+            <a:pPr lvl="1"/>
+            <a:r>
+              <a:t>Provides visibility of school in the wider community</a:t>
+            </a:r>
+          </a:p>
+          <a:p>
+            <a:pPr lvl="0"/>
+            <a:r>
+              <a:t>Win-win for families, museum, and school</a:t>
+            </a:r>
+          </a:p>
+          <a:p>
+            <a:pPr lvl="0"/>
+            <a:r>
+              <a:t>Strong partnerships generate opportunity for positive media interest and coverage</a:t>
+            </a:r>
+          </a:p>
+          <a:p>
+            <a:pPr lvl="1"/>
+            <a:r>
+              <a:t>Museum staff will likely lead this effort</a:t>
             </a:r>
           </a:p>
         </p:txBody>
@@ -4484,78 +5225,117 @@
       <p:grpSpPr/>
       <p:sp>
         <p:nvSpPr>
-          <p:cNvPr id="2" name="Rectangle 1"/>
-          <p:cNvSpPr/>
-          <p:nvPr/>
-        </p:nvSpPr>
-        <p:spPr>
-          <a:xfrm>
-            <a:off x="493095" y="1227"/>
-            <a:ext cx="10515600" cy="1141774"/>
-          </a:xfrm>
-          <a:prstGeom prst="rect">
-            <a:avLst/>
-          </a:prstGeom>
-        </p:spPr>
-        <p:style>
-          <a:lnRef idx="1">
-            <a:schemeClr val="accent1"/>
-          </a:lnRef>
-          <a:fillRef idx="3">
-            <a:schemeClr val="accent1"/>
-          </a:fillRef>
-          <a:effectRef idx="2">
-            <a:schemeClr val="accent1"/>
-          </a:effectRef>
-          <a:fontRef idx="minor">
-            <a:schemeClr val="lt1"/>
-          </a:fontRef>
-        </p:style>
-        <p:txBody>
-          <a:bodyPr rtlCol="0" anchor="ctr"/>
-          <a:lstStyle/>
-          <a:p>
-            <a:r>
-              <a:t>Non-profit PurposesConnecting Likeminded School Communities</a:t>
-            </a:r>
-          </a:p>
-        </p:txBody>
-      </p:sp>
-      <p:sp>
-        <p:nvSpPr>
-          <p:cNvPr id="3" name="Rectangle 2"/>
-          <p:cNvSpPr/>
-          <p:nvPr/>
-        </p:nvSpPr>
-        <p:spPr>
-          <a:xfrm>
-            <a:off x="493094" y="1143001"/>
-            <a:ext cx="11332560" cy="4641213"/>
-          </a:xfrm>
-          <a:prstGeom prst="rect">
-            <a:avLst/>
-          </a:prstGeom>
-        </p:spPr>
-        <p:style>
-          <a:lnRef idx="1">
-            <a:schemeClr val="accent1"/>
-          </a:lnRef>
-          <a:fillRef idx="3">
-            <a:schemeClr val="accent1"/>
-          </a:fillRef>
-          <a:effectRef idx="2">
-            <a:schemeClr val="accent1"/>
-          </a:effectRef>
-          <a:fontRef idx="minor">
-            <a:schemeClr val="lt1"/>
-          </a:fontRef>
-        </p:style>
-        <p:txBody>
-          <a:bodyPr rtlCol="0" anchor="ctr"/>
-          <a:lstStyle/>
-          <a:p>
-            <a:r>
-              <a:t>Serve as central resource to connect classical schools that want to implement this ideaProvide planning and logistical support to schools lacking expertiseCan help schools with planning and piece selectionHoly Child has already looked at thousands of paintings and has presentations with hundreds of potential candidatesProvide logistical support to schoolsConnect with Duraplaq and Derek BrooksDevelop connections to companies in other parts of  the country/world as time progressesProvide support to schools looking to circulate loaned paintingsSimilar to how most museums have traveling exhibitsHelp connect schools with their local art community</a:t>
+          <p:cNvPr id="2" name="Title 1"/>
+          <p:cNvSpPr>
+            <a:spLocks noGrp="1"/>
+          </p:cNvSpPr>
+          <p:nvPr>
+            <p:ph type="title"/>
+          </p:nvPr>
+        </p:nvSpPr>
+        <p:spPr>
+          <a:xfrm>
+            <a:off x="493136" y="1189"/>
+            <a:ext cx="10515600" cy="1141811"/>
+          </a:xfrm>
+        </p:spPr>
+        <p:txBody>
+          <a:bodyPr>
+            <a:normAutofit/>
+          </a:bodyPr>
+          <a:lstStyle/>
+          <a:p>
+            <a:r>
+              <a:rPr sz="3600"/>
+              <a:t>Non-profit Purposes</a:t>
+            </a:r>
+            <a:br/>
+            <a:r>
+              <a:rPr sz="3600"/>
+              <a:t>Connecting Likeminded School Communities</a:t>
+            </a:r>
+          </a:p>
+        </p:txBody>
+      </p:sp>
+      <p:sp>
+        <p:nvSpPr>
+          <p:cNvPr id="3" name="Content Placeholder 2"/>
+          <p:cNvSpPr>
+            <a:spLocks noGrp="1"/>
+          </p:cNvSpPr>
+          <p:nvPr>
+            <p:ph type="obj" idx="1"/>
+          </p:nvPr>
+        </p:nvSpPr>
+        <p:spPr>
+          <a:xfrm>
+            <a:off x="493136" y="1143000"/>
+            <a:ext cx="11332525" cy="4641220"/>
+          </a:xfrm>
+        </p:spPr>
+        <p:txBody>
+          <a:bodyPr wrap="square">
+            <a:normAutofit lnSpcReduction="10000"/>
+          </a:bodyPr>
+          <a:lstStyle/>
+          <a:p>
+            <a:pPr lvl="0"/>
+            <a:r>
+              <a:t>Serve as central resource to connect classical schools that want to implement this idea</a:t>
+            </a:r>
+          </a:p>
+          <a:p>
+            <a:pPr lvl="0"/>
+            <a:r>
+              <a:t>Provide planning and logistical support to schools lacking expertise</a:t>
+            </a:r>
+          </a:p>
+          <a:p>
+            <a:pPr lvl="1"/>
+            <a:r>
+              <a:t>Can help schools with planning and piece selection</a:t>
+            </a:r>
+          </a:p>
+          <a:p>
+            <a:pPr lvl="2"/>
+            <a:r>
+              <a:t>Holy Child has already looked at thousands of paintings and has presentations with hundreds of potential candidates</a:t>
+            </a:r>
+          </a:p>
+          <a:p>
+            <a:pPr lvl="1"/>
+            <a:r>
+              <a:t>Provide logistical support to schools</a:t>
+            </a:r>
+          </a:p>
+          <a:p>
+            <a:pPr lvl="2"/>
+            <a:r>
+              <a:t>Connect with Duraplaq and Derek Brooks</a:t>
+            </a:r>
+          </a:p>
+          <a:p>
+            <a:pPr lvl="2"/>
+            <a:r>
+              <a:t>Develop connections to companies in other parts of  the country/world as time progresses</a:t>
+            </a:r>
+          </a:p>
+          <a:p>
+            <a:pPr lvl="0"/>
+            <a:r>
+              <a:t>Provide support to schools looking to circulate loaned paintings</a:t>
+            </a:r>
+          </a:p>
+          <a:p>
+            <a:pPr lvl="1"/>
+            <a:r>
+              <a:t>Similar to how most museums have traveling exhibits</a:t>
+            </a:r>
+          </a:p>
+          <a:p>
+            <a:pPr lvl="0"/>
+            <a:r>
+              <a:t>Help connect schools with their local art community</a:t>
             </a:r>
           </a:p>
         </p:txBody>
@@ -4580,117 +5360,334 @@
       <p:grpSpPr/>
       <p:sp>
         <p:nvSpPr>
-          <p:cNvPr id="2" name="Rectangle 1"/>
-          <p:cNvSpPr/>
+          <p:cNvPr id="2" name="Title 1"/>
+          <p:cNvSpPr>
+            <a:spLocks noGrp="1"/>
+          </p:cNvSpPr>
+          <p:nvPr>
+            <p:ph type="title"/>
+          </p:nvPr>
+        </p:nvSpPr>
+        <p:spPr>
+          <a:xfrm>
+            <a:off x="493136" y="1189"/>
+            <a:ext cx="10515600" cy="1106607"/>
+          </a:xfrm>
+        </p:spPr>
+        <p:txBody>
+          <a:bodyPr>
+            <a:normAutofit/>
+          </a:bodyPr>
+          <a:lstStyle/>
+          <a:p>
+            <a:r>
+              <a:rPr sz="3600"/>
+              <a:t>Starting a Non-profit</a:t>
+            </a:r>
+          </a:p>
+        </p:txBody>
+      </p:sp>
+      <p:sp>
+        <p:nvSpPr>
+          <p:cNvPr id="3" name="Content Placeholder 2"/>
+          <p:cNvSpPr>
+            <a:spLocks noGrp="1"/>
+          </p:cNvSpPr>
+          <p:nvPr>
+            <p:ph type="obj" idx="1"/>
+          </p:nvPr>
+        </p:nvSpPr>
+        <p:spPr>
+          <a:xfrm>
+            <a:off x="562722" y="1182594"/>
+            <a:ext cx="5533309" cy="4462089"/>
+          </a:xfrm>
+        </p:spPr>
+        <p:txBody>
+          <a:bodyPr wrap="square">
+            <a:normAutofit fontScale="92500" lnSpcReduction="20000"/>
+          </a:bodyPr>
+          <a:lstStyle/>
+          <a:p>
+            <a:pPr lvl="0"/>
+            <a:r>
+              <a:t>Decide on purpose for organization and general goals</a:t>
+            </a:r>
+          </a:p>
+          <a:p>
+            <a:pPr lvl="1"/>
+            <a:r>
+              <a:t>Feedback - Disagreement on goals in previous slides or other ideas?</a:t>
+            </a:r>
+          </a:p>
+          <a:p>
+            <a:pPr lvl="0"/>
+            <a:r>
+              <a:t>Select board model</a:t>
+            </a:r>
+          </a:p>
+          <a:p>
+            <a:pPr lvl="0"/>
+            <a:r>
+              <a:t>Recruit and vote on transition board members (with future in mind)</a:t>
+            </a:r>
+          </a:p>
+          <a:p>
+            <a:pPr lvl="1"/>
+            <a:r>
+              <a:t>Highlight business/non-profit experience, time, motivation, and art expertise</a:t>
+            </a:r>
+          </a:p>
+          <a:p>
+            <a:pPr lvl="1"/>
+            <a:r>
+              <a:t>Avoid conflicts of interest</a:t>
+            </a:r>
+          </a:p>
+          <a:p>
+            <a:pPr lvl="1"/>
+            <a:r>
+              <a:t>Decide on committees - both business and art related</a:t>
+            </a:r>
+          </a:p>
+          <a:p>
+            <a:pPr lvl="0"/>
+            <a:r>
+              <a:t>Vote on a name</a:t>
+            </a:r>
+          </a:p>
+        </p:txBody>
+      </p:sp>
+      <p:sp>
+        <p:nvSpPr>
+          <p:cNvPr id="4" name="TextBox 3"/>
+          <p:cNvSpPr txBox="1"/>
           <p:nvPr/>
         </p:nvSpPr>
         <p:spPr>
           <a:xfrm>
-            <a:off x="493095" y="1226"/>
-            <a:ext cx="10515600" cy="1106605"/>
+            <a:off x="5972952" y="1559143"/>
+            <a:ext cx="6134069" cy="4462089"/>
           </a:xfrm>
           <a:prstGeom prst="rect">
             <a:avLst/>
           </a:prstGeom>
-        </p:spPr>
-        <p:style>
-          <a:lnRef idx="1">
-            <a:schemeClr val="accent1"/>
-          </a:lnRef>
-          <a:fillRef idx="3">
-            <a:schemeClr val="accent1"/>
-          </a:fillRef>
-          <a:effectRef idx="2">
-            <a:schemeClr val="accent1"/>
-          </a:effectRef>
-          <a:fontRef idx="minor">
-            <a:schemeClr val="lt1"/>
-          </a:fontRef>
-        </p:style>
-        <p:txBody>
-          <a:bodyPr rtlCol="0" anchor="ctr"/>
-          <a:lstStyle/>
-          <a:p>
-            <a:r>
-              <a:t>Starting a Non-profit</a:t>
-            </a:r>
-          </a:p>
-        </p:txBody>
-      </p:sp>
-      <p:sp>
-        <p:nvSpPr>
-          <p:cNvPr id="3" name="Rectangle 2"/>
-          <p:cNvSpPr/>
-          <p:nvPr/>
-        </p:nvSpPr>
-        <p:spPr>
-          <a:xfrm>
-            <a:off x="562708" y="1182569"/>
-            <a:ext cx="5533292" cy="4462095"/>
-          </a:xfrm>
-          <a:prstGeom prst="rect">
-            <a:avLst/>
-          </a:prstGeom>
-        </p:spPr>
-        <p:style>
-          <a:lnRef idx="1">
-            <a:schemeClr val="accent1"/>
-          </a:lnRef>
-          <a:fillRef idx="3">
-            <a:schemeClr val="accent1"/>
-          </a:fillRef>
-          <a:effectRef idx="2">
-            <a:schemeClr val="accent1"/>
-          </a:effectRef>
-          <a:fontRef idx="minor">
-            <a:schemeClr val="lt1"/>
-          </a:fontRef>
-        </p:style>
-        <p:txBody>
-          <a:bodyPr rtlCol="0" anchor="ctr"/>
-          <a:lstStyle/>
-          <a:p>
-            <a:r>
-              <a:t>Decide on purpose for organization and general goalsFeedback - Disagreement on goals in previous slides or other ideas?Select board modelRecruit and vote on transition board members (with future in mind)Highlight business/non-profit experience, time, motivation, and art expertiseAvoid conflicts of interestDecide on committees - both business and art relatedVote on a name</a:t>
-            </a:r>
-          </a:p>
-        </p:txBody>
-      </p:sp>
-      <p:sp>
-        <p:nvSpPr>
-          <p:cNvPr id="4" name="Rectangle 3"/>
-          <p:cNvSpPr/>
-          <p:nvPr/>
-        </p:nvSpPr>
-        <p:spPr>
-          <a:xfrm>
-            <a:off x="5972908" y="1559171"/>
-            <a:ext cx="6134100" cy="4462095"/>
-          </a:xfrm>
-          <a:prstGeom prst="rect">
-            <a:avLst/>
-          </a:prstGeom>
-        </p:spPr>
-        <p:style>
-          <a:lnRef idx="1">
-            <a:schemeClr val="accent1"/>
-          </a:lnRef>
-          <a:fillRef idx="3">
-            <a:schemeClr val="accent1"/>
-          </a:fillRef>
-          <a:effectRef idx="2">
-            <a:schemeClr val="accent1"/>
-          </a:effectRef>
-          <a:fontRef idx="minor">
-            <a:schemeClr val="lt1"/>
-          </a:fontRef>
-        </p:style>
-        <p:txBody>
-          <a:bodyPr rtlCol="0" anchor="ctr"/>
-          <a:lstStyle/>
-          <a:p>
-            <a:r>
-              <a:t>Set board meeting dates for regular meetingsSet due dates and goals for tasksWrite Articles of Incorporation and BylawsSelect annual meeting date (mostly set in stone)Formally vote on board membersWork with volunteer legal help toSubmit paperwork to state of NMSubmit paperwork to IRSGet training for IRS paperwork and business aspects of tax deductibilityPrioritize art-related projects and get to workCan’t do everything at once – Figure out projects with high impact and low difficulty to begin</a:t>
+          <a:noFill/>
+        </p:spPr>
+        <p:txBody>
+          <a:bodyPr wrap="square" vert="horz" lIns="91440" tIns="45720" rIns="91440" bIns="45720" rtlCol="0">
+            <a:normAutofit fontScale="85000" lnSpcReduction="10000"/>
+          </a:bodyPr>
+          <a:lstStyle>
+            <a:lvl1pPr marL="228600" indent="-228600" algn="l" defTabSz="914400" rtl="0" eaLnBrk="1" latinLnBrk="0" hangingPunct="1">
+              <a:lnSpc>
+                <a:spcPct val="90000"/>
+              </a:lnSpc>
+              <a:spcBef>
+                <a:spcPts val="1000"/>
+              </a:spcBef>
+              <a:buFont typeface="Arial"/>
+              <a:buChar char="•"/>
+              <a:defRPr sz="2800" kern="1200">
+                <a:solidFill>
+                  <a:schemeClr val="tx1"/>
+                </a:solidFill>
+                <a:latin typeface="+mn-lt"/>
+              </a:defRPr>
+            </a:lvl1pPr>
+            <a:lvl2pPr marL="685800" indent="-228600" algn="l" defTabSz="914400" rtl="0" eaLnBrk="1" latinLnBrk="0" hangingPunct="1">
+              <a:lnSpc>
+                <a:spcPct val="90000"/>
+              </a:lnSpc>
+              <a:spcBef>
+                <a:spcPts val="500"/>
+              </a:spcBef>
+              <a:buFont typeface="Arial"/>
+              <a:buChar char="•"/>
+              <a:defRPr sz="2400" kern="1200">
+                <a:solidFill>
+                  <a:schemeClr val="tx1"/>
+                </a:solidFill>
+                <a:latin typeface="+mn-lt"/>
+              </a:defRPr>
+            </a:lvl2pPr>
+            <a:lvl3pPr marL="1143000" indent="-228600" algn="l" defTabSz="914400" rtl="0" eaLnBrk="1" latinLnBrk="0" hangingPunct="1">
+              <a:lnSpc>
+                <a:spcPct val="90000"/>
+              </a:lnSpc>
+              <a:spcBef>
+                <a:spcPts val="500"/>
+              </a:spcBef>
+              <a:buFont typeface="Arial"/>
+              <a:buChar char="•"/>
+              <a:defRPr sz="2000" kern="1200">
+                <a:solidFill>
+                  <a:schemeClr val="tx1"/>
+                </a:solidFill>
+                <a:latin typeface="+mn-lt"/>
+              </a:defRPr>
+            </a:lvl3pPr>
+            <a:lvl4pPr marL="1600200" indent="-228600" algn="l" defTabSz="914400" rtl="0" eaLnBrk="1" latinLnBrk="0" hangingPunct="1">
+              <a:lnSpc>
+                <a:spcPct val="90000"/>
+              </a:lnSpc>
+              <a:spcBef>
+                <a:spcPts val="500"/>
+              </a:spcBef>
+              <a:buFont typeface="Arial"/>
+              <a:buChar char="•"/>
+              <a:defRPr sz="1800" kern="1200">
+                <a:solidFill>
+                  <a:schemeClr val="tx1"/>
+                </a:solidFill>
+                <a:latin typeface="+mn-lt"/>
+              </a:defRPr>
+            </a:lvl4pPr>
+            <a:lvl5pPr marL="2057400" indent="-228600" algn="l" defTabSz="914400" rtl="0" eaLnBrk="1" latinLnBrk="0" hangingPunct="1">
+              <a:lnSpc>
+                <a:spcPct val="90000"/>
+              </a:lnSpc>
+              <a:spcBef>
+                <a:spcPts val="500"/>
+              </a:spcBef>
+              <a:buFont typeface="Arial"/>
+              <a:buChar char="•"/>
+              <a:defRPr sz="1800" kern="1200">
+                <a:solidFill>
+                  <a:schemeClr val="tx1"/>
+                </a:solidFill>
+                <a:latin typeface="+mn-lt"/>
+              </a:defRPr>
+            </a:lvl5pPr>
+            <a:lvl6pPr marL="2514600" indent="-228600" algn="l" defTabSz="914400" rtl="0" eaLnBrk="1" latinLnBrk="0" hangingPunct="1">
+              <a:lnSpc>
+                <a:spcPct val="90000"/>
+              </a:lnSpc>
+              <a:spcBef>
+                <a:spcPts val="500"/>
+              </a:spcBef>
+              <a:buFont typeface="Arial"/>
+              <a:buChar char="•"/>
+              <a:defRPr sz="1800" kern="1200">
+                <a:solidFill>
+                  <a:schemeClr val="tx1"/>
+                </a:solidFill>
+                <a:latin typeface="+mn-lt"/>
+              </a:defRPr>
+            </a:lvl6pPr>
+            <a:lvl7pPr marL="2971800" indent="-228600" algn="l" defTabSz="914400" rtl="0" eaLnBrk="1" latinLnBrk="0" hangingPunct="1">
+              <a:lnSpc>
+                <a:spcPct val="90000"/>
+              </a:lnSpc>
+              <a:spcBef>
+                <a:spcPts val="500"/>
+              </a:spcBef>
+              <a:buFont typeface="Arial"/>
+              <a:buChar char="•"/>
+              <a:defRPr sz="1800" kern="1200">
+                <a:solidFill>
+                  <a:schemeClr val="tx1"/>
+                </a:solidFill>
+                <a:latin typeface="+mn-lt"/>
+              </a:defRPr>
+            </a:lvl7pPr>
+            <a:lvl8pPr marL="3429000" indent="-228600" algn="l" defTabSz="914400" rtl="0" eaLnBrk="1" latinLnBrk="0" hangingPunct="1">
+              <a:lnSpc>
+                <a:spcPct val="90000"/>
+              </a:lnSpc>
+              <a:spcBef>
+                <a:spcPts val="500"/>
+              </a:spcBef>
+              <a:buFont typeface="Arial"/>
+              <a:buChar char="•"/>
+              <a:defRPr sz="1800" kern="1200">
+                <a:solidFill>
+                  <a:schemeClr val="tx1"/>
+                </a:solidFill>
+                <a:latin typeface="+mn-lt"/>
+              </a:defRPr>
+            </a:lvl8pPr>
+            <a:lvl9pPr marL="3886200" indent="-228600" algn="l" defTabSz="914400" rtl="0" eaLnBrk="1" latinLnBrk="0" hangingPunct="1">
+              <a:lnSpc>
+                <a:spcPct val="90000"/>
+              </a:lnSpc>
+              <a:spcBef>
+                <a:spcPts val="500"/>
+              </a:spcBef>
+              <a:buFont typeface="Arial"/>
+              <a:buChar char="•"/>
+              <a:defRPr sz="1800" kern="1200">
+                <a:solidFill>
+                  <a:schemeClr val="tx1"/>
+                </a:solidFill>
+                <a:latin typeface="+mn-lt"/>
+              </a:defRPr>
+            </a:lvl9pPr>
+          </a:lstStyle>
+          <a:p>
+            <a:pPr lvl="0"/>
+            <a:r>
+              <a:t>Set board meeting dates for regular meetings</a:t>
+            </a:r>
+          </a:p>
+          <a:p>
+            <a:pPr lvl="1"/>
+            <a:r>
+              <a:t>Set due dates and goals for tasks</a:t>
+            </a:r>
+          </a:p>
+          <a:p>
+            <a:pPr lvl="0"/>
+            <a:r>
+              <a:t>Write Articles of Incorporation and Bylaws</a:t>
+            </a:r>
+          </a:p>
+          <a:p>
+            <a:pPr lvl="1"/>
+            <a:r>
+              <a:t>Select annual meeting date (mostly set in stone)</a:t>
+            </a:r>
+          </a:p>
+          <a:p>
+            <a:pPr lvl="1"/>
+            <a:r>
+              <a:t>Formally vote on board members</a:t>
+            </a:r>
+          </a:p>
+          <a:p>
+            <a:pPr lvl="0"/>
+            <a:r>
+              <a:t>Work with volunteer legal help to</a:t>
+            </a:r>
+          </a:p>
+          <a:p>
+            <a:pPr lvl="1"/>
+            <a:r>
+              <a:t>Submit paperwork to state of NM</a:t>
+            </a:r>
+          </a:p>
+          <a:p>
+            <a:pPr lvl="1"/>
+            <a:r>
+              <a:t>Submit paperwork to IRS</a:t>
+            </a:r>
+          </a:p>
+          <a:p>
+            <a:pPr lvl="0"/>
+            <a:r>
+              <a:t>Get training for IRS paperwork and business aspects of tax deductibility</a:t>
+            </a:r>
+          </a:p>
+          <a:p>
+            <a:pPr lvl="0"/>
+            <a:r>
+              <a:t>Prioritize art-related projects and get to work</a:t>
+            </a:r>
+          </a:p>
+          <a:p>
+            <a:pPr lvl="1"/>
+            <a:r>
+              <a:t>Can't do everything at once — figure out projects with high impact and low difficulty to begin</a:t>
             </a:r>
           </a:p>
         </p:txBody>
@@ -4706,6 +5703,267 @@
 <file path=ppt/theme/theme1.xml><?xml version="1.0" encoding="utf-8"?>
 <a:theme xmlns:a="http://schemas.openxmlformats.org/drawingml/2006/main" name="Office Theme">
   <a:themeElements>
+    <a:clrScheme name="Office Theme">
+      <a:dk1>
+        <a:sysClr val="windowText" lastClr="000000"/>
+      </a:dk1>
+      <a:lt1>
+        <a:sysClr val="window" lastClr="FFFFFF"/>
+      </a:lt1>
+      <a:dk2>
+        <a:srgbClr val="44546A"/>
+      </a:dk2>
+      <a:lt2>
+        <a:srgbClr val="E7E6E6"/>
+      </a:lt2>
+      <a:accent1>
+        <a:srgbClr val="5B9BD5"/>
+      </a:accent1>
+      <a:accent2>
+        <a:srgbClr val="ED7D31"/>
+      </a:accent2>
+      <a:accent3>
+        <a:srgbClr val="A5A5A5"/>
+      </a:accent3>
+      <a:accent4>
+        <a:srgbClr val="FFC000"/>
+      </a:accent4>
+      <a:accent5>
+        <a:srgbClr val="4472C4"/>
+      </a:accent5>
+      <a:accent6>
+        <a:srgbClr val="70AD47"/>
+      </a:accent6>
+      <a:hlink>
+        <a:srgbClr val="0563C1"/>
+      </a:hlink>
+      <a:folHlink>
+        <a:srgbClr val="954F72"/>
+      </a:folHlink>
+    </a:clrScheme>
+    <a:fontScheme name="Office Theme">
+      <a:majorFont>
+        <a:latin typeface="Calibri Light" panose="020F0302020204030204"/>
+        <a:ea typeface=""/>
+        <a:cs typeface=""/>
+        <a:font script="Jpan" typeface="游ゴシック Light"/>
+        <a:font script="Hang" typeface="맑은 고딕"/>
+        <a:font script="Hans" typeface="等线 Light"/>
+        <a:font script="Hant" typeface="新細明體"/>
+        <a:font script="Arab" typeface="Times New Roman"/>
+        <a:font script="Hebr" typeface="Times New Roman"/>
+        <a:font script="Thai" typeface="Angsana New"/>
+        <a:font script="Ethi" typeface="Nyala"/>
+        <a:font script="Beng" typeface="Vrinda"/>
+        <a:font script="Gujr" typeface="Shruti"/>
+        <a:font script="Khmr" typeface="MoolBoran"/>
+        <a:font script="Knda" typeface="Tunga"/>
+        <a:font script="Guru" typeface="Raavi"/>
+        <a:font script="Cans" typeface="Euphemia"/>
+        <a:font script="Cher" typeface="Plantagenet Cherokee"/>
+        <a:font script="Yiii" typeface="Microsoft Yi Baiti"/>
+        <a:font script="Tibt" typeface="Microsoft Himalaya"/>
+        <a:font script="Thaa" typeface="MV Boli"/>
+        <a:font script="Deva" typeface="Mangal"/>
+        <a:font script="Telu" typeface="Gautami"/>
+        <a:font script="Taml" typeface="Latha"/>
+        <a:font script="Syrc" typeface="Estrangelo Edessa"/>
+        <a:font script="Orya" typeface="Kalinga"/>
+        <a:font script="Mlym" typeface="Kartika"/>
+        <a:font script="Laoo" typeface="DokChampa"/>
+        <a:font script="Sinh" typeface="Iskoola Pota"/>
+        <a:font script="Mong" typeface="Mongolian Baiti"/>
+        <a:font script="Viet" typeface="Times New Roman"/>
+        <a:font script="Uigh" typeface="Microsoft Uighur"/>
+        <a:font script="Geor" typeface="Sylfaen"/>
+      </a:majorFont>
+      <a:minorFont>
+        <a:latin typeface="Calibri" panose="020F0502020204030204"/>
+        <a:ea typeface=""/>
+        <a:cs typeface=""/>
+        <a:font script="Jpan" typeface="游ゴシック"/>
+        <a:font script="Hang" typeface="맑은 고딕"/>
+        <a:font script="Hans" typeface="等线"/>
+        <a:font script="Hant" typeface="新細明體"/>
+        <a:font script="Arab" typeface="Arial"/>
+        <a:font script="Hebr" typeface="Arial"/>
+        <a:font script="Thai" typeface="Cordia New"/>
+        <a:font script="Ethi" typeface="Nyala"/>
+        <a:font script="Beng" typeface="Vrinda"/>
+        <a:font script="Gujr" typeface="Shruti"/>
+        <a:font script="Khmr" typeface="DaunPenh"/>
+        <a:font script="Knda" typeface="Tunga"/>
+        <a:font script="Guru" typeface="Raavi"/>
+        <a:font script="Cans" typeface="Euphemia"/>
+        <a:font script="Cher" typeface="Plantagenet Cherokee"/>
+        <a:font script="Yiii" typeface="Microsoft Yi Baiti"/>
+        <a:font script="Tibt" typeface="Microsoft Himalaya"/>
+        <a:font script="Thaa" typeface="MV Boli"/>
+        <a:font script="Deva" typeface="Mangal"/>
+        <a:font script="Telu" typeface="Gautami"/>
+        <a:font script="Taml" typeface="Latha"/>
+        <a:font script="Syrc" typeface="Estrangelo Edessa"/>
+        <a:font script="Orya" typeface="Kalinga"/>
+        <a:font script="Mlym" typeface="Kartika"/>
+        <a:font script="Laoo" typeface="DokChampa"/>
+        <a:font script="Sinh" typeface="Iskoola Pota"/>
+        <a:font script="Mong" typeface="Mongolian Baiti"/>
+        <a:font script="Viet" typeface="Arial"/>
+        <a:font script="Uigh" typeface="Microsoft Uighur"/>
+        <a:font script="Geor" typeface="Sylfaen"/>
+      </a:minorFont>
+    </a:fontScheme>
+    <a:fmtScheme name="Office Theme">
+      <a:fillStyleLst>
+        <a:solidFill>
+          <a:schemeClr val="phClr"/>
+        </a:solidFill>
+        <a:gradFill rotWithShape="1">
+          <a:gsLst>
+            <a:gs pos="0">
+              <a:schemeClr val="phClr">
+                <a:lumMod val="110000"/>
+                <a:satMod val="105000"/>
+                <a:tint val="67000"/>
+              </a:schemeClr>
+            </a:gs>
+            <a:gs pos="50000">
+              <a:schemeClr val="phClr">
+                <a:lumMod val="105000"/>
+                <a:satMod val="103000"/>
+                <a:tint val="73000"/>
+              </a:schemeClr>
+            </a:gs>
+            <a:gs pos="100000">
+              <a:schemeClr val="phClr">
+                <a:lumMod val="105000"/>
+                <a:satMod val="109000"/>
+                <a:tint val="81000"/>
+              </a:schemeClr>
+            </a:gs>
+          </a:gsLst>
+          <a:lin ang="5400000" scaled="0"/>
+        </a:gradFill>
+        <a:gradFill rotWithShape="1">
+          <a:gsLst>
+            <a:gs pos="0">
+              <a:schemeClr val="phClr">
+                <a:satMod val="103000"/>
+                <a:lumMod val="102000"/>
+                <a:tint val="94000"/>
+              </a:schemeClr>
+            </a:gs>
+            <a:gs pos="50000">
+              <a:schemeClr val="phClr">
+                <a:satMod val="110000"/>
+                <a:lumMod val="100000"/>
+                <a:shade val="100000"/>
+              </a:schemeClr>
+            </a:gs>
+            <a:gs pos="100000">
+              <a:schemeClr val="phClr">
+                <a:lumMod val="99000"/>
+                <a:satMod val="120000"/>
+                <a:shade val="78000"/>
+              </a:schemeClr>
+            </a:gs>
+          </a:gsLst>
+          <a:lin ang="5400000" scaled="0"/>
+        </a:gradFill>
+      </a:fillStyleLst>
+      <a:lnStyleLst>
+        <a:ln w="6350" cap="flat" cmpd="sng" algn="ctr">
+          <a:solidFill>
+            <a:schemeClr val="phClr"/>
+          </a:solidFill>
+          <a:prstDash val="solid"/>
+          <a:miter lim="800000"/>
+        </a:ln>
+        <a:ln w="12700" cap="flat" cmpd="sng" algn="ctr">
+          <a:solidFill>
+            <a:schemeClr val="phClr"/>
+          </a:solidFill>
+          <a:prstDash val="solid"/>
+          <a:miter lim="800000"/>
+        </a:ln>
+        <a:ln w="19050" cap="flat" cmpd="sng" algn="ctr">
+          <a:solidFill>
+            <a:schemeClr val="phClr"/>
+          </a:solidFill>
+          <a:prstDash val="solid"/>
+          <a:miter lim="800000"/>
+        </a:ln>
+      </a:lnStyleLst>
+      <a:effectStyleLst>
+        <a:effectStyle>
+          <a:effectLst/>
+        </a:effectStyle>
+        <a:effectStyle>
+          <a:effectLst/>
+        </a:effectStyle>
+        <a:effectStyle>
+          <a:effectLst>
+            <a:outerShdw blurRad="57150" dist="19050" dir="5400000" algn="ctr" rotWithShape="0">
+              <a:srgbClr val="000000">
+                <a:alpha val="63000"/>
+              </a:srgbClr>
+            </a:outerShdw>
+          </a:effectLst>
+        </a:effectStyle>
+      </a:effectStyleLst>
+      <a:bgFillStyleLst>
+        <a:solidFill>
+          <a:schemeClr val="phClr"/>
+        </a:solidFill>
+        <a:solidFill>
+          <a:schemeClr val="phClr">
+            <a:tint val="95000"/>
+            <a:satMod val="170000"/>
+          </a:schemeClr>
+        </a:solidFill>
+        <a:gradFill rotWithShape="1">
+          <a:gsLst>
+            <a:gs pos="0">
+              <a:schemeClr val="phClr">
+                <a:tint val="93000"/>
+                <a:satMod val="150000"/>
+                <a:shade val="98000"/>
+                <a:lumMod val="102000"/>
+              </a:schemeClr>
+            </a:gs>
+            <a:gs pos="50000">
+              <a:schemeClr val="phClr">
+                <a:tint val="98000"/>
+                <a:satMod val="130000"/>
+                <a:shade val="90000"/>
+                <a:lumMod val="103000"/>
+              </a:schemeClr>
+            </a:gs>
+            <a:gs pos="100000">
+              <a:schemeClr val="phClr">
+                <a:shade val="63000"/>
+                <a:satMod val="120000"/>
+              </a:schemeClr>
+            </a:gs>
+          </a:gsLst>
+          <a:lin ang="5400000" scaled="0"/>
+        </a:gradFill>
+      </a:bgFillStyleLst>
+    </a:fmtScheme>
+  </a:themeElements>
+  <a:objectDefaults/>
+  <a:extraClrSchemeLst/>
+  <a:extLst>
+    <a:ext uri="{05A4C25C-085E-4340-85A3-A5531E510DB2}">
+      <thm15:themeFamily xmlns:thm15="http://schemas.microsoft.com/office/thememl/2012/main" name="Office Theme" id="{62F939B6-93AF-4DB8-9C6B-D6C7DFDC589F}" vid="{4A3C46E8-61CC-4603-A589-7422A47A8E4A}"/>
+    </a:ext>
+  </a:extLst>
+</a:theme>
+</file>
+
+<file path=ppt/theme/theme2.xml><?xml version="1.0" encoding="utf-8"?>
+<a:theme xmlns:a="http://schemas.openxmlformats.org/drawingml/2006/main" name="Office Theme">
+  <a:themeElements>
     <a:clrScheme name="Office">
       <a:dk1>
         <a:sysClr val="windowText" lastClr="000000"/>
@@ -4714,39 +5972,39 @@
         <a:sysClr val="window" lastClr="FFFFFF"/>
       </a:lt1>
       <a:dk2>
-        <a:srgbClr val="1F497D"/>
+        <a:srgbClr val="44546A"/>
       </a:dk2>
       <a:lt2>
-        <a:srgbClr val="EEECE1"/>
+        <a:srgbClr val="E7E6E6"/>
       </a:lt2>
       <a:accent1>
-        <a:srgbClr val="4F81BD"/>
+        <a:srgbClr val="5B9BD5"/>
       </a:accent1>
       <a:accent2>
-        <a:srgbClr val="C0504D"/>
+        <a:srgbClr val="ED7D31"/>
       </a:accent2>
       <a:accent3>
-        <a:srgbClr val="9BBB59"/>
+        <a:srgbClr val="A5A5A5"/>
       </a:accent3>
       <a:accent4>
-        <a:srgbClr val="8064A2"/>
+        <a:srgbClr val="FFC000"/>
       </a:accent4>
       <a:accent5>
-        <a:srgbClr val="4BACC6"/>
+        <a:srgbClr val="4472C4"/>
       </a:accent5>
       <a:accent6>
-        <a:srgbClr val="F79646"/>
+        <a:srgbClr val="70AD47"/>
       </a:accent6>
       <a:hlink>
-        <a:srgbClr val="0000FF"/>
+        <a:srgbClr val="0563C1"/>
       </a:hlink>
       <a:folHlink>
-        <a:srgbClr val="800080"/>
+        <a:srgbClr val="954F72"/>
       </a:folHlink>
     </a:clrScheme>
     <a:fontScheme name="Office">
       <a:majorFont>
-        <a:latin typeface="Calibri"/>
+        <a:latin typeface="Calibri Light" panose="020F0302020204030204"/>
         <a:ea typeface=""/>
         <a:cs typeface=""/>
         <a:font script="Jpan" typeface="ＭＳ Ｐゴシック"/>
@@ -4781,7 +6039,7 @@
         <a:font script="Geor" typeface="Sylfaen"/>
       </a:majorFont>
       <a:minorFont>
-        <a:latin typeface="Calibri"/>
+        <a:latin typeface="Calibri" panose="020F0502020204030204"/>
         <a:ea typeface=""/>
         <a:cs typeface=""/>
         <a:font script="Jpan" typeface="ＭＳ Ｐゴシック"/>
@@ -4825,200 +6083,141 @@
           <a:gsLst>
             <a:gs pos="0">
               <a:schemeClr val="phClr">
-                <a:tint val="50000"/>
-                <a:satMod val="300000"/>
+                <a:lumMod val="110000"/>
+                <a:satMod val="105000"/>
+                <a:tint val="67000"/>
               </a:schemeClr>
             </a:gs>
-            <a:gs pos="35000">
+            <a:gs pos="50000">
               <a:schemeClr val="phClr">
-                <a:tint val="37000"/>
-                <a:satMod val="300000"/>
+                <a:lumMod val="105000"/>
+                <a:satMod val="103000"/>
+                <a:tint val="73000"/>
               </a:schemeClr>
             </a:gs>
             <a:gs pos="100000">
               <a:schemeClr val="phClr">
-                <a:tint val="15000"/>
-                <a:satMod val="350000"/>
+                <a:lumMod val="105000"/>
+                <a:satMod val="109000"/>
+                <a:tint val="81000"/>
               </a:schemeClr>
             </a:gs>
           </a:gsLst>
-          <a:lin ang="16200000" scaled="1"/>
+          <a:lin ang="5400000" scaled="0"/>
         </a:gradFill>
         <a:gradFill rotWithShape="1">
           <a:gsLst>
             <a:gs pos="0">
               <a:schemeClr val="phClr">
-                <a:tint val="100000"/>
+                <a:satMod val="103000"/>
+                <a:lumMod val="102000"/>
+                <a:tint val="94000"/>
+              </a:schemeClr>
+            </a:gs>
+            <a:gs pos="50000">
+              <a:schemeClr val="phClr">
+                <a:satMod val="110000"/>
+                <a:lumMod val="100000"/>
                 <a:shade val="100000"/>
-                <a:satMod val="130000"/>
               </a:schemeClr>
             </a:gs>
             <a:gs pos="100000">
               <a:schemeClr val="phClr">
-                <a:tint val="50000"/>
-                <a:shade val="100000"/>
-                <a:satMod val="350000"/>
+                <a:lumMod val="99000"/>
+                <a:satMod val="120000"/>
+                <a:shade val="78000"/>
               </a:schemeClr>
             </a:gs>
           </a:gsLst>
-          <a:lin ang="16200000" scaled="0"/>
+          <a:lin ang="5400000" scaled="0"/>
         </a:gradFill>
       </a:fillStyleLst>
       <a:lnStyleLst>
-        <a:ln w="9525" cap="flat" cmpd="sng" algn="ctr">
-          <a:solidFill>
-            <a:schemeClr val="phClr">
-              <a:shade val="95000"/>
-              <a:satMod val="105000"/>
-            </a:schemeClr>
-          </a:solidFill>
-          <a:prstDash val="solid"/>
-        </a:ln>
-        <a:ln w="25400" cap="flat" cmpd="sng" algn="ctr">
+        <a:ln w="6350" cap="flat" cmpd="sng" algn="ctr">
           <a:solidFill>
             <a:schemeClr val="phClr"/>
           </a:solidFill>
           <a:prstDash val="solid"/>
+          <a:miter lim="800000"/>
         </a:ln>
-        <a:ln w="38100" cap="flat" cmpd="sng" algn="ctr">
+        <a:ln w="12700" cap="flat" cmpd="sng" algn="ctr">
           <a:solidFill>
             <a:schemeClr val="phClr"/>
           </a:solidFill>
           <a:prstDash val="solid"/>
+          <a:miter lim="800000"/>
+        </a:ln>
+        <a:ln w="19050" cap="flat" cmpd="sng" algn="ctr">
+          <a:solidFill>
+            <a:schemeClr val="phClr"/>
+          </a:solidFill>
+          <a:prstDash val="solid"/>
+          <a:miter lim="800000"/>
         </a:ln>
       </a:lnStyleLst>
       <a:effectStyleLst>
         <a:effectStyle>
+          <a:effectLst/>
+        </a:effectStyle>
+        <a:effectStyle>
+          <a:effectLst/>
+        </a:effectStyle>
+        <a:effectStyle>
           <a:effectLst>
-            <a:outerShdw blurRad="40000" dist="20000" dir="5400000" rotWithShape="0">
+            <a:outerShdw blurRad="57150" dist="19050" dir="5400000" algn="ctr" rotWithShape="0">
               <a:srgbClr val="000000">
-                <a:alpha val="38000"/>
+                <a:alpha val="63000"/>
               </a:srgbClr>
             </a:outerShdw>
           </a:effectLst>
-        </a:effectStyle>
-        <a:effectStyle>
-          <a:effectLst>
-            <a:outerShdw blurRad="40000" dist="23000" dir="5400000" rotWithShape="0">
-              <a:srgbClr val="000000">
-                <a:alpha val="35000"/>
-              </a:srgbClr>
-            </a:outerShdw>
-          </a:effectLst>
-        </a:effectStyle>
-        <a:effectStyle>
-          <a:effectLst>
-            <a:outerShdw blurRad="40000" dist="23000" dir="5400000" rotWithShape="0">
-              <a:srgbClr val="000000">
-                <a:alpha val="35000"/>
-              </a:srgbClr>
-            </a:outerShdw>
-          </a:effectLst>
-          <a:scene3d>
-            <a:camera prst="orthographicFront">
-              <a:rot lat="0" lon="0" rev="0"/>
-            </a:camera>
-            <a:lightRig rig="threePt" dir="t">
-              <a:rot lat="0" lon="0" rev="1200000"/>
-            </a:lightRig>
-          </a:scene3d>
-          <a:sp3d>
-            <a:bevelT w="63500" h="25400"/>
-          </a:sp3d>
         </a:effectStyle>
       </a:effectStyleLst>
       <a:bgFillStyleLst>
         <a:solidFill>
           <a:schemeClr val="phClr"/>
         </a:solidFill>
+        <a:solidFill>
+          <a:schemeClr val="phClr">
+            <a:tint val="95000"/>
+            <a:satMod val="170000"/>
+          </a:schemeClr>
+        </a:solidFill>
         <a:gradFill rotWithShape="1">
           <a:gsLst>
             <a:gs pos="0">
               <a:schemeClr val="phClr">
-                <a:tint val="40000"/>
-                <a:satMod val="350000"/>
+                <a:tint val="93000"/>
+                <a:satMod val="150000"/>
+                <a:shade val="98000"/>
+                <a:lumMod val="102000"/>
               </a:schemeClr>
             </a:gs>
-            <a:gs pos="40000">
+            <a:gs pos="50000">
               <a:schemeClr val="phClr">
-                <a:tint val="45000"/>
-                <a:shade val="99000"/>
-                <a:satMod val="350000"/>
+                <a:tint val="98000"/>
+                <a:satMod val="130000"/>
+                <a:shade val="90000"/>
+                <a:lumMod val="103000"/>
               </a:schemeClr>
             </a:gs>
             <a:gs pos="100000">
               <a:schemeClr val="phClr">
-                <a:shade val="20000"/>
-                <a:satMod val="255000"/>
+                <a:shade val="63000"/>
+                <a:satMod val="120000"/>
               </a:schemeClr>
             </a:gs>
           </a:gsLst>
-          <a:path path="circle">
-            <a:fillToRect l="50000" t="-80000" r="50000" b="180000"/>
-          </a:path>
-        </a:gradFill>
-        <a:gradFill rotWithShape="1">
-          <a:gsLst>
-            <a:gs pos="0">
-              <a:schemeClr val="phClr">
-                <a:tint val="80000"/>
-                <a:satMod val="300000"/>
-              </a:schemeClr>
-            </a:gs>
-            <a:gs pos="100000">
-              <a:schemeClr val="phClr">
-                <a:shade val="30000"/>
-                <a:satMod val="200000"/>
-              </a:schemeClr>
-            </a:gs>
-          </a:gsLst>
-          <a:path path="circle">
-            <a:fillToRect l="50000" t="50000" r="50000" b="50000"/>
-          </a:path>
+          <a:lin ang="5400000" scaled="0"/>
         </a:gradFill>
       </a:bgFillStyleLst>
     </a:fmtScheme>
   </a:themeElements>
-  <a:objectDefaults>
-    <a:spDef>
-      <a:spPr/>
-      <a:bodyPr/>
-      <a:lstStyle/>
-      <a:style>
-        <a:lnRef idx="1">
-          <a:schemeClr val="accent1"/>
-        </a:lnRef>
-        <a:fillRef idx="3">
-          <a:schemeClr val="accent1"/>
-        </a:fillRef>
-        <a:effectRef idx="2">
-          <a:schemeClr val="accent1"/>
-        </a:effectRef>
-        <a:fontRef idx="minor">
-          <a:schemeClr val="lt1"/>
-        </a:fontRef>
-      </a:style>
-    </a:spDef>
-    <a:lnDef>
-      <a:spPr/>
-      <a:bodyPr/>
-      <a:lstStyle/>
-      <a:style>
-        <a:lnRef idx="2">
-          <a:schemeClr val="accent1"/>
-        </a:lnRef>
-        <a:fillRef idx="0">
-          <a:schemeClr val="accent1"/>
-        </a:fillRef>
-        <a:effectRef idx="1">
-          <a:schemeClr val="accent1"/>
-        </a:effectRef>
-        <a:fontRef idx="minor">
-          <a:schemeClr val="tx1"/>
-        </a:fontRef>
-      </a:style>
-    </a:lnDef>
-  </a:objectDefaults>
+  <a:objectDefaults/>
   <a:extraClrSchemeLst/>
+  <a:extLst>
+    <a:ext uri="{05A4C25C-085E-4340-85A3-A5531E510DB2}">
+      <thm15:themeFamily xmlns:thm15="http://schemas.microsoft.com/office/thememl/2012/main" name="Office Theme" id="{62F939B6-93AF-4DB8-9C6B-D6C7DFDC589F}" vid="{4A3C46E8-61CC-4603-A589-7422A47A8E4A}"/>
+    </a:ext>
+  </a:extLst>
 </a:theme>
 </file>